--- a/docs/IMPACT-Release-1-Demo.pptx
+++ b/docs/IMPACT-Release-1-Demo.pptx
@@ -18,9 +18,10 @@
     <p:sldId id="266" r:id="rId12"/>
     <p:sldId id="267" r:id="rId13"/>
     <p:sldId id="268" r:id="rId14"/>
+    <p:sldId id="269" r:id="rId15"/>
   </p:sldIdLst>
   <p:notesMasterIdLst>
-    <p:notesMasterId r:id="rId15"/>
+    <p:notesMasterId r:id="rId16"/>
   </p:notesMasterIdLst>
   <p:sldSz cx="9144000" cy="5143500"/>
   <p:notesSz cx="5143500" cy="9144000"/>
@@ -602,7 +603,7 @@
           <a:p>
             <a:r>
               <a:rPr lang="en-US" dirty="0"/>
-              <a:t>The weekly check-in is the keystone — reminders, coach alerts and the final report all hang off it.</a:t>
+              <a:t>The 54 blank practice pages are now a visible number on the Staff page. That is content work for coaches, not code.</a:t>
             </a:r>
             <a:endParaRPr lang="en-US" dirty="0"/>
           </a:p>
@@ -690,7 +691,7 @@
           <a:p>
             <a:r>
               <a:rPr lang="en-US" dirty="0"/>
-              <a:t>Release 3 is where the Eastwood Passport finally gets fed automatically.</a:t>
+              <a:t>The weekly check-in is the keystone — reminders, coach alerts and the final report all hang off it.</a:t>
             </a:r>
             <a:endParaRPr lang="en-US" dirty="0"/>
           </a:p>
@@ -778,7 +779,7 @@
           <a:p>
             <a:r>
               <a:rPr lang="en-US" dirty="0"/>
-              <a:t>Push for a decision on phase names and the AI tool. Those two block the most.</a:t>
+              <a:t>Release 3 is where the Eastwood Passport finally gets fed automatically.</a:t>
             </a:r>
             <a:endParaRPr lang="en-US" dirty="0"/>
           </a:p>
@@ -866,7 +867,7 @@
           <a:p>
             <a:r>
               <a:rPr lang="en-US" dirty="0"/>
-              <a:t>Student: s.ferrand@demo.eastwoodmontreux.ch · Coach: r.chevalley@demo.eastwoodmontreux.ch · Admin: demo@demo.eastwoodmontreux.ch · password impact-demo-2026. The nine-person cohort is sample data.</a:t>
+              <a:t>Push for a decision on phase names and the AI tool. Those two block the most.</a:t>
             </a:r>
             <a:endParaRPr lang="en-US" dirty="0"/>
           </a:p>
@@ -890,6 +891,94 @@
             <a:fld id="{F7021451-1387-4CA6-816F-3879F97B5CBC}" type="slidenum">
               <a:rPr lang="en-US"/>
               <a:t>13</a:t>
+            </a:fld>
+            <a:endParaRPr lang="en-US"/>
+          </a:p>
+        </p:txBody>
+      </p:sp>
+    </p:spTree>
+    <p:extLst>
+      <p:ext uri="{BB962C8B-B14F-4D97-AF65-F5344CB8AC3E}">
+        <p14:creationId xmlns:p14="http://schemas.microsoft.com/office/powerpoint/2010/main" val="1024086991"/>
+      </p:ext>
+    </p:extLst>
+  </p:cSld>
+  <p:clrMapOvr>
+    <a:masterClrMapping/>
+  </p:clrMapOvr>
+</p:notes>
+</file>
+
+<file path=ppt/notesSlides/notesSlide14.xml><?xml version="1.0" encoding="utf-8"?>
+<p:notes xmlns:a="http://schemas.openxmlformats.org/drawingml/2006/main" xmlns:r="http://schemas.openxmlformats.org/officeDocument/2006/relationships" xmlns:p="http://schemas.openxmlformats.org/presentationml/2006/main">
+  <p:cSld>
+    <p:spTree>
+      <p:nvGrpSpPr>
+        <p:cNvPr id="1" name=""/>
+        <p:cNvGrpSpPr/>
+        <p:nvPr/>
+      </p:nvGrpSpPr>
+      <p:grpSpPr>
+        <a:xfrm>
+          <a:off x="0" y="0"/>
+          <a:ext cx="0" cy="0"/>
+          <a:chOff x="0" y="0"/>
+          <a:chExt cx="0" cy="0"/>
+        </a:xfrm>
+      </p:grpSpPr>
+      <p:sp>
+        <p:nvSpPr>
+          <p:cNvPr id="2" name="Slide Image Placeholder 1"/>
+          <p:cNvSpPr>
+            <a:spLocks noGrp="1" noRot="1" noChangeAspect="1"/>
+          </p:cNvSpPr>
+          <p:nvPr>
+            <p:ph type="sldImg"/>
+          </p:nvPr>
+        </p:nvSpPr>
+        <p:spPr/>
+      </p:sp>
+      <p:sp>
+        <p:nvSpPr>
+          <p:cNvPr id="3" name="Notes Placeholder 2"/>
+          <p:cNvSpPr>
+            <a:spLocks noGrp="1"/>
+          </p:cNvSpPr>
+          <p:nvPr>
+            <p:ph type="body" idx="1"/>
+          </p:nvPr>
+        </p:nvSpPr>
+        <p:spPr/>
+        <p:txBody>
+          <a:bodyPr/>
+          <a:lstStyle/>
+          <a:p>
+            <a:r>
+              <a:rPr lang="en-US" dirty="0"/>
+              <a:t>Student: alexander.malinsky@eastwood.global · Coach: matthias@eastwood.global · Admin: admin@eastwood.global · password impact-demo-2026. One project in the system: this platform itself, written end to end and true as of today.</a:t>
+            </a:r>
+            <a:endParaRPr lang="en-US" dirty="0"/>
+          </a:p>
+        </p:txBody>
+      </p:sp>
+      <p:sp>
+        <p:nvSpPr>
+          <p:cNvPr id="4" name="Slide Number Placeholder 3"/>
+          <p:cNvSpPr>
+            <a:spLocks noGrp="1"/>
+          </p:cNvSpPr>
+          <p:nvPr>
+            <p:ph type="sldNum" sz="quarter" idx="10"/>
+          </p:nvPr>
+        </p:nvSpPr>
+        <p:spPr/>
+        <p:txBody>
+          <a:bodyPr/>
+          <a:lstStyle/>
+          <a:p>
+            <a:fld id="{F7021451-1387-4CA6-816F-3879F97B5CBC}" type="slidenum">
+              <a:rPr lang="en-US"/>
+              <a:t>14</a:t>
             </a:fld>
             <a:endParaRPr lang="en-US"/>
           </a:p>
@@ -1042,7 +1131,7 @@
           <a:p>
             <a:r>
               <a:rPr lang="en-US" dirty="0"/>
-              <a:t>This is the whole philosophical change. A project with no answer to question three is an activity, not a project.</a:t>
+              <a:t>This is the whole philosophical change. A project with no answer to question three is an activity, not a project. The proposal on screen is this platform's own — it is in the system as a project like any other.</a:t>
             </a:r>
             <a:endParaRPr lang="en-US" dirty="0"/>
           </a:p>
@@ -1218,7 +1307,7 @@
           <a:p>
             <a:r>
               <a:rPr lang="en-US" dirty="0"/>
-              <a:t>Green = validated in the demo project. Sofia sits at level 6 with evidence in the coach's queue — you can validate it live.</a:t>
+              <a:t>Green = validated in the demo project. Alexander sits at level 6 with evidence in the coach's queue — you can validate it live.</a:t>
             </a:r>
             <a:endParaRPr lang="en-US" dirty="0"/>
           </a:p>
@@ -1306,7 +1395,7 @@
           <a:p>
             <a:r>
               <a:rPr lang="en-US" dirty="0"/>
-              <a:t>Step 5 is the moment. Validate from the coach queue, switch back to Sofia, level 7 is open. Say the cohort is sample data.</a:t>
+              <a:t>Step 6 is the moment. Validate from the coach queue, switch back to Alexander, level 7 is open. Say plainly that the project on screen is this platform itself, and that the five tracked projects are demo projects, not real students — the evidence note in the system says so too.</a:t>
             </a:r>
             <a:endParaRPr lang="en-US" dirty="0"/>
           </a:p>
@@ -1482,7 +1571,7 @@
           <a:p>
             <a:r>
               <a:rPr lang="en-US" dirty="0"/>
-              <a:t>Nine issues listed, nine closed. The personal email in the user list is the tenth — still there as a real account, no projects attached.</a:t>
+              <a:t>The withdrawal rule is the handbook's, not a product decision: the Commitment Charter binds a student to finish unless a coach-led review says otherwise, so the system makes leaving deliberate and keeps the reason. Deleting the row would have destroyed the proposal, evidence and reflections with it.</a:t>
             </a:r>
             <a:endParaRPr lang="en-US" dirty="0"/>
           </a:p>
@@ -1570,7 +1659,7 @@
           <a:p>
             <a:r>
               <a:rPr lang="en-US" dirty="0"/>
-              <a:t>The 54 blank practice pages are now a visible number on the Staff page. That is content work for coaches, not code.</a:t>
+              <a:t>Nine issues listed, nine closed. The personal email in the user list is the tenth — still there as a real account, no projects attached.</a:t>
             </a:r>
             <a:endParaRPr lang="en-US" dirty="0"/>
           </a:p>
@@ -2306,7 +2395,7 @@
     <p:bg>
       <p:bgPr>
         <a:solidFill>
-          <a:srgbClr val="F6F5FA"/>
+          <a:srgbClr val="000077"/>
         </a:solidFill>
       </p:bgPr>
     </p:bg>
@@ -2324,172 +2413,26 @@
           <a:chExt cx="0" cy="0"/>
         </a:xfrm>
       </p:grpSpPr>
-      <p:sp>
-        <p:nvSpPr>
-          <p:cNvPr id="2" name="Text 0"/>
-          <p:cNvSpPr txBox="1"/>
-          <p:nvPr/>
-        </p:nvSpPr>
-        <p:spPr>
-          <a:xfrm>
-            <a:off x="457200" y="457200"/>
-            <a:ext cx="3657600" cy="228600"/>
-          </a:xfrm>
-          <a:prstGeom prst="rect">
-            <a:avLst/>
-          </a:prstGeom>
-          <a:noFill/>
-          <a:ln/>
-        </p:spPr>
-        <p:txBody>
-          <a:bodyPr wrap="square" lIns="0" tIns="0" rIns="0" bIns="0" rtlCol="0" anchor="ctr"/>
-          <a:lstStyle/>
-          <a:p>
-            <a:pPr indent="0" marL="0">
-              <a:buNone/>
-            </a:pPr>
-            <a:r>
-              <a:rPr lang="en-US" sz="950" b="1" spc="300" kern="0" dirty="0">
-                <a:solidFill>
-                  <a:srgbClr val="500591"/>
-                </a:solidFill>
-                <a:latin typeface="Arial" pitchFamily="34" charset="0"/>
-                <a:ea typeface="Arial" pitchFamily="34" charset="-122"/>
-                <a:cs typeface="Arial" pitchFamily="34" charset="-120"/>
-              </a:rPr>
-              <a:t>NEXT · RELEASE 2</a:t>
-            </a:r>
-            <a:endParaRPr lang="en-US" sz="950" dirty="0"/>
-          </a:p>
-        </p:txBody>
-      </p:sp>
-      <p:sp>
-        <p:nvSpPr>
-          <p:cNvPr id="3" name="Text 1"/>
-          <p:cNvSpPr txBox="1"/>
-          <p:nvPr/>
-        </p:nvSpPr>
-        <p:spPr>
-          <a:xfrm>
-            <a:off x="457200" y="731520"/>
-            <a:ext cx="8229600" cy="548640"/>
-          </a:xfrm>
-          <a:prstGeom prst="rect">
-            <a:avLst/>
-          </a:prstGeom>
-          <a:noFill/>
-          <a:ln/>
-        </p:spPr>
-        <p:txBody>
-          <a:bodyPr wrap="square" lIns="0" tIns="0" rIns="0" bIns="0" rtlCol="0" anchor="t"/>
-          <a:lstStyle/>
-          <a:p>
-            <a:pPr indent="0" marL="0">
-              <a:lnSpc>
-                <a:spcPct val="106000"/>
-              </a:lnSpc>
-              <a:buNone/>
-            </a:pPr>
-            <a:r>
-              <a:rPr lang="en-US" sz="2700" b="1" dirty="0">
-                <a:solidFill>
-                  <a:srgbClr val="14142B"/>
-                </a:solidFill>
-                <a:latin typeface="Arial" pitchFamily="34" charset="0"/>
-                <a:ea typeface="Arial" pitchFamily="34" charset="-122"/>
-                <a:cs typeface="Arial" pitchFamily="34" charset="-120"/>
-              </a:rPr>
-              <a:t>Execute, with coaches in the loop.</a:t>
-            </a:r>
-            <a:endParaRPr lang="en-US" sz="2700" dirty="0"/>
-          </a:p>
-        </p:txBody>
-      </p:sp>
-      <p:sp>
-        <p:nvSpPr>
-          <p:cNvPr id="4" name="Text 2"/>
-          <p:cNvSpPr txBox="1"/>
-          <p:nvPr/>
-        </p:nvSpPr>
-        <p:spPr>
-          <a:xfrm>
-            <a:off x="457200" y="1298448"/>
-            <a:ext cx="7863840" cy="320040"/>
-          </a:xfrm>
-          <a:prstGeom prst="rect">
-            <a:avLst/>
-          </a:prstGeom>
-          <a:noFill/>
-          <a:ln/>
-        </p:spPr>
-        <p:txBody>
-          <a:bodyPr wrap="square" lIns="0" tIns="0" rIns="0" bIns="0" rtlCol="0" anchor="t"/>
-          <a:lstStyle/>
-          <a:p>
-            <a:pPr indent="0" marL="0">
-              <a:lnSpc>
-                <a:spcPct val="125000"/>
-              </a:lnSpc>
-              <a:buNone/>
-            </a:pPr>
-            <a:r>
-              <a:rPr lang="en-US" sz="1200" dirty="0">
-                <a:solidFill>
-                  <a:srgbClr val="5F5F7A"/>
-                </a:solidFill>
-                <a:latin typeface="Arial" pitchFamily="34" charset="0"/>
-                <a:ea typeface="Arial" pitchFamily="34" charset="-122"/>
-                <a:cs typeface="Arial" pitchFamily="34" charset="-120"/>
-              </a:rPr>
-              <a:t>Done when a coach can see in one minute who is stalled, and a student can log a week's work in under two.</a:t>
-            </a:r>
-            <a:endParaRPr lang="en-US" sz="1200" dirty="0"/>
-          </a:p>
-        </p:txBody>
-      </p:sp>
-      <p:sp>
-        <p:nvSpPr>
-          <p:cNvPr id="5" name="Shape 3"/>
-          <p:cNvSpPr/>
-          <p:nvPr/>
-        </p:nvSpPr>
-        <p:spPr>
-          <a:xfrm>
-            <a:off x="457200" y="1828800"/>
-            <a:ext cx="384048" cy="384048"/>
-          </a:xfrm>
-          <a:prstGeom prst="ellipse">
-            <a:avLst/>
-          </a:prstGeom>
-          <a:solidFill>
-            <a:srgbClr val="500591"/>
-          </a:solidFill>
-          <a:ln w="12700">
-            <a:solidFill>
-              <a:srgbClr val="500591"/>
-            </a:solidFill>
-            <a:prstDash val="solid"/>
-          </a:ln>
-        </p:spPr>
-      </p:sp>
       <p:pic>
         <p:nvPicPr>
-          <p:cNvPr id="6" name="Image 0" descr="/Users/alexandermalinsky/Projects/impact-lms-pitch/assets/calendar-white.png">    </p:cNvPr>
+          <p:cNvPr id="2" name="Image 0" descr="/Users/alexandermalinsky/Projects/impact-lms-pitch/assets/mark-lightpurple.png">    </p:cNvPr>
           <p:cNvPicPr>
             <a:picLocks noChangeAspect="1"/>
           </p:cNvPicPr>
           <p:nvPr/>
         </p:nvPicPr>
         <p:blipFill>
-          <a:blip r:embed="rId1"/>
+          <a:blip r:embed="rId1">
+            <a:alphaModFix amt="12000"/>
+          </a:blip>
           <a:stretch>
             <a:fillRect/>
           </a:stretch>
         </p:blipFill>
         <p:spPr>
           <a:xfrm>
-            <a:off x="557052" y="1928652"/>
-            <a:ext cx="184343" cy="184343"/>
+            <a:off x="6583680" y="-548640"/>
+            <a:ext cx="3291840" cy="3566160"/>
           </a:xfrm>
           <a:prstGeom prst="rect">
             <a:avLst/>
@@ -2498,53 +2441,95 @@
       </p:pic>
       <p:sp>
         <p:nvSpPr>
-          <p:cNvPr id="7" name="Text 4"/>
-          <p:cNvSpPr txBox="1"/>
-          <p:nvPr/>
-        </p:nvSpPr>
-        <p:spPr>
-          <a:xfrm>
-            <a:off x="987552" y="1810512"/>
-            <a:ext cx="2377440" cy="256032"/>
-          </a:xfrm>
-          <a:prstGeom prst="rect">
-            <a:avLst/>
-          </a:prstGeom>
-          <a:noFill/>
-          <a:ln/>
-        </p:spPr>
-        <p:txBody>
-          <a:bodyPr wrap="square" lIns="0" tIns="0" rIns="0" bIns="0" rtlCol="0" anchor="ctr"/>
-          <a:lstStyle/>
-          <a:p>
-            <a:pPr indent="0" marL="0">
-              <a:buNone/>
-            </a:pPr>
-            <a:r>
-              <a:rPr lang="en-US" sz="1250" b="1" dirty="0">
-                <a:solidFill>
-                  <a:srgbClr val="14142B"/>
-                </a:solidFill>
-                <a:latin typeface="Arial" pitchFamily="34" charset="0"/>
-                <a:ea typeface="Arial" pitchFamily="34" charset="-122"/>
-                <a:cs typeface="Arial" pitchFamily="34" charset="-120"/>
-              </a:rPr>
-              <a:t>Weekly check-in</a:t>
-            </a:r>
-            <a:endParaRPr lang="en-US" sz="1250" dirty="0"/>
-          </a:p>
-        </p:txBody>
-      </p:sp>
-      <p:sp>
-        <p:nvSpPr>
-          <p:cNvPr id="8" name="Text 5"/>
-          <p:cNvSpPr txBox="1"/>
-          <p:nvPr/>
-        </p:nvSpPr>
-        <p:spPr>
-          <a:xfrm>
-            <a:off x="3474720" y="1819656"/>
-            <a:ext cx="5212080" cy="640080"/>
+          <p:cNvPr id="3" name="Text 0"/>
+          <p:cNvSpPr txBox="1"/>
+          <p:nvPr/>
+        </p:nvSpPr>
+        <p:spPr>
+          <a:xfrm>
+            <a:off x="457200" y="457200"/>
+            <a:ext cx="4572000" cy="228600"/>
+          </a:xfrm>
+          <a:prstGeom prst="rect">
+            <a:avLst/>
+          </a:prstGeom>
+          <a:noFill/>
+          <a:ln/>
+        </p:spPr>
+        <p:txBody>
+          <a:bodyPr wrap="square" lIns="0" tIns="0" rIns="0" bIns="0" rtlCol="0" anchor="ctr"/>
+          <a:lstStyle/>
+          <a:p>
+            <a:pPr indent="0" marL="0">
+              <a:buNone/>
+            </a:pPr>
+            <a:r>
+              <a:rPr lang="en-US" sz="950" b="1" spc="300" kern="0" dirty="0">
+                <a:solidFill>
+                  <a:srgbClr val="B494CB"/>
+                </a:solidFill>
+                <a:latin typeface="Arial" pitchFamily="34" charset="0"/>
+                <a:ea typeface="Arial" pitchFamily="34" charset="-122"/>
+                <a:cs typeface="Arial" pitchFamily="34" charset="-120"/>
+              </a:rPr>
+              <a:t>AND THEN MADE SIMPLER</a:t>
+            </a:r>
+            <a:endParaRPr lang="en-US" sz="950" dirty="0"/>
+          </a:p>
+        </p:txBody>
+      </p:sp>
+      <p:sp>
+        <p:nvSpPr>
+          <p:cNvPr id="4" name="Text 1"/>
+          <p:cNvSpPr txBox="1"/>
+          <p:nvPr/>
+        </p:nvSpPr>
+        <p:spPr>
+          <a:xfrm>
+            <a:off x="457200" y="731520"/>
+            <a:ext cx="7315200" cy="502920"/>
+          </a:xfrm>
+          <a:prstGeom prst="rect">
+            <a:avLst/>
+          </a:prstGeom>
+          <a:noFill/>
+          <a:ln/>
+        </p:spPr>
+        <p:txBody>
+          <a:bodyPr wrap="square" lIns="0" tIns="0" rIns="0" bIns="0" rtlCol="0" anchor="t"/>
+          <a:lstStyle/>
+          <a:p>
+            <a:pPr indent="0" marL="0">
+              <a:lnSpc>
+                <a:spcPct val="106000"/>
+              </a:lnSpc>
+              <a:buNone/>
+            </a:pPr>
+            <a:r>
+              <a:rPr lang="en-US" sz="2700" b="1" dirty="0">
+                <a:solidFill>
+                  <a:srgbClr val="FFFFFF"/>
+                </a:solidFill>
+                <a:latin typeface="Arial" pitchFamily="34" charset="0"/>
+                <a:ea typeface="Arial" pitchFamily="34" charset="-122"/>
+                <a:cs typeface="Arial" pitchFamily="34" charset="-120"/>
+              </a:rPr>
+              <a:t>Mostly deletion.</a:t>
+            </a:r>
+            <a:endParaRPr lang="en-US" sz="2700" dirty="0"/>
+          </a:p>
+        </p:txBody>
+      </p:sp>
+      <p:sp>
+        <p:nvSpPr>
+          <p:cNvPr id="5" name="Text 2"/>
+          <p:cNvSpPr txBox="1"/>
+          <p:nvPr/>
+        </p:nvSpPr>
+        <p:spPr>
+          <a:xfrm>
+            <a:off x="457200" y="1280160"/>
+            <a:ext cx="7315200" cy="274320"/>
           </a:xfrm>
           <a:prstGeom prst="rect">
             <a:avLst/>
@@ -2563,15 +2548,93 @@
               <a:buNone/>
             </a:pPr>
             <a:r>
+              <a:rPr lang="en-US" sz="1200" dirty="0">
+                <a:solidFill>
+                  <a:srgbClr val="B494CB"/>
+                </a:solidFill>
+                <a:latin typeface="Arial" pitchFamily="34" charset="0"/>
+                <a:ea typeface="Arial" pitchFamily="34" charset="-122"/>
+                <a:cs typeface="Arial" pitchFamily="34" charset="-120"/>
+              </a:rPr>
+              <a:t>The structure was right. It was buried under leftovers from three earlier versions of the idea.</a:t>
+            </a:r>
+            <a:endParaRPr lang="en-US" sz="1200" dirty="0"/>
+          </a:p>
+        </p:txBody>
+      </p:sp>
+      <p:sp>
+        <p:nvSpPr>
+          <p:cNvPr id="6" name="Text 3"/>
+          <p:cNvSpPr txBox="1"/>
+          <p:nvPr/>
+        </p:nvSpPr>
+        <p:spPr>
+          <a:xfrm>
+            <a:off x="457200" y="1828800"/>
+            <a:ext cx="1554480" cy="411480"/>
+          </a:xfrm>
+          <a:prstGeom prst="rect">
+            <a:avLst/>
+          </a:prstGeom>
+          <a:noFill/>
+          <a:ln/>
+        </p:spPr>
+        <p:txBody>
+          <a:bodyPr wrap="square" lIns="0" tIns="0" rIns="0" bIns="0" rtlCol="0" anchor="ctr"/>
+          <a:lstStyle/>
+          <a:p>
+            <a:pPr indent="0" marL="0">
+              <a:buNone/>
+            </a:pPr>
+            <a:r>
+              <a:rPr lang="en-US" sz="2400" b="1" dirty="0">
+                <a:solidFill>
+                  <a:srgbClr val="FFFFFF"/>
+                </a:solidFill>
+                <a:latin typeface="Arial" pitchFamily="34" charset="0"/>
+                <a:ea typeface="Arial" pitchFamily="34" charset="-122"/>
+                <a:cs typeface="Arial" pitchFamily="34" charset="-120"/>
+              </a:rPr>
+              <a:t>70 → 16</a:t>
+            </a:r>
+            <a:endParaRPr lang="en-US" sz="2400" dirty="0"/>
+          </a:p>
+        </p:txBody>
+      </p:sp>
+      <p:sp>
+        <p:nvSpPr>
+          <p:cNvPr id="7" name="Text 4"/>
+          <p:cNvSpPr txBox="1"/>
+          <p:nvPr/>
+        </p:nvSpPr>
+        <p:spPr>
+          <a:xfrm>
+            <a:off x="457200" y="2240280"/>
+            <a:ext cx="1737360" cy="274320"/>
+          </a:xfrm>
+          <a:prstGeom prst="rect">
+            <a:avLst/>
+          </a:prstGeom>
+          <a:noFill/>
+          <a:ln/>
+        </p:spPr>
+        <p:txBody>
+          <a:bodyPr wrap="square" lIns="0" tIns="0" rIns="0" bIns="0" rtlCol="0" anchor="ctr"/>
+          <a:lstStyle/>
+          <a:p>
+            <a:pPr indent="0" marL="0">
+              <a:buNone/>
+            </a:pPr>
+            <a:r>
               <a:rPr lang="en-US" sz="1000" dirty="0">
                 <a:solidFill>
-                  <a:srgbClr val="5F5F7A"/>
-                </a:solidFill>
-                <a:latin typeface="Arial" pitchFamily="34" charset="0"/>
-                <a:ea typeface="Arial" pitchFamily="34" charset="-122"/>
-                <a:cs typeface="Arial" pitchFamily="34" charset="-120"/>
-              </a:rPr>
-              <a:t>Under two minutes on a phone: what I did, what is next, what blocks me, hours, confidence 1–5. Replaces the bi-monthly scorecard as the main signal.</a:t>
+                  <a:srgbClr val="B494CB"/>
+                </a:solidFill>
+                <a:latin typeface="Arial" pitchFamily="34" charset="0"/>
+                <a:ea typeface="Arial" pitchFamily="34" charset="-122"/>
+                <a:cs typeface="Arial" pitchFamily="34" charset="-120"/>
+              </a:rPr>
+              <a:t>practices shown</a:t>
             </a:r>
             <a:endParaRPr lang="en-US" sz="1000" dirty="0"/>
           </a:p>
@@ -2579,102 +2642,14 @@
       </p:sp>
       <p:sp>
         <p:nvSpPr>
-          <p:cNvPr id="9" name="Shape 6"/>
-          <p:cNvSpPr/>
-          <p:nvPr/>
-        </p:nvSpPr>
-        <p:spPr>
-          <a:xfrm>
-            <a:off x="457200" y="2542032"/>
-            <a:ext cx="384048" cy="384048"/>
-          </a:xfrm>
-          <a:prstGeom prst="ellipse">
-            <a:avLst/>
-          </a:prstGeom>
-          <a:solidFill>
-            <a:srgbClr val="500591"/>
-          </a:solidFill>
-          <a:ln w="12700">
-            <a:solidFill>
-              <a:srgbClr val="500591"/>
-            </a:solidFill>
-            <a:prstDash val="solid"/>
-          </a:ln>
-        </p:spPr>
-      </p:sp>
-      <p:pic>
-        <p:nvPicPr>
-          <p:cNvPr id="10" name="Image 1" descr="/Users/alexandermalinsky/Projects/impact-lms-pitch/assets/proposal-white.png">    </p:cNvPr>
-          <p:cNvPicPr>
-            <a:picLocks noChangeAspect="1"/>
-          </p:cNvPicPr>
-          <p:nvPr/>
-        </p:nvPicPr>
-        <p:blipFill>
-          <a:blip r:embed="rId2"/>
-          <a:stretch>
-            <a:fillRect/>
-          </a:stretch>
-        </p:blipFill>
-        <p:spPr>
-          <a:xfrm>
-            <a:off x="557052" y="2641884"/>
-            <a:ext cx="184343" cy="184343"/>
-          </a:xfrm>
-          <a:prstGeom prst="rect">
-            <a:avLst/>
-          </a:prstGeom>
-        </p:spPr>
-      </p:pic>
-      <p:sp>
-        <p:nvSpPr>
-          <p:cNvPr id="11" name="Text 7"/>
-          <p:cNvSpPr txBox="1"/>
-          <p:nvPr/>
-        </p:nvSpPr>
-        <p:spPr>
-          <a:xfrm>
-            <a:off x="987552" y="2523744"/>
-            <a:ext cx="2377440" cy="256032"/>
-          </a:xfrm>
-          <a:prstGeom prst="rect">
-            <a:avLst/>
-          </a:prstGeom>
-          <a:noFill/>
-          <a:ln/>
-        </p:spPr>
-        <p:txBody>
-          <a:bodyPr wrap="square" lIns="0" tIns="0" rIns="0" bIns="0" rtlCol="0" anchor="ctr"/>
-          <a:lstStyle/>
-          <a:p>
-            <a:pPr indent="0" marL="0">
-              <a:buNone/>
-            </a:pPr>
-            <a:r>
-              <a:rPr lang="en-US" sz="1250" b="1" dirty="0">
-                <a:solidFill>
-                  <a:srgbClr val="14142B"/>
-                </a:solidFill>
-                <a:latin typeface="Arial" pitchFamily="34" charset="0"/>
-                <a:ea typeface="Arial" pitchFamily="34" charset="-122"/>
-                <a:cs typeface="Arial" pitchFamily="34" charset="-120"/>
-              </a:rPr>
-              <a:t>Evidence with files</a:t>
-            </a:r>
-            <a:endParaRPr lang="en-US" sz="1250" dirty="0"/>
-          </a:p>
-        </p:txBody>
-      </p:sp>
-      <p:sp>
-        <p:nvSpPr>
-          <p:cNvPr id="12" name="Text 8"/>
-          <p:cNvSpPr txBox="1"/>
-          <p:nvPr/>
-        </p:nvSpPr>
-        <p:spPr>
-          <a:xfrm>
-            <a:off x="3474720" y="2532888"/>
-            <a:ext cx="5212080" cy="640080"/>
+          <p:cNvPr id="8" name="Text 5"/>
+          <p:cNvSpPr txBox="1"/>
+          <p:nvPr/>
+        </p:nvSpPr>
+        <p:spPr>
+          <a:xfrm>
+            <a:off x="2377440" y="1874520"/>
+            <a:ext cx="6217920" cy="731520"/>
           </a:xfrm>
           <a:prstGeom prst="rect">
             <a:avLst/>
@@ -2693,15 +2668,93 @@
               <a:buNone/>
             </a:pPr>
             <a:r>
+              <a:rPr lang="en-US" sz="1150" dirty="0">
+                <a:solidFill>
+                  <a:srgbClr val="B494CB"/>
+                </a:solidFill>
+                <a:latin typeface="Arial" pitchFamily="34" charset="0"/>
+                <a:ea typeface="Arial" pitchFamily="34" charset="-122"/>
+                <a:cs typeface="Arial" pitchFamily="34" charset="-120"/>
+              </a:rPr>
+              <a:t>54 were blank pages. Now hidden from students, surfaced to coaches who can write them.</a:t>
+            </a:r>
+            <a:endParaRPr lang="en-US" sz="1150" dirty="0"/>
+          </a:p>
+        </p:txBody>
+      </p:sp>
+      <p:sp>
+        <p:nvSpPr>
+          <p:cNvPr id="9" name="Text 6"/>
+          <p:cNvSpPr txBox="1"/>
+          <p:nvPr/>
+        </p:nvSpPr>
+        <p:spPr>
+          <a:xfrm>
+            <a:off x="457200" y="2743200"/>
+            <a:ext cx="1554480" cy="411480"/>
+          </a:xfrm>
+          <a:prstGeom prst="rect">
+            <a:avLst/>
+          </a:prstGeom>
+          <a:noFill/>
+          <a:ln/>
+        </p:spPr>
+        <p:txBody>
+          <a:bodyPr wrap="square" lIns="0" tIns="0" rIns="0" bIns="0" rtlCol="0" anchor="ctr"/>
+          <a:lstStyle/>
+          <a:p>
+            <a:pPr indent="0" marL="0">
+              <a:buNone/>
+            </a:pPr>
+            <a:r>
+              <a:rPr lang="en-US" sz="2400" b="1" dirty="0">
+                <a:solidFill>
+                  <a:srgbClr val="FFFFFF"/>
+                </a:solidFill>
+                <a:latin typeface="Arial" pitchFamily="34" charset="0"/>
+                <a:ea typeface="Arial" pitchFamily="34" charset="-122"/>
+                <a:cs typeface="Arial" pitchFamily="34" charset="-120"/>
+              </a:rPr>
+              <a:t>8 → 1</a:t>
+            </a:r>
+            <a:endParaRPr lang="en-US" sz="2400" dirty="0"/>
+          </a:p>
+        </p:txBody>
+      </p:sp>
+      <p:sp>
+        <p:nvSpPr>
+          <p:cNvPr id="10" name="Text 7"/>
+          <p:cNvSpPr txBox="1"/>
+          <p:nvPr/>
+        </p:nvSpPr>
+        <p:spPr>
+          <a:xfrm>
+            <a:off x="457200" y="3154680"/>
+            <a:ext cx="1737360" cy="274320"/>
+          </a:xfrm>
+          <a:prstGeom prst="rect">
+            <a:avLst/>
+          </a:prstGeom>
+          <a:noFill/>
+          <a:ln/>
+        </p:spPr>
+        <p:txBody>
+          <a:bodyPr wrap="square" lIns="0" tIns="0" rIns="0" bIns="0" rtlCol="0" anchor="ctr"/>
+          <a:lstStyle/>
+          <a:p>
+            <a:pPr indent="0" marL="0">
+              <a:buNone/>
+            </a:pPr>
+            <a:r>
               <a:rPr lang="en-US" sz="1000" dirty="0">
                 <a:solidFill>
-                  <a:srgbClr val="5F5F7A"/>
-                </a:solidFill>
-                <a:latin typeface="Arial" pitchFamily="34" charset="0"/>
-                <a:ea typeface="Arial" pitchFamily="34" charset="-122"/>
-                <a:cs typeface="Arial" pitchFamily="34" charset="-120"/>
-              </a:rPr>
-              <a:t>Photo and file upload per level, taken directly on a phone. Today it is a link or a number.</a:t>
+                  <a:srgbClr val="B494CB"/>
+                </a:solidFill>
+                <a:latin typeface="Arial" pitchFamily="34" charset="0"/>
+                <a:ea typeface="Arial" pitchFamily="34" charset="-122"/>
+                <a:cs typeface="Arial" pitchFamily="34" charset="-120"/>
+              </a:rPr>
+              <a:t>pages of handbook</a:t>
             </a:r>
             <a:endParaRPr lang="en-US" sz="1000" dirty="0"/>
           </a:p>
@@ -2709,102 +2762,14 @@
       </p:sp>
       <p:sp>
         <p:nvSpPr>
-          <p:cNvPr id="13" name="Shape 9"/>
-          <p:cNvSpPr/>
-          <p:nvPr/>
-        </p:nvSpPr>
-        <p:spPr>
-          <a:xfrm>
-            <a:off x="457200" y="3255264"/>
-            <a:ext cx="384048" cy="384048"/>
-          </a:xfrm>
-          <a:prstGeom prst="ellipse">
-            <a:avLst/>
-          </a:prstGeom>
-          <a:solidFill>
-            <a:srgbClr val="500591"/>
-          </a:solidFill>
-          <a:ln w="12700">
-            <a:solidFill>
-              <a:srgbClr val="500591"/>
-            </a:solidFill>
-            <a:prstDash val="solid"/>
-          </a:ln>
-        </p:spPr>
-      </p:sp>
-      <p:pic>
-        <p:nvPicPr>
-          <p:cNvPr id="14" name="Image 2" descr="/Users/alexandermalinsky/Projects/impact-lms-pitch/assets/ai-white.png">    </p:cNvPr>
-          <p:cNvPicPr>
-            <a:picLocks noChangeAspect="1"/>
-          </p:cNvPicPr>
-          <p:nvPr/>
-        </p:nvPicPr>
-        <p:blipFill>
-          <a:blip r:embed="rId3"/>
-          <a:stretch>
-            <a:fillRect/>
-          </a:stretch>
-        </p:blipFill>
-        <p:spPr>
-          <a:xfrm>
-            <a:off x="557052" y="3355116"/>
-            <a:ext cx="184343" cy="184343"/>
-          </a:xfrm>
-          <a:prstGeom prst="rect">
-            <a:avLst/>
-          </a:prstGeom>
-        </p:spPr>
-      </p:pic>
-      <p:sp>
-        <p:nvSpPr>
-          <p:cNvPr id="15" name="Text 10"/>
-          <p:cNvSpPr txBox="1"/>
-          <p:nvPr/>
-        </p:nvSpPr>
-        <p:spPr>
-          <a:xfrm>
-            <a:off x="987552" y="3236976"/>
-            <a:ext cx="2377440" cy="256032"/>
-          </a:xfrm>
-          <a:prstGeom prst="rect">
-            <a:avLst/>
-          </a:prstGeom>
-          <a:noFill/>
-          <a:ln/>
-        </p:spPr>
-        <p:txBody>
-          <a:bodyPr wrap="square" lIns="0" tIns="0" rIns="0" bIns="0" rtlCol="0" anchor="ctr"/>
-          <a:lstStyle/>
-          <a:p>
-            <a:pPr indent="0" marL="0">
-              <a:buNone/>
-            </a:pPr>
-            <a:r>
-              <a:rPr lang="en-US" sz="1250" b="1" dirty="0">
-                <a:solidFill>
-                  <a:srgbClr val="14142B"/>
-                </a:solidFill>
-                <a:latin typeface="Arial" pitchFamily="34" charset="0"/>
-                <a:ea typeface="Arial" pitchFamily="34" charset="-122"/>
-                <a:cs typeface="Arial" pitchFamily="34" charset="-120"/>
-              </a:rPr>
-              <a:t>AI kits for levels 1–3</a:t>
-            </a:r>
-            <a:endParaRPr lang="en-US" sz="1250" dirty="0"/>
-          </a:p>
-        </p:txBody>
-      </p:sp>
-      <p:sp>
-        <p:nvSpPr>
-          <p:cNvPr id="16" name="Text 11"/>
-          <p:cNvSpPr txBox="1"/>
-          <p:nvPr/>
-        </p:nvSpPr>
-        <p:spPr>
-          <a:xfrm>
-            <a:off x="3474720" y="3246120"/>
-            <a:ext cx="5212080" cy="640080"/>
+          <p:cNvPr id="11" name="Text 8"/>
+          <p:cNvSpPr txBox="1"/>
+          <p:nvPr/>
+        </p:nvSpPr>
+        <p:spPr>
+          <a:xfrm>
+            <a:off x="2377440" y="2788920"/>
+            <a:ext cx="6217920" cy="731520"/>
           </a:xfrm>
           <a:prstGeom prst="rect">
             <a:avLst/>
@@ -2823,15 +2788,93 @@
               <a:buNone/>
             </a:pPr>
             <a:r>
+              <a:rPr lang="en-US" sz="1150" dirty="0">
+                <a:solidFill>
+                  <a:srgbClr val="B494CB"/>
+                </a:solidFill>
+                <a:latin typeface="Arial" pitchFamily="34" charset="0"/>
+                <a:ea typeface="Arial" pitchFamily="34" charset="-122"/>
+                <a:cs typeface="Arial" pitchFamily="34" charset="-120"/>
+              </a:rPr>
+              <a:t>“How IMPACT works”: three questions, four phases, seven words defined.</a:t>
+            </a:r>
+            <a:endParaRPr lang="en-US" sz="1150" dirty="0"/>
+          </a:p>
+        </p:txBody>
+      </p:sp>
+      <p:sp>
+        <p:nvSpPr>
+          <p:cNvPr id="12" name="Text 9"/>
+          <p:cNvSpPr txBox="1"/>
+          <p:nvPr/>
+        </p:nvSpPr>
+        <p:spPr>
+          <a:xfrm>
+            <a:off x="457200" y="3657600"/>
+            <a:ext cx="1554480" cy="411480"/>
+          </a:xfrm>
+          <a:prstGeom prst="rect">
+            <a:avLst/>
+          </a:prstGeom>
+          <a:noFill/>
+          <a:ln/>
+        </p:spPr>
+        <p:txBody>
+          <a:bodyPr wrap="square" lIns="0" tIns="0" rIns="0" bIns="0" rtlCol="0" anchor="ctr"/>
+          <a:lstStyle/>
+          <a:p>
+            <a:pPr indent="0" marL="0">
+              <a:buNone/>
+            </a:pPr>
+            <a:r>
+              <a:rPr lang="en-US" sz="2400" b="1" dirty="0">
+                <a:solidFill>
+                  <a:srgbClr val="FFFFFF"/>
+                </a:solidFill>
+                <a:latin typeface="Arial" pitchFamily="34" charset="0"/>
+                <a:ea typeface="Arial" pitchFamily="34" charset="-122"/>
+                <a:cs typeface="Arial" pitchFamily="34" charset="-120"/>
+              </a:rPr>
+              <a:t>2 → 1</a:t>
+            </a:r>
+            <a:endParaRPr lang="en-US" sz="2400" dirty="0"/>
+          </a:p>
+        </p:txBody>
+      </p:sp>
+      <p:sp>
+        <p:nvSpPr>
+          <p:cNvPr id="13" name="Text 10"/>
+          <p:cNvSpPr txBox="1"/>
+          <p:nvPr/>
+        </p:nvSpPr>
+        <p:spPr>
+          <a:xfrm>
+            <a:off x="457200" y="4069080"/>
+            <a:ext cx="1737360" cy="274320"/>
+          </a:xfrm>
+          <a:prstGeom prst="rect">
+            <a:avLst/>
+          </a:prstGeom>
+          <a:noFill/>
+          <a:ln/>
+        </p:spPr>
+        <p:txBody>
+          <a:bodyPr wrap="square" lIns="0" tIns="0" rIns="0" bIns="0" rtlCol="0" anchor="ctr"/>
+          <a:lstStyle/>
+          <a:p>
+            <a:pPr indent="0" marL="0">
+              <a:buNone/>
+            </a:pPr>
+            <a:r>
               <a:rPr lang="en-US" sz="1000" dirty="0">
                 <a:solidFill>
-                  <a:srgbClr val="5F5F7A"/>
-                </a:solidFill>
-                <a:latin typeface="Arial" pitchFamily="34" charset="0"/>
-                <a:ea typeface="Arial" pitchFamily="34" charset="-122"/>
-                <a:cs typeface="Arial" pitchFamily="34" charset="-120"/>
-              </a:rPr>
-              <a:t>A ready-made prompt pre-filled with the student's own project, a template to upload, and what to bring back as evidence. The AI asks questions — it does not write the work.</a:t>
+                  <a:srgbClr val="B494CB"/>
+                </a:solidFill>
+                <a:latin typeface="Arial" pitchFamily="34" charset="0"/>
+                <a:ea typeface="Arial" pitchFamily="34" charset="-122"/>
+                <a:cs typeface="Arial" pitchFamily="34" charset="-120"/>
+              </a:rPr>
+              <a:t>numbering systems</a:t>
             </a:r>
             <a:endParaRPr lang="en-US" sz="1000" dirty="0"/>
           </a:p>
@@ -2839,102 +2882,14 @@
       </p:sp>
       <p:sp>
         <p:nvSpPr>
-          <p:cNvPr id="17" name="Shape 12"/>
-          <p:cNvSpPr/>
-          <p:nvPr/>
-        </p:nvSpPr>
-        <p:spPr>
-          <a:xfrm>
-            <a:off x="457200" y="3968496"/>
-            <a:ext cx="384048" cy="384048"/>
-          </a:xfrm>
-          <a:prstGeom prst="ellipse">
-            <a:avLst/>
-          </a:prstGeom>
-          <a:solidFill>
-            <a:srgbClr val="500591"/>
-          </a:solidFill>
-          <a:ln w="12700">
-            <a:solidFill>
-              <a:srgbClr val="500591"/>
-            </a:solidFill>
-            <a:prstDash val="solid"/>
-          </a:ln>
-        </p:spPr>
-      </p:sp>
-      <p:pic>
-        <p:nvPicPr>
-          <p:cNvPr id="18" name="Image 3" descr="/Users/alexandermalinsky/Projects/impact-lms-pitch/assets/security-white.png">    </p:cNvPr>
-          <p:cNvPicPr>
-            <a:picLocks noChangeAspect="1"/>
-          </p:cNvPicPr>
-          <p:nvPr/>
-        </p:nvPicPr>
-        <p:blipFill>
-          <a:blip r:embed="rId4"/>
-          <a:stretch>
-            <a:fillRect/>
-          </a:stretch>
-        </p:blipFill>
-        <p:spPr>
-          <a:xfrm>
-            <a:off x="557052" y="4068348"/>
-            <a:ext cx="184343" cy="184343"/>
-          </a:xfrm>
-          <a:prstGeom prst="rect">
-            <a:avLst/>
-          </a:prstGeom>
-        </p:spPr>
-      </p:pic>
-      <p:sp>
-        <p:nvSpPr>
-          <p:cNvPr id="19" name="Text 13"/>
-          <p:cNvSpPr txBox="1"/>
-          <p:nvPr/>
-        </p:nvSpPr>
-        <p:spPr>
-          <a:xfrm>
-            <a:off x="987552" y="3950208"/>
-            <a:ext cx="2377440" cy="256032"/>
-          </a:xfrm>
-          <a:prstGeom prst="rect">
-            <a:avLst/>
-          </a:prstGeom>
-          <a:noFill/>
-          <a:ln/>
-        </p:spPr>
-        <p:txBody>
-          <a:bodyPr wrap="square" lIns="0" tIns="0" rIns="0" bIns="0" rtlCol="0" anchor="ctr"/>
-          <a:lstStyle/>
-          <a:p>
-            <a:pPr indent="0" marL="0">
-              <a:buNone/>
-            </a:pPr>
-            <a:r>
-              <a:rPr lang="en-US" sz="1250" b="1" dirty="0">
-                <a:solidFill>
-                  <a:srgbClr val="14142B"/>
-                </a:solidFill>
-                <a:latin typeface="Arial" pitchFamily="34" charset="0"/>
-                <a:ea typeface="Arial" pitchFamily="34" charset="-122"/>
-                <a:cs typeface="Arial" pitchFamily="34" charset="-120"/>
-              </a:rPr>
-              <a:t>Reminders</a:t>
-            </a:r>
-            <a:endParaRPr lang="en-US" sz="1250" dirty="0"/>
-          </a:p>
-        </p:txBody>
-      </p:sp>
-      <p:sp>
-        <p:nvSpPr>
-          <p:cNvPr id="20" name="Text 14"/>
-          <p:cNvSpPr txBox="1"/>
-          <p:nvPr/>
-        </p:nvSpPr>
-        <p:spPr>
-          <a:xfrm>
-            <a:off x="3474720" y="3959352"/>
-            <a:ext cx="5212080" cy="640080"/>
+          <p:cNvPr id="14" name="Text 11"/>
+          <p:cNvSpPr txBox="1"/>
+          <p:nvPr/>
+        </p:nvSpPr>
+        <p:spPr>
+          <a:xfrm>
+            <a:off x="2377440" y="3703320"/>
+            <a:ext cx="6217920" cy="731520"/>
           </a:xfrm>
           <a:prstGeom prst="rect">
             <a:avLst/>
@@ -2953,23 +2908,23 @@
               <a:buNone/>
             </a:pPr>
             <a:r>
-              <a:rPr lang="en-US" sz="1000" dirty="0">
-                <a:solidFill>
-                  <a:srgbClr val="5F5F7A"/>
-                </a:solidFill>
-                <a:latin typeface="Arial" pitchFamily="34" charset="0"/>
-                <a:ea typeface="Arial" pitchFamily="34" charset="-122"/>
-                <a:cs typeface="Arial" pitchFamily="34" charset="-120"/>
-              </a:rPr>
-              <a:t>E-mail when a check-in or milestone is overdue. A missed week triggers a nudge, never a loss of progress.</a:t>
-            </a:r>
-            <a:endParaRPr lang="en-US" sz="1000" dirty="0"/>
-          </a:p>
-        </p:txBody>
-      </p:sp>
-      <p:sp>
-        <p:nvSpPr>
-          <p:cNvPr id="21" name="Text 15"/>
+              <a:rPr lang="en-US" sz="1150" dirty="0">
+                <a:solidFill>
+                  <a:srgbClr val="B494CB"/>
+                </a:solidFill>
+                <a:latin typeface="Arial" pitchFamily="34" charset="0"/>
+                <a:ea typeface="Arial" pitchFamily="34" charset="-122"/>
+                <a:cs typeface="Arial" pitchFamily="34" charset="-120"/>
+              </a:rPr>
+              <a:t>Levels now sit inside their phase. One journey, not a phase count and a level count.</a:t>
+            </a:r>
+            <a:endParaRPr lang="en-US" sz="1150" dirty="0"/>
+          </a:p>
+        </p:txBody>
+      </p:sp>
+      <p:sp>
+        <p:nvSpPr>
+          <p:cNvPr id="15" name="Text 12"/>
           <p:cNvSpPr txBox="1"/>
           <p:nvPr/>
         </p:nvSpPr>
@@ -2994,7 +2949,7 @@
             <a:r>
               <a:rPr lang="en-US" sz="850" dirty="0">
                 <a:solidFill>
-                  <a:srgbClr val="5F5F7A"/>
+                  <a:srgbClr val="B494CB"/>
                 </a:solidFill>
                 <a:latin typeface="Arial" pitchFamily="34" charset="0"/>
                 <a:ea typeface="Arial" pitchFamily="34" charset="-122"/>
@@ -3008,7 +2963,7 @@
       </p:sp>
       <p:sp>
         <p:nvSpPr>
-          <p:cNvPr id="22" name="Text 16"/>
+          <p:cNvPr id="16" name="Text 13"/>
           <p:cNvSpPr txBox="1"/>
           <p:nvPr/>
         </p:nvSpPr>
@@ -3033,7 +2988,7 @@
             <a:r>
               <a:rPr lang="en-US" sz="850" dirty="0">
                 <a:solidFill>
-                  <a:srgbClr val="5F5F7A"/>
+                  <a:srgbClr val="B494CB"/>
                 </a:solidFill>
                 <a:latin typeface="Arial" pitchFamily="34" charset="0"/>
                 <a:ea typeface="Arial" pitchFamily="34" charset="-122"/>
@@ -3110,7 +3065,7 @@
                 <a:ea typeface="Arial" pitchFamily="34" charset="-122"/>
                 <a:cs typeface="Arial" pitchFamily="34" charset="-120"/>
               </a:rPr>
-              <a:t>THEN · RELEASE 3</a:t>
+              <a:t>NEXT · RELEASE 2</a:t>
             </a:r>
             <a:endParaRPr lang="en-US" sz="950" dirty="0"/>
           </a:p>
@@ -3152,7 +3107,7 @@
                 <a:ea typeface="Arial" pitchFamily="34" charset="-122"/>
                 <a:cs typeface="Arial" pitchFamily="34" charset="-120"/>
               </a:rPr>
-              <a:t>Report and showcase.</a:t>
+              <a:t>Execute, with coaches in the loop.</a:t>
             </a:r>
             <a:endParaRPr lang="en-US" sz="2700" dirty="0"/>
           </a:p>
@@ -3194,7 +3149,7 @@
                 <a:ea typeface="Arial" pitchFamily="34" charset="-122"/>
                 <a:cs typeface="Arial" pitchFamily="34" charset="-120"/>
               </a:rPr>
-              <a:t>Done when a finished project produces a report ready for the open day without retyping anything.</a:t>
+              <a:t>Done when a coach can see in one minute who is stalled, and a student can log a week's work in under two.</a:t>
             </a:r>
             <a:endParaRPr lang="en-US" sz="1200" dirty="0"/>
           </a:p>
@@ -3209,32 +3164,56 @@
         <p:spPr>
           <a:xfrm>
             <a:off x="457200" y="1828800"/>
-            <a:ext cx="3977640" cy="1143000"/>
-          </a:xfrm>
-          <a:prstGeom prst="rect">
+            <a:ext cx="384048" cy="384048"/>
+          </a:xfrm>
+          <a:prstGeom prst="ellipse">
             <a:avLst/>
           </a:prstGeom>
           <a:solidFill>
-            <a:srgbClr val="FFFFFF"/>
+            <a:srgbClr val="500591"/>
           </a:solidFill>
-          <a:ln w="9525">
+          <a:ln w="12700">
             <a:solidFill>
-              <a:srgbClr val="E3E1EE"/>
+              <a:srgbClr val="500591"/>
             </a:solidFill>
             <a:prstDash val="solid"/>
           </a:ln>
         </p:spPr>
       </p:sp>
-      <p:sp>
-        <p:nvSpPr>
-          <p:cNvPr id="6" name="Text 4"/>
-          <p:cNvSpPr txBox="1"/>
-          <p:nvPr/>
-        </p:nvSpPr>
-        <p:spPr>
-          <a:xfrm>
-            <a:off x="685800" y="2011680"/>
-            <a:ext cx="3566160" cy="274320"/>
+      <p:pic>
+        <p:nvPicPr>
+          <p:cNvPr id="6" name="Image 0" descr="/Users/alexandermalinsky/Projects/impact-lms-pitch/assets/calendar-white.png">    </p:cNvPr>
+          <p:cNvPicPr>
+            <a:picLocks noChangeAspect="1"/>
+          </p:cNvPicPr>
+          <p:nvPr/>
+        </p:nvPicPr>
+        <p:blipFill>
+          <a:blip r:embed="rId1"/>
+          <a:stretch>
+            <a:fillRect/>
+          </a:stretch>
+        </p:blipFill>
+        <p:spPr>
+          <a:xfrm>
+            <a:off x="557052" y="1928652"/>
+            <a:ext cx="184343" cy="184343"/>
+          </a:xfrm>
+          <a:prstGeom prst="rect">
+            <a:avLst/>
+          </a:prstGeom>
+        </p:spPr>
+      </p:pic>
+      <p:sp>
+        <p:nvSpPr>
+          <p:cNvPr id="7" name="Text 4"/>
+          <p:cNvSpPr txBox="1"/>
+          <p:nvPr/>
+        </p:nvSpPr>
+        <p:spPr>
+          <a:xfrm>
+            <a:off x="987552" y="1810512"/>
+            <a:ext cx="2377440" cy="256032"/>
           </a:xfrm>
           <a:prstGeom prst="rect">
             <a:avLst/>
@@ -3258,7 +3237,7 @@
                 <a:ea typeface="Arial" pitchFamily="34" charset="-122"/>
                 <a:cs typeface="Arial" pitchFamily="34" charset="-120"/>
               </a:rPr>
-              <a:t>Impact Report, exported</a:t>
+              <a:t>Weekly check-in</a:t>
             </a:r>
             <a:endParaRPr lang="en-US" sz="1250" dirty="0"/>
           </a:p>
@@ -3266,14 +3245,14 @@
       </p:sp>
       <p:sp>
         <p:nvSpPr>
-          <p:cNvPr id="7" name="Text 5"/>
-          <p:cNvSpPr txBox="1"/>
-          <p:nvPr/>
-        </p:nvSpPr>
-        <p:spPr>
-          <a:xfrm>
-            <a:off x="685800" y="2304288"/>
-            <a:ext cx="3566160" cy="594360"/>
+          <p:cNvPr id="8" name="Text 5"/>
+          <p:cNvSpPr txBox="1"/>
+          <p:nvPr/>
+        </p:nvSpPr>
+        <p:spPr>
+          <a:xfrm>
+            <a:off x="3474720" y="1819656"/>
+            <a:ext cx="5212080" cy="640080"/>
           </a:xfrm>
           <a:prstGeom prst="rect">
             <a:avLst/>
@@ -3300,7 +3279,7 @@
                 <a:ea typeface="Arial" pitchFamily="34" charset="-122"/>
                 <a:cs typeface="Arial" pitchFamily="34" charset="-120"/>
               </a:rPr>
-              <a:t>Assembled from the project, edited by the student, out as a PDF or a public showcase page for the open day and the Passport.</a:t>
+              <a:t>Under two minutes on a phone: what I did, what is next, what blocks me, hours, confidence 1–5. Replaces the bi-monthly scorecard as the main signal.</a:t>
             </a:r>
             <a:endParaRPr lang="en-US" sz="1000" dirty="0"/>
           </a:p>
@@ -3308,39 +3287,63 @@
       </p:sp>
       <p:sp>
         <p:nvSpPr>
-          <p:cNvPr id="8" name="Shape 6"/>
+          <p:cNvPr id="9" name="Shape 6"/>
           <p:cNvSpPr/>
           <p:nvPr/>
         </p:nvSpPr>
         <p:spPr>
           <a:xfrm>
-            <a:off x="4663440" y="1828800"/>
-            <a:ext cx="3977640" cy="1143000"/>
-          </a:xfrm>
-          <a:prstGeom prst="rect">
+            <a:off x="457200" y="2542032"/>
+            <a:ext cx="384048" cy="384048"/>
+          </a:xfrm>
+          <a:prstGeom prst="ellipse">
             <a:avLst/>
           </a:prstGeom>
           <a:solidFill>
-            <a:srgbClr val="FFFFFF"/>
+            <a:srgbClr val="500591"/>
           </a:solidFill>
-          <a:ln w="9525">
+          <a:ln w="12700">
             <a:solidFill>
-              <a:srgbClr val="E3E1EE"/>
+              <a:srgbClr val="500591"/>
             </a:solidFill>
             <a:prstDash val="solid"/>
           </a:ln>
         </p:spPr>
       </p:sp>
-      <p:sp>
-        <p:nvSpPr>
-          <p:cNvPr id="9" name="Text 7"/>
-          <p:cNvSpPr txBox="1"/>
-          <p:nvPr/>
-        </p:nvSpPr>
-        <p:spPr>
-          <a:xfrm>
-            <a:off x="4892040" y="2011680"/>
-            <a:ext cx="3566160" cy="274320"/>
+      <p:pic>
+        <p:nvPicPr>
+          <p:cNvPr id="10" name="Image 1" descr="/Users/alexandermalinsky/Projects/impact-lms-pitch/assets/proposal-white.png">    </p:cNvPr>
+          <p:cNvPicPr>
+            <a:picLocks noChangeAspect="1"/>
+          </p:cNvPicPr>
+          <p:nvPr/>
+        </p:nvPicPr>
+        <p:blipFill>
+          <a:blip r:embed="rId2"/>
+          <a:stretch>
+            <a:fillRect/>
+          </a:stretch>
+        </p:blipFill>
+        <p:spPr>
+          <a:xfrm>
+            <a:off x="557052" y="2641884"/>
+            <a:ext cx="184343" cy="184343"/>
+          </a:xfrm>
+          <a:prstGeom prst="rect">
+            <a:avLst/>
+          </a:prstGeom>
+        </p:spPr>
+      </p:pic>
+      <p:sp>
+        <p:nvSpPr>
+          <p:cNvPr id="11" name="Text 7"/>
+          <p:cNvSpPr txBox="1"/>
+          <p:nvPr/>
+        </p:nvSpPr>
+        <p:spPr>
+          <a:xfrm>
+            <a:off x="987552" y="2523744"/>
+            <a:ext cx="2377440" cy="256032"/>
           </a:xfrm>
           <a:prstGeom prst="rect">
             <a:avLst/>
@@ -3364,7 +3367,7 @@
                 <a:ea typeface="Arial" pitchFamily="34" charset="-122"/>
                 <a:cs typeface="Arial" pitchFamily="34" charset="-120"/>
               </a:rPr>
-              <a:t>Side quests and skill badges</a:t>
+              <a:t>Evidence with files</a:t>
             </a:r>
             <a:endParaRPr lang="en-US" sz="1250" dirty="0"/>
           </a:p>
@@ -3372,14 +3375,14 @@
       </p:sp>
       <p:sp>
         <p:nvSpPr>
-          <p:cNvPr id="10" name="Text 8"/>
-          <p:cNvSpPr txBox="1"/>
-          <p:nvPr/>
-        </p:nvSpPr>
-        <p:spPr>
-          <a:xfrm>
-            <a:off x="4892040" y="2304288"/>
-            <a:ext cx="3566160" cy="594360"/>
+          <p:cNvPr id="12" name="Text 8"/>
+          <p:cNvSpPr txBox="1"/>
+          <p:nvPr/>
+        </p:nvSpPr>
+        <p:spPr>
+          <a:xfrm>
+            <a:off x="3474720" y="2532888"/>
+            <a:ext cx="5212080" cy="640080"/>
           </a:xfrm>
           <a:prstGeom prst="rect">
             <a:avLst/>
@@ -3406,7 +3409,7 @@
                 <a:ea typeface="Arial" pitchFamily="34" charset="-122"/>
                 <a:cs typeface="Arial" pitchFamily="34" charset="-120"/>
               </a:rPr>
-              <a:t>Optional challenges — a pitch, an expert interview, a budget — each backed by evidence, feeding a player profile across projects.</a:t>
+              <a:t>Photo and file upload per level, taken directly on a phone. Today it is a link or a number.</a:t>
             </a:r>
             <a:endParaRPr lang="en-US" sz="1000" dirty="0"/>
           </a:p>
@@ -3414,39 +3417,63 @@
       </p:sp>
       <p:sp>
         <p:nvSpPr>
-          <p:cNvPr id="11" name="Shape 9"/>
+          <p:cNvPr id="13" name="Shape 9"/>
           <p:cNvSpPr/>
           <p:nvPr/>
         </p:nvSpPr>
         <p:spPr>
           <a:xfrm>
-            <a:off x="457200" y="3154680"/>
-            <a:ext cx="3977640" cy="1143000"/>
-          </a:xfrm>
-          <a:prstGeom prst="rect">
+            <a:off x="457200" y="3255264"/>
+            <a:ext cx="384048" cy="384048"/>
+          </a:xfrm>
+          <a:prstGeom prst="ellipse">
             <a:avLst/>
           </a:prstGeom>
           <a:solidFill>
-            <a:srgbClr val="FFFFFF"/>
+            <a:srgbClr val="500591"/>
           </a:solidFill>
-          <a:ln w="9525">
+          <a:ln w="12700">
             <a:solidFill>
-              <a:srgbClr val="E3E1EE"/>
+              <a:srgbClr val="500591"/>
             </a:solidFill>
             <a:prstDash val="solid"/>
           </a:ln>
         </p:spPr>
       </p:sp>
-      <p:sp>
-        <p:nvSpPr>
-          <p:cNvPr id="12" name="Text 10"/>
-          <p:cNvSpPr txBox="1"/>
-          <p:nvPr/>
-        </p:nvSpPr>
-        <p:spPr>
-          <a:xfrm>
-            <a:off x="685800" y="3337560"/>
-            <a:ext cx="3566160" cy="274320"/>
+      <p:pic>
+        <p:nvPicPr>
+          <p:cNvPr id="14" name="Image 2" descr="/Users/alexandermalinsky/Projects/impact-lms-pitch/assets/ai-white.png">    </p:cNvPr>
+          <p:cNvPicPr>
+            <a:picLocks noChangeAspect="1"/>
+          </p:cNvPicPr>
+          <p:nvPr/>
+        </p:nvPicPr>
+        <p:blipFill>
+          <a:blip r:embed="rId3"/>
+          <a:stretch>
+            <a:fillRect/>
+          </a:stretch>
+        </p:blipFill>
+        <p:spPr>
+          <a:xfrm>
+            <a:off x="557052" y="3355116"/>
+            <a:ext cx="184343" cy="184343"/>
+          </a:xfrm>
+          <a:prstGeom prst="rect">
+            <a:avLst/>
+          </a:prstGeom>
+        </p:spPr>
+      </p:pic>
+      <p:sp>
+        <p:nvSpPr>
+          <p:cNvPr id="15" name="Text 10"/>
+          <p:cNvSpPr txBox="1"/>
+          <p:nvPr/>
+        </p:nvSpPr>
+        <p:spPr>
+          <a:xfrm>
+            <a:off x="987552" y="3236976"/>
+            <a:ext cx="2377440" cy="256032"/>
           </a:xfrm>
           <a:prstGeom prst="rect">
             <a:avLst/>
@@ -3470,7 +3497,7 @@
                 <a:ea typeface="Arial" pitchFamily="34" charset="-122"/>
                 <a:cs typeface="Arial" pitchFamily="34" charset="-120"/>
               </a:rPr>
-              <a:t>Programme totals</a:t>
+              <a:t>AI kits for levels 1–3</a:t>
             </a:r>
             <a:endParaRPr lang="en-US" sz="1250" dirty="0"/>
           </a:p>
@@ -3478,14 +3505,14 @@
       </p:sp>
       <p:sp>
         <p:nvSpPr>
-          <p:cNvPr id="13" name="Text 11"/>
-          <p:cNvSpPr txBox="1"/>
-          <p:nvPr/>
-        </p:nvSpPr>
-        <p:spPr>
-          <a:xfrm>
-            <a:off x="685800" y="3630168"/>
-            <a:ext cx="3566160" cy="594360"/>
+          <p:cNvPr id="16" name="Text 11"/>
+          <p:cNvSpPr txBox="1"/>
+          <p:nvPr/>
+        </p:nvSpPr>
+        <p:spPr>
+          <a:xfrm>
+            <a:off x="3474720" y="3246120"/>
+            <a:ext cx="5212080" cy="640080"/>
           </a:xfrm>
           <a:prstGeom prst="rect">
             <a:avLst/>
@@ -3512,7 +3539,7 @@
                 <a:ea typeface="Arial" pitchFamily="34" charset="-122"/>
                 <a:cs typeface="Arial" pitchFamily="34" charset="-120"/>
               </a:rPr>
-              <a:t>People reached, partners involved, projects completed — across the school, for the leadership team.</a:t>
+              <a:t>A ready-made prompt pre-filled with the student's own project, a template to upload, and what to bring back as evidence. The AI asks questions — it does not write the work.</a:t>
             </a:r>
             <a:endParaRPr lang="en-US" sz="1000" dirty="0"/>
           </a:p>
@@ -3520,39 +3547,63 @@
       </p:sp>
       <p:sp>
         <p:nvSpPr>
-          <p:cNvPr id="14" name="Shape 12"/>
+          <p:cNvPr id="17" name="Shape 12"/>
           <p:cNvSpPr/>
           <p:nvPr/>
         </p:nvSpPr>
         <p:spPr>
           <a:xfrm>
-            <a:off x="4663440" y="3154680"/>
-            <a:ext cx="3977640" cy="1143000"/>
-          </a:xfrm>
-          <a:prstGeom prst="rect">
+            <a:off x="457200" y="3968496"/>
+            <a:ext cx="384048" cy="384048"/>
+          </a:xfrm>
+          <a:prstGeom prst="ellipse">
             <a:avLst/>
           </a:prstGeom>
           <a:solidFill>
-            <a:srgbClr val="FFFFFF"/>
+            <a:srgbClr val="500591"/>
           </a:solidFill>
-          <a:ln w="9525">
+          <a:ln w="12700">
             <a:solidFill>
-              <a:srgbClr val="E3E1EE"/>
+              <a:srgbClr val="500591"/>
             </a:solidFill>
             <a:prstDash val="solid"/>
           </a:ln>
         </p:spPr>
       </p:sp>
-      <p:sp>
-        <p:nvSpPr>
-          <p:cNvPr id="15" name="Text 13"/>
-          <p:cNvSpPr txBox="1"/>
-          <p:nvPr/>
-        </p:nvSpPr>
-        <p:spPr>
-          <a:xfrm>
-            <a:off x="4892040" y="3337560"/>
-            <a:ext cx="3566160" cy="274320"/>
+      <p:pic>
+        <p:nvPicPr>
+          <p:cNvPr id="18" name="Image 3" descr="/Users/alexandermalinsky/Projects/impact-lms-pitch/assets/security-white.png">    </p:cNvPr>
+          <p:cNvPicPr>
+            <a:picLocks noChangeAspect="1"/>
+          </p:cNvPicPr>
+          <p:nvPr/>
+        </p:nvPicPr>
+        <p:blipFill>
+          <a:blip r:embed="rId4"/>
+          <a:stretch>
+            <a:fillRect/>
+          </a:stretch>
+        </p:blipFill>
+        <p:spPr>
+          <a:xfrm>
+            <a:off x="557052" y="4068348"/>
+            <a:ext cx="184343" cy="184343"/>
+          </a:xfrm>
+          <a:prstGeom prst="rect">
+            <a:avLst/>
+          </a:prstGeom>
+        </p:spPr>
+      </p:pic>
+      <p:sp>
+        <p:nvSpPr>
+          <p:cNvPr id="19" name="Text 13"/>
+          <p:cNvSpPr txBox="1"/>
+          <p:nvPr/>
+        </p:nvSpPr>
+        <p:spPr>
+          <a:xfrm>
+            <a:off x="987552" y="3950208"/>
+            <a:ext cx="2377440" cy="256032"/>
           </a:xfrm>
           <a:prstGeom prst="rect">
             <a:avLst/>
@@ -3576,7 +3627,7 @@
                 <a:ea typeface="Arial" pitchFamily="34" charset="-122"/>
                 <a:cs typeface="Arial" pitchFamily="34" charset="-120"/>
               </a:rPr>
-              <a:t>Catalogue and toolkit written</a:t>
+              <a:t>Reminders</a:t>
             </a:r>
             <a:endParaRPr lang="en-US" sz="1250" dirty="0"/>
           </a:p>
@@ -3584,14 +3635,14 @@
       </p:sp>
       <p:sp>
         <p:nvSpPr>
-          <p:cNvPr id="16" name="Text 14"/>
-          <p:cNvSpPr txBox="1"/>
-          <p:nvPr/>
-        </p:nvSpPr>
-        <p:spPr>
-          <a:xfrm>
-            <a:off x="4892040" y="3630168"/>
-            <a:ext cx="3566160" cy="594360"/>
+          <p:cNvPr id="20" name="Text 14"/>
+          <p:cNvSpPr txBox="1"/>
+          <p:nvPr/>
+        </p:nvSpPr>
+        <p:spPr>
+          <a:xfrm>
+            <a:off x="3474720" y="3959352"/>
+            <a:ext cx="5212080" cy="640080"/>
           </a:xfrm>
           <a:prstGeom prst="rect">
             <a:avLst/>
@@ -3618,7 +3669,7 @@
                 <a:ea typeface="Arial" pitchFamily="34" charset="-122"/>
                 <a:cs typeface="Arial" pitchFamily="34" charset="-120"/>
               </a:rPr>
-              <a:t>The 54 blank practices, and a real brief on each catalogue entry. Content work with the coaches, not code.</a:t>
+              <a:t>E-mail when a check-in or milestone is overdue. A missed week triggers a nudge, never a loss of progress.</a:t>
             </a:r>
             <a:endParaRPr lang="en-US" sz="1000" dirty="0"/>
           </a:p>
@@ -3626,7 +3677,7 @@
       </p:sp>
       <p:sp>
         <p:nvSpPr>
-          <p:cNvPr id="17" name="Text 15"/>
+          <p:cNvPr id="21" name="Text 15"/>
           <p:cNvSpPr txBox="1"/>
           <p:nvPr/>
         </p:nvSpPr>
@@ -3665,7 +3716,7 @@
       </p:sp>
       <p:sp>
         <p:nvSpPr>
-          <p:cNvPr id="18" name="Text 16"/>
+          <p:cNvPr id="22" name="Text 16"/>
           <p:cNvSpPr txBox="1"/>
           <p:nvPr/>
         </p:nvSpPr>
@@ -3743,7 +3794,7 @@
         <p:spPr>
           <a:xfrm>
             <a:off x="457200" y="457200"/>
-            <a:ext cx="4572000" cy="228600"/>
+            <a:ext cx="3657600" cy="228600"/>
           </a:xfrm>
           <a:prstGeom prst="rect">
             <a:avLst/>
@@ -3767,7 +3818,7 @@
                 <a:ea typeface="Arial" pitchFamily="34" charset="-122"/>
                 <a:cs typeface="Arial" pitchFamily="34" charset="-120"/>
               </a:rPr>
-              <a:t>DECISIONS FOR THE TEAM</a:t>
+              <a:t>THEN · RELEASE 3</a:t>
             </a:r>
             <a:endParaRPr lang="en-US" sz="950" dirty="0"/>
           </a:p>
@@ -3809,7 +3860,7 @@
                 <a:ea typeface="Arial" pitchFamily="34" charset="-122"/>
                 <a:cs typeface="Arial" pitchFamily="34" charset="-120"/>
               </a:rPr>
-              <a:t>Six things the brief left open.</a:t>
+              <a:t>Report and showcase.</a:t>
             </a:r>
             <a:endParaRPr lang="en-US" sz="2700" dirty="0"/>
           </a:p>
@@ -3824,7 +3875,7 @@
         <p:spPr>
           <a:xfrm>
             <a:off x="457200" y="1298448"/>
-            <a:ext cx="7863840" cy="274320"/>
+            <a:ext cx="7863840" cy="320040"/>
           </a:xfrm>
           <a:prstGeom prst="rect">
             <a:avLst/>
@@ -3851,7 +3902,7 @@
                 <a:ea typeface="Arial" pitchFamily="34" charset="-122"/>
                 <a:cs typeface="Arial" pitchFamily="34" charset="-120"/>
               </a:rPr>
-              <a:t>Each one blocks something. Worth settling in this meeting rather than over email.</a:t>
+              <a:t>Done when a finished project produces a report ready for the open day without retyping anything.</a:t>
             </a:r>
             <a:endParaRPr lang="en-US" sz="1200" dirty="0"/>
           </a:p>
@@ -3859,42 +3910,28 @@
       </p:sp>
       <p:sp>
         <p:nvSpPr>
-          <p:cNvPr id="5" name="Text 3"/>
-          <p:cNvSpPr txBox="1"/>
-          <p:nvPr/>
-        </p:nvSpPr>
-        <p:spPr>
-          <a:xfrm>
-            <a:off x="457200" y="1783080"/>
-            <a:ext cx="320040" cy="274320"/>
-          </a:xfrm>
-          <a:prstGeom prst="rect">
-            <a:avLst/>
-          </a:prstGeom>
-          <a:noFill/>
-          <a:ln/>
-        </p:spPr>
-        <p:txBody>
-          <a:bodyPr wrap="square" lIns="0" tIns="0" rIns="0" bIns="0" rtlCol="0" anchor="ctr"/>
-          <a:lstStyle/>
-          <a:p>
-            <a:pPr indent="0" marL="0">
-              <a:buNone/>
-            </a:pPr>
-            <a:r>
-              <a:rPr lang="en-US" sz="1600" b="1" dirty="0">
-                <a:solidFill>
-                  <a:srgbClr val="CD9C00"/>
-                </a:solidFill>
-                <a:latin typeface="Arial" pitchFamily="34" charset="0"/>
-                <a:ea typeface="Arial" pitchFamily="34" charset="-122"/>
-                <a:cs typeface="Arial" pitchFamily="34" charset="-120"/>
-              </a:rPr>
-              <a:t>1</a:t>
-            </a:r>
-            <a:endParaRPr lang="en-US" sz="1600" dirty="0"/>
-          </a:p>
-        </p:txBody>
+          <p:cNvPr id="5" name="Shape 3"/>
+          <p:cNvSpPr/>
+          <p:nvPr/>
+        </p:nvSpPr>
+        <p:spPr>
+          <a:xfrm>
+            <a:off x="457200" y="1828800"/>
+            <a:ext cx="3977640" cy="1143000"/>
+          </a:xfrm>
+          <a:prstGeom prst="rect">
+            <a:avLst/>
+          </a:prstGeom>
+          <a:solidFill>
+            <a:srgbClr val="FFFFFF"/>
+          </a:solidFill>
+          <a:ln w="9525">
+            <a:solidFill>
+              <a:srgbClr val="E3E1EE"/>
+            </a:solidFill>
+            <a:prstDash val="solid"/>
+          </a:ln>
+        </p:spPr>
       </p:sp>
       <p:sp>
         <p:nvSpPr>
@@ -3904,7 +3941,7 @@
         </p:nvSpPr>
         <p:spPr>
           <a:xfrm>
-            <a:off x="822960" y="1764792"/>
+            <a:off x="685800" y="2011680"/>
             <a:ext cx="3566160" cy="274320"/>
           </a:xfrm>
           <a:prstGeom prst="rect">
@@ -3929,7 +3966,7 @@
                 <a:ea typeface="Arial" pitchFamily="34" charset="-122"/>
                 <a:cs typeface="Arial" pitchFamily="34" charset="-120"/>
               </a:rPr>
-              <a:t>Phase names</a:t>
+              <a:t>Impact Report, exported</a:t>
             </a:r>
             <a:endParaRPr lang="en-US" sz="1250" dirty="0"/>
           </a:p>
@@ -3943,7 +3980,7 @@
         </p:nvSpPr>
         <p:spPr>
           <a:xfrm>
-            <a:off x="822960" y="2057400"/>
+            <a:off x="685800" y="2304288"/>
             <a:ext cx="3566160" cy="594360"/>
           </a:xfrm>
           <a:prstGeom prst="rect">
@@ -3971,7 +4008,7 @@
                 <a:ea typeface="Arial" pitchFamily="34" charset="-122"/>
                 <a:cs typeface="Arial" pitchFamily="34" charset="-120"/>
               </a:rPr>
-              <a:t>Create / Plan / Execute / Report is live now. Keep, or revert to Ideation / Goals / Execution / Presentation?</a:t>
+              <a:t>Assembled from the project, edited by the student, out as a PDF or a public showcase page for the open day and the Passport.</a:t>
             </a:r>
             <a:endParaRPr lang="en-US" sz="1000" dirty="0"/>
           </a:p>
@@ -3979,42 +4016,28 @@
       </p:sp>
       <p:sp>
         <p:nvSpPr>
-          <p:cNvPr id="8" name="Text 6"/>
-          <p:cNvSpPr txBox="1"/>
-          <p:nvPr/>
-        </p:nvSpPr>
-        <p:spPr>
-          <a:xfrm>
-            <a:off x="457200" y="2697480"/>
-            <a:ext cx="320040" cy="274320"/>
-          </a:xfrm>
-          <a:prstGeom prst="rect">
-            <a:avLst/>
-          </a:prstGeom>
-          <a:noFill/>
-          <a:ln/>
-        </p:spPr>
-        <p:txBody>
-          <a:bodyPr wrap="square" lIns="0" tIns="0" rIns="0" bIns="0" rtlCol="0" anchor="ctr"/>
-          <a:lstStyle/>
-          <a:p>
-            <a:pPr indent="0" marL="0">
-              <a:buNone/>
-            </a:pPr>
-            <a:r>
-              <a:rPr lang="en-US" sz="1600" b="1" dirty="0">
-                <a:solidFill>
-                  <a:srgbClr val="CD9C00"/>
-                </a:solidFill>
-                <a:latin typeface="Arial" pitchFamily="34" charset="0"/>
-                <a:ea typeface="Arial" pitchFamily="34" charset="-122"/>
-                <a:cs typeface="Arial" pitchFamily="34" charset="-120"/>
-              </a:rPr>
-              <a:t>2</a:t>
-            </a:r>
-            <a:endParaRPr lang="en-US" sz="1600" dirty="0"/>
-          </a:p>
-        </p:txBody>
+          <p:cNvPr id="8" name="Shape 6"/>
+          <p:cNvSpPr/>
+          <p:nvPr/>
+        </p:nvSpPr>
+        <p:spPr>
+          <a:xfrm>
+            <a:off x="4663440" y="1828800"/>
+            <a:ext cx="3977640" cy="1143000"/>
+          </a:xfrm>
+          <a:prstGeom prst="rect">
+            <a:avLst/>
+          </a:prstGeom>
+          <a:solidFill>
+            <a:srgbClr val="FFFFFF"/>
+          </a:solidFill>
+          <a:ln w="9525">
+            <a:solidFill>
+              <a:srgbClr val="E3E1EE"/>
+            </a:solidFill>
+            <a:prstDash val="solid"/>
+          </a:ln>
+        </p:spPr>
       </p:sp>
       <p:sp>
         <p:nvSpPr>
@@ -4024,7 +4047,7 @@
         </p:nvSpPr>
         <p:spPr>
           <a:xfrm>
-            <a:off x="822960" y="2679192"/>
+            <a:off x="4892040" y="2011680"/>
             <a:ext cx="3566160" cy="274320"/>
           </a:xfrm>
           <a:prstGeom prst="rect">
@@ -4049,7 +4072,7 @@
                 <a:ea typeface="Arial" pitchFamily="34" charset="-122"/>
                 <a:cs typeface="Arial" pitchFamily="34" charset="-120"/>
               </a:rPr>
-              <a:t>Cycle length</a:t>
+              <a:t>Side quests and skill badges</a:t>
             </a:r>
             <a:endParaRPr lang="en-US" sz="1250" dirty="0"/>
           </a:p>
@@ -4063,7 +4086,7 @@
         </p:nvSpPr>
         <p:spPr>
           <a:xfrm>
-            <a:off x="822960" y="2971800"/>
+            <a:off x="4892040" y="2304288"/>
             <a:ext cx="3566160" cy="594360"/>
           </a:xfrm>
           <a:prstGeom prst="rect">
@@ -4091,7 +4114,7 @@
                 <a:ea typeface="Arial" pitchFamily="34" charset="-122"/>
                 <a:cs typeface="Arial" pitchFamily="34" charset="-120"/>
               </a:rPr>
-              <a:t>Six-week cycles, or projects running over several months as the handbook says?</a:t>
+              <a:t>Optional challenges — a pitch, an expert interview, a budget — each backed by evidence, feeding a player profile across projects.</a:t>
             </a:r>
             <a:endParaRPr lang="en-US" sz="1000" dirty="0"/>
           </a:p>
@@ -4099,42 +4122,28 @@
       </p:sp>
       <p:sp>
         <p:nvSpPr>
-          <p:cNvPr id="11" name="Text 9"/>
-          <p:cNvSpPr txBox="1"/>
-          <p:nvPr/>
-        </p:nvSpPr>
-        <p:spPr>
-          <a:xfrm>
-            <a:off x="457200" y="3611880"/>
-            <a:ext cx="320040" cy="274320"/>
-          </a:xfrm>
-          <a:prstGeom prst="rect">
-            <a:avLst/>
-          </a:prstGeom>
-          <a:noFill/>
-          <a:ln/>
-        </p:spPr>
-        <p:txBody>
-          <a:bodyPr wrap="square" lIns="0" tIns="0" rIns="0" bIns="0" rtlCol="0" anchor="ctr"/>
-          <a:lstStyle/>
-          <a:p>
-            <a:pPr indent="0" marL="0">
-              <a:buNone/>
-            </a:pPr>
-            <a:r>
-              <a:rPr lang="en-US" sz="1600" b="1" dirty="0">
-                <a:solidFill>
-                  <a:srgbClr val="CD9C00"/>
-                </a:solidFill>
-                <a:latin typeface="Arial" pitchFamily="34" charset="0"/>
-                <a:ea typeface="Arial" pitchFamily="34" charset="-122"/>
-                <a:cs typeface="Arial" pitchFamily="34" charset="-120"/>
-              </a:rPr>
-              <a:t>3</a:t>
-            </a:r>
-            <a:endParaRPr lang="en-US" sz="1600" dirty="0"/>
-          </a:p>
-        </p:txBody>
+          <p:cNvPr id="11" name="Shape 9"/>
+          <p:cNvSpPr/>
+          <p:nvPr/>
+        </p:nvSpPr>
+        <p:spPr>
+          <a:xfrm>
+            <a:off x="457200" y="3154680"/>
+            <a:ext cx="3977640" cy="1143000"/>
+          </a:xfrm>
+          <a:prstGeom prst="rect">
+            <a:avLst/>
+          </a:prstGeom>
+          <a:solidFill>
+            <a:srgbClr val="FFFFFF"/>
+          </a:solidFill>
+          <a:ln w="9525">
+            <a:solidFill>
+              <a:srgbClr val="E3E1EE"/>
+            </a:solidFill>
+            <a:prstDash val="solid"/>
+          </a:ln>
+        </p:spPr>
       </p:sp>
       <p:sp>
         <p:nvSpPr>
@@ -4144,7 +4153,7 @@
         </p:nvSpPr>
         <p:spPr>
           <a:xfrm>
-            <a:off x="822960" y="3593592"/>
+            <a:off x="685800" y="3337560"/>
             <a:ext cx="3566160" cy="274320"/>
           </a:xfrm>
           <a:prstGeom prst="rect">
@@ -4169,7 +4178,7 @@
                 <a:ea typeface="Arial" pitchFamily="34" charset="-122"/>
                 <a:cs typeface="Arial" pitchFamily="34" charset="-120"/>
               </a:rPr>
-              <a:t>Who validates a level</a:t>
+              <a:t>Programme totals</a:t>
             </a:r>
             <a:endParaRPr lang="en-US" sz="1250" dirty="0"/>
           </a:p>
@@ -4183,7 +4192,7 @@
         </p:nvSpPr>
         <p:spPr>
           <a:xfrm>
-            <a:off x="822960" y="3886200"/>
+            <a:off x="685800" y="3630168"/>
             <a:ext cx="3566160" cy="594360"/>
           </a:xfrm>
           <a:prstGeom prst="rect">
@@ -4211,7 +4220,7 @@
                 <a:ea typeface="Arial" pitchFamily="34" charset="-122"/>
                 <a:cs typeface="Arial" pitchFamily="34" charset="-120"/>
               </a:rPr>
-              <a:t>The lead coach alone, or a panel at the final showcase?</a:t>
+              <a:t>People reached, partners involved, projects completed — across the school, for the leadership team.</a:t>
             </a:r>
             <a:endParaRPr lang="en-US" sz="1000" dirty="0"/>
           </a:p>
@@ -4219,42 +4228,28 @@
       </p:sp>
       <p:sp>
         <p:nvSpPr>
-          <p:cNvPr id="14" name="Text 12"/>
-          <p:cNvSpPr txBox="1"/>
-          <p:nvPr/>
-        </p:nvSpPr>
-        <p:spPr>
-          <a:xfrm>
-            <a:off x="4663440" y="1783080"/>
-            <a:ext cx="320040" cy="274320"/>
-          </a:xfrm>
-          <a:prstGeom prst="rect">
-            <a:avLst/>
-          </a:prstGeom>
-          <a:noFill/>
-          <a:ln/>
-        </p:spPr>
-        <p:txBody>
-          <a:bodyPr wrap="square" lIns="0" tIns="0" rIns="0" bIns="0" rtlCol="0" anchor="ctr"/>
-          <a:lstStyle/>
-          <a:p>
-            <a:pPr indent="0" marL="0">
-              <a:buNone/>
-            </a:pPr>
-            <a:r>
-              <a:rPr lang="en-US" sz="1600" b="1" dirty="0">
-                <a:solidFill>
-                  <a:srgbClr val="CD9C00"/>
-                </a:solidFill>
-                <a:latin typeface="Arial" pitchFamily="34" charset="0"/>
-                <a:ea typeface="Arial" pitchFamily="34" charset="-122"/>
-                <a:cs typeface="Arial" pitchFamily="34" charset="-120"/>
-              </a:rPr>
-              <a:t>4</a:t>
-            </a:r>
-            <a:endParaRPr lang="en-US" sz="1600" dirty="0"/>
-          </a:p>
-        </p:txBody>
+          <p:cNvPr id="14" name="Shape 12"/>
+          <p:cNvSpPr/>
+          <p:nvPr/>
+        </p:nvSpPr>
+        <p:spPr>
+          <a:xfrm>
+            <a:off x="4663440" y="3154680"/>
+            <a:ext cx="3977640" cy="1143000"/>
+          </a:xfrm>
+          <a:prstGeom prst="rect">
+            <a:avLst/>
+          </a:prstGeom>
+          <a:solidFill>
+            <a:srgbClr val="FFFFFF"/>
+          </a:solidFill>
+          <a:ln w="9525">
+            <a:solidFill>
+              <a:srgbClr val="E3E1EE"/>
+            </a:solidFill>
+            <a:prstDash val="solid"/>
+          </a:ln>
+        </p:spPr>
       </p:sp>
       <p:sp>
         <p:nvSpPr>
@@ -4264,7 +4259,7 @@
         </p:nvSpPr>
         <p:spPr>
           <a:xfrm>
-            <a:off x="5029200" y="1764792"/>
+            <a:off x="4892040" y="3337560"/>
             <a:ext cx="3566160" cy="274320"/>
           </a:xfrm>
           <a:prstGeom prst="rect">
@@ -4289,7 +4284,7 @@
                 <a:ea typeface="Arial" pitchFamily="34" charset="-122"/>
                 <a:cs typeface="Arial" pitchFamily="34" charset="-120"/>
               </a:rPr>
-              <a:t>Which AI tool</a:t>
+              <a:t>Catalogue and toolkit written</a:t>
             </a:r>
             <a:endParaRPr lang="en-US" sz="1250" dirty="0"/>
           </a:p>
@@ -4303,7 +4298,7 @@
         </p:nvSpPr>
         <p:spPr>
           <a:xfrm>
-            <a:off x="5029200" y="2057400"/>
+            <a:off x="4892040" y="3630168"/>
             <a:ext cx="3566160" cy="594360"/>
           </a:xfrm>
           <a:prstGeom prst="rect">
@@ -4331,7 +4326,7 @@
                 <a:ea typeface="Arial" pitchFamily="34" charset="-122"/>
                 <a:cs typeface="Arial" pitchFamily="34" charset="-120"/>
               </a:rPr>
-              <a:t>One approved tool, checked for 13–18 age terms. Blocks the AI kits in Release 2.</a:t>
+              <a:t>The 54 blank practices, and a real brief on each catalogue entry. Content work with the coaches, not code.</a:t>
             </a:r>
             <a:endParaRPr lang="en-US" sz="1000" dirty="0"/>
           </a:p>
@@ -4340,246 +4335,6 @@
       <p:sp>
         <p:nvSpPr>
           <p:cNvPr id="17" name="Text 15"/>
-          <p:cNvSpPr txBox="1"/>
-          <p:nvPr/>
-        </p:nvSpPr>
-        <p:spPr>
-          <a:xfrm>
-            <a:off x="4663440" y="2697480"/>
-            <a:ext cx="320040" cy="274320"/>
-          </a:xfrm>
-          <a:prstGeom prst="rect">
-            <a:avLst/>
-          </a:prstGeom>
-          <a:noFill/>
-          <a:ln/>
-        </p:spPr>
-        <p:txBody>
-          <a:bodyPr wrap="square" lIns="0" tIns="0" rIns="0" bIns="0" rtlCol="0" anchor="ctr"/>
-          <a:lstStyle/>
-          <a:p>
-            <a:pPr indent="0" marL="0">
-              <a:buNone/>
-            </a:pPr>
-            <a:r>
-              <a:rPr lang="en-US" sz="1600" b="1" dirty="0">
-                <a:solidFill>
-                  <a:srgbClr val="CD9C00"/>
-                </a:solidFill>
-                <a:latin typeface="Arial" pitchFamily="34" charset="0"/>
-                <a:ea typeface="Arial" pitchFamily="34" charset="-122"/>
-                <a:cs typeface="Arial" pitchFamily="34" charset="-120"/>
-              </a:rPr>
-              <a:t>5</a:t>
-            </a:r>
-            <a:endParaRPr lang="en-US" sz="1600" dirty="0"/>
-          </a:p>
-        </p:txBody>
-      </p:sp>
-      <p:sp>
-        <p:nvSpPr>
-          <p:cNvPr id="18" name="Text 16"/>
-          <p:cNvSpPr txBox="1"/>
-          <p:nvPr/>
-        </p:nvSpPr>
-        <p:spPr>
-          <a:xfrm>
-            <a:off x="5029200" y="2679192"/>
-            <a:ext cx="3566160" cy="274320"/>
-          </a:xfrm>
-          <a:prstGeom prst="rect">
-            <a:avLst/>
-          </a:prstGeom>
-          <a:noFill/>
-          <a:ln/>
-        </p:spPr>
-        <p:txBody>
-          <a:bodyPr wrap="square" lIns="0" tIns="0" rIns="0" bIns="0" rtlCol="0" anchor="ctr"/>
-          <a:lstStyle/>
-          <a:p>
-            <a:pPr indent="0" marL="0">
-              <a:buNone/>
-            </a:pPr>
-            <a:r>
-              <a:rPr lang="en-US" sz="1250" b="1" dirty="0">
-                <a:solidFill>
-                  <a:srgbClr val="14142B"/>
-                </a:solidFill>
-                <a:latin typeface="Arial" pitchFamily="34" charset="0"/>
-                <a:ea typeface="Arial" pitchFamily="34" charset="-122"/>
-                <a:cs typeface="Arial" pitchFamily="34" charset="-120"/>
-              </a:rPr>
-              <a:t>Who writes the content</a:t>
-            </a:r>
-            <a:endParaRPr lang="en-US" sz="1250" dirty="0"/>
-          </a:p>
-        </p:txBody>
-      </p:sp>
-      <p:sp>
-        <p:nvSpPr>
-          <p:cNvPr id="19" name="Text 17"/>
-          <p:cNvSpPr txBox="1"/>
-          <p:nvPr/>
-        </p:nvSpPr>
-        <p:spPr>
-          <a:xfrm>
-            <a:off x="5029200" y="2971800"/>
-            <a:ext cx="3566160" cy="594360"/>
-          </a:xfrm>
-          <a:prstGeom prst="rect">
-            <a:avLst/>
-          </a:prstGeom>
-          <a:noFill/>
-          <a:ln/>
-        </p:spPr>
-        <p:txBody>
-          <a:bodyPr wrap="square" lIns="0" tIns="0" rIns="0" bIns="0" rtlCol="0" anchor="t"/>
-          <a:lstStyle/>
-          <a:p>
-            <a:pPr indent="0" marL="0">
-              <a:lnSpc>
-                <a:spcPct val="125000"/>
-              </a:lnSpc>
-              <a:buNone/>
-            </a:pPr>
-            <a:r>
-              <a:rPr lang="en-US" sz="1000" dirty="0">
-                <a:solidFill>
-                  <a:srgbClr val="5F5F7A"/>
-                </a:solidFill>
-                <a:latin typeface="Arial" pitchFamily="34" charset="0"/>
-                <a:ea typeface="Arial" pitchFamily="34" charset="-122"/>
-                <a:cs typeface="Arial" pitchFamily="34" charset="-120"/>
-              </a:rPr>
-              <a:t>54 practice pages and 92 catalogue briefs. Blocks Release 3.</a:t>
-            </a:r>
-            <a:endParaRPr lang="en-US" sz="1000" dirty="0"/>
-          </a:p>
-        </p:txBody>
-      </p:sp>
-      <p:sp>
-        <p:nvSpPr>
-          <p:cNvPr id="20" name="Text 18"/>
-          <p:cNvSpPr txBox="1"/>
-          <p:nvPr/>
-        </p:nvSpPr>
-        <p:spPr>
-          <a:xfrm>
-            <a:off x="4663440" y="3611880"/>
-            <a:ext cx="320040" cy="274320"/>
-          </a:xfrm>
-          <a:prstGeom prst="rect">
-            <a:avLst/>
-          </a:prstGeom>
-          <a:noFill/>
-          <a:ln/>
-        </p:spPr>
-        <p:txBody>
-          <a:bodyPr wrap="square" lIns="0" tIns="0" rIns="0" bIns="0" rtlCol="0" anchor="ctr"/>
-          <a:lstStyle/>
-          <a:p>
-            <a:pPr indent="0" marL="0">
-              <a:buNone/>
-            </a:pPr>
-            <a:r>
-              <a:rPr lang="en-US" sz="1600" b="1" dirty="0">
-                <a:solidFill>
-                  <a:srgbClr val="CD9C00"/>
-                </a:solidFill>
-                <a:latin typeface="Arial" pitchFamily="34" charset="0"/>
-                <a:ea typeface="Arial" pitchFamily="34" charset="-122"/>
-                <a:cs typeface="Arial" pitchFamily="34" charset="-120"/>
-              </a:rPr>
-              <a:t>6</a:t>
-            </a:r>
-            <a:endParaRPr lang="en-US" sz="1600" dirty="0"/>
-          </a:p>
-        </p:txBody>
-      </p:sp>
-      <p:sp>
-        <p:nvSpPr>
-          <p:cNvPr id="21" name="Text 19"/>
-          <p:cNvSpPr txBox="1"/>
-          <p:nvPr/>
-        </p:nvSpPr>
-        <p:spPr>
-          <a:xfrm>
-            <a:off x="5029200" y="3593592"/>
-            <a:ext cx="3566160" cy="274320"/>
-          </a:xfrm>
-          <a:prstGeom prst="rect">
-            <a:avLst/>
-          </a:prstGeom>
-          <a:noFill/>
-          <a:ln/>
-        </p:spPr>
-        <p:txBody>
-          <a:bodyPr wrap="square" lIns="0" tIns="0" rIns="0" bIns="0" rtlCol="0" anchor="ctr"/>
-          <a:lstStyle/>
-          <a:p>
-            <a:pPr indent="0" marL="0">
-              <a:buNone/>
-            </a:pPr>
-            <a:r>
-              <a:rPr lang="en-US" sz="1250" b="1" dirty="0">
-                <a:solidFill>
-                  <a:srgbClr val="14142B"/>
-                </a:solidFill>
-                <a:latin typeface="Arial" pitchFamily="34" charset="0"/>
-                <a:ea typeface="Arial" pitchFamily="34" charset="-122"/>
-                <a:cs typeface="Arial" pitchFamily="34" charset="-120"/>
-              </a:rPr>
-              <a:t>Hosting</a:t>
-            </a:r>
-            <a:endParaRPr lang="en-US" sz="1250" dirty="0"/>
-          </a:p>
-        </p:txBody>
-      </p:sp>
-      <p:sp>
-        <p:nvSpPr>
-          <p:cNvPr id="22" name="Text 20"/>
-          <p:cNvSpPr txBox="1"/>
-          <p:nvPr/>
-        </p:nvSpPr>
-        <p:spPr>
-          <a:xfrm>
-            <a:off x="5029200" y="3886200"/>
-            <a:ext cx="3566160" cy="594360"/>
-          </a:xfrm>
-          <a:prstGeom prst="rect">
-            <a:avLst/>
-          </a:prstGeom>
-          <a:noFill/>
-          <a:ln/>
-        </p:spPr>
-        <p:txBody>
-          <a:bodyPr wrap="square" lIns="0" tIns="0" rIns="0" bIns="0" rtlCol="0" anchor="t"/>
-          <a:lstStyle/>
-          <a:p>
-            <a:pPr indent="0" marL="0">
-              <a:lnSpc>
-                <a:spcPct val="125000"/>
-              </a:lnSpc>
-              <a:buNone/>
-            </a:pPr>
-            <a:r>
-              <a:rPr lang="en-US" sz="1000" dirty="0">
-                <a:solidFill>
-                  <a:srgbClr val="5F5F7A"/>
-                </a:solidFill>
-                <a:latin typeface="Arial" pitchFamily="34" charset="0"/>
-                <a:ea typeface="Arial" pitchFamily="34" charset="-122"/>
-                <a:cs typeface="Arial" pitchFamily="34" charset="-120"/>
-              </a:rPr>
-              <a:t>Vercel, or Eastwood infrastructure — to settle with Leo before real student data goes in.</a:t>
-            </a:r>
-            <a:endParaRPr lang="en-US" sz="1000" dirty="0"/>
-          </a:p>
-        </p:txBody>
-      </p:sp>
-      <p:sp>
-        <p:nvSpPr>
-          <p:cNvPr id="23" name="Text 21"/>
           <p:cNvSpPr txBox="1"/>
           <p:nvPr/>
         </p:nvSpPr>
@@ -4618,7 +4373,7 @@
       </p:sp>
       <p:sp>
         <p:nvSpPr>
-          <p:cNvPr id="24" name="Text 22"/>
+          <p:cNvPr id="18" name="Text 16"/>
           <p:cNvSpPr txBox="1"/>
           <p:nvPr/>
         </p:nvSpPr>
@@ -4666,6 +4421,959 @@
 <file path=ppt/slides/slide13.xml><?xml version="1.0" encoding="utf-8"?>
 <p:sld xmlns:a="http://schemas.openxmlformats.org/drawingml/2006/main" xmlns:r="http://schemas.openxmlformats.org/officeDocument/2006/relationships" xmlns:p="http://schemas.openxmlformats.org/presentationml/2006/main">
   <p:cSld name="Slide 13">
+    <p:bg>
+      <p:bgPr>
+        <a:solidFill>
+          <a:srgbClr val="F6F5FA"/>
+        </a:solidFill>
+      </p:bgPr>
+    </p:bg>
+    <p:spTree>
+      <p:nvGrpSpPr>
+        <p:cNvPr id="1" name=""/>
+        <p:cNvGrpSpPr/>
+        <p:nvPr/>
+      </p:nvGrpSpPr>
+      <p:grpSpPr>
+        <a:xfrm>
+          <a:off x="0" y="0"/>
+          <a:ext cx="0" cy="0"/>
+          <a:chOff x="0" y="0"/>
+          <a:chExt cx="0" cy="0"/>
+        </a:xfrm>
+      </p:grpSpPr>
+      <p:sp>
+        <p:nvSpPr>
+          <p:cNvPr id="2" name="Text 0"/>
+          <p:cNvSpPr txBox="1"/>
+          <p:nvPr/>
+        </p:nvSpPr>
+        <p:spPr>
+          <a:xfrm>
+            <a:off x="457200" y="457200"/>
+            <a:ext cx="4572000" cy="228600"/>
+          </a:xfrm>
+          <a:prstGeom prst="rect">
+            <a:avLst/>
+          </a:prstGeom>
+          <a:noFill/>
+          <a:ln/>
+        </p:spPr>
+        <p:txBody>
+          <a:bodyPr wrap="square" lIns="0" tIns="0" rIns="0" bIns="0" rtlCol="0" anchor="ctr"/>
+          <a:lstStyle/>
+          <a:p>
+            <a:pPr indent="0" marL="0">
+              <a:buNone/>
+            </a:pPr>
+            <a:r>
+              <a:rPr lang="en-US" sz="950" b="1" spc="300" kern="0" dirty="0">
+                <a:solidFill>
+                  <a:srgbClr val="500591"/>
+                </a:solidFill>
+                <a:latin typeface="Arial" pitchFamily="34" charset="0"/>
+                <a:ea typeface="Arial" pitchFamily="34" charset="-122"/>
+                <a:cs typeface="Arial" pitchFamily="34" charset="-120"/>
+              </a:rPr>
+              <a:t>DECISIONS FOR THE TEAM</a:t>
+            </a:r>
+            <a:endParaRPr lang="en-US" sz="950" dirty="0"/>
+          </a:p>
+        </p:txBody>
+      </p:sp>
+      <p:sp>
+        <p:nvSpPr>
+          <p:cNvPr id="3" name="Text 1"/>
+          <p:cNvSpPr txBox="1"/>
+          <p:nvPr/>
+        </p:nvSpPr>
+        <p:spPr>
+          <a:xfrm>
+            <a:off x="457200" y="731520"/>
+            <a:ext cx="8229600" cy="548640"/>
+          </a:xfrm>
+          <a:prstGeom prst="rect">
+            <a:avLst/>
+          </a:prstGeom>
+          <a:noFill/>
+          <a:ln/>
+        </p:spPr>
+        <p:txBody>
+          <a:bodyPr wrap="square" lIns="0" tIns="0" rIns="0" bIns="0" rtlCol="0" anchor="t"/>
+          <a:lstStyle/>
+          <a:p>
+            <a:pPr indent="0" marL="0">
+              <a:lnSpc>
+                <a:spcPct val="106000"/>
+              </a:lnSpc>
+              <a:buNone/>
+            </a:pPr>
+            <a:r>
+              <a:rPr lang="en-US" sz="2700" b="1" dirty="0">
+                <a:solidFill>
+                  <a:srgbClr val="14142B"/>
+                </a:solidFill>
+                <a:latin typeface="Arial" pitchFamily="34" charset="0"/>
+                <a:ea typeface="Arial" pitchFamily="34" charset="-122"/>
+                <a:cs typeface="Arial" pitchFamily="34" charset="-120"/>
+              </a:rPr>
+              <a:t>Six things the brief left open.</a:t>
+            </a:r>
+            <a:endParaRPr lang="en-US" sz="2700" dirty="0"/>
+          </a:p>
+        </p:txBody>
+      </p:sp>
+      <p:sp>
+        <p:nvSpPr>
+          <p:cNvPr id="4" name="Text 2"/>
+          <p:cNvSpPr txBox="1"/>
+          <p:nvPr/>
+        </p:nvSpPr>
+        <p:spPr>
+          <a:xfrm>
+            <a:off x="457200" y="1298448"/>
+            <a:ext cx="7863840" cy="274320"/>
+          </a:xfrm>
+          <a:prstGeom prst="rect">
+            <a:avLst/>
+          </a:prstGeom>
+          <a:noFill/>
+          <a:ln/>
+        </p:spPr>
+        <p:txBody>
+          <a:bodyPr wrap="square" lIns="0" tIns="0" rIns="0" bIns="0" rtlCol="0" anchor="t"/>
+          <a:lstStyle/>
+          <a:p>
+            <a:pPr indent="0" marL="0">
+              <a:lnSpc>
+                <a:spcPct val="125000"/>
+              </a:lnSpc>
+              <a:buNone/>
+            </a:pPr>
+            <a:r>
+              <a:rPr lang="en-US" sz="1200" dirty="0">
+                <a:solidFill>
+                  <a:srgbClr val="5F5F7A"/>
+                </a:solidFill>
+                <a:latin typeface="Arial" pitchFamily="34" charset="0"/>
+                <a:ea typeface="Arial" pitchFamily="34" charset="-122"/>
+                <a:cs typeface="Arial" pitchFamily="34" charset="-120"/>
+              </a:rPr>
+              <a:t>Each one blocks something. Worth settling in this meeting rather than over email.</a:t>
+            </a:r>
+            <a:endParaRPr lang="en-US" sz="1200" dirty="0"/>
+          </a:p>
+        </p:txBody>
+      </p:sp>
+      <p:sp>
+        <p:nvSpPr>
+          <p:cNvPr id="5" name="Text 3"/>
+          <p:cNvSpPr txBox="1"/>
+          <p:nvPr/>
+        </p:nvSpPr>
+        <p:spPr>
+          <a:xfrm>
+            <a:off x="457200" y="1783080"/>
+            <a:ext cx="320040" cy="274320"/>
+          </a:xfrm>
+          <a:prstGeom prst="rect">
+            <a:avLst/>
+          </a:prstGeom>
+          <a:noFill/>
+          <a:ln/>
+        </p:spPr>
+        <p:txBody>
+          <a:bodyPr wrap="square" lIns="0" tIns="0" rIns="0" bIns="0" rtlCol="0" anchor="ctr"/>
+          <a:lstStyle/>
+          <a:p>
+            <a:pPr indent="0" marL="0">
+              <a:buNone/>
+            </a:pPr>
+            <a:r>
+              <a:rPr lang="en-US" sz="1600" b="1" dirty="0">
+                <a:solidFill>
+                  <a:srgbClr val="CD9C00"/>
+                </a:solidFill>
+                <a:latin typeface="Arial" pitchFamily="34" charset="0"/>
+                <a:ea typeface="Arial" pitchFamily="34" charset="-122"/>
+                <a:cs typeface="Arial" pitchFamily="34" charset="-120"/>
+              </a:rPr>
+              <a:t>1</a:t>
+            </a:r>
+            <a:endParaRPr lang="en-US" sz="1600" dirty="0"/>
+          </a:p>
+        </p:txBody>
+      </p:sp>
+      <p:sp>
+        <p:nvSpPr>
+          <p:cNvPr id="6" name="Text 4"/>
+          <p:cNvSpPr txBox="1"/>
+          <p:nvPr/>
+        </p:nvSpPr>
+        <p:spPr>
+          <a:xfrm>
+            <a:off x="822960" y="1764792"/>
+            <a:ext cx="3566160" cy="274320"/>
+          </a:xfrm>
+          <a:prstGeom prst="rect">
+            <a:avLst/>
+          </a:prstGeom>
+          <a:noFill/>
+          <a:ln/>
+        </p:spPr>
+        <p:txBody>
+          <a:bodyPr wrap="square" lIns="0" tIns="0" rIns="0" bIns="0" rtlCol="0" anchor="ctr"/>
+          <a:lstStyle/>
+          <a:p>
+            <a:pPr indent="0" marL="0">
+              <a:buNone/>
+            </a:pPr>
+            <a:r>
+              <a:rPr lang="en-US" sz="1250" b="1" dirty="0">
+                <a:solidFill>
+                  <a:srgbClr val="14142B"/>
+                </a:solidFill>
+                <a:latin typeface="Arial" pitchFamily="34" charset="0"/>
+                <a:ea typeface="Arial" pitchFamily="34" charset="-122"/>
+                <a:cs typeface="Arial" pitchFamily="34" charset="-120"/>
+              </a:rPr>
+              <a:t>Phase names</a:t>
+            </a:r>
+            <a:endParaRPr lang="en-US" sz="1250" dirty="0"/>
+          </a:p>
+        </p:txBody>
+      </p:sp>
+      <p:sp>
+        <p:nvSpPr>
+          <p:cNvPr id="7" name="Text 5"/>
+          <p:cNvSpPr txBox="1"/>
+          <p:nvPr/>
+        </p:nvSpPr>
+        <p:spPr>
+          <a:xfrm>
+            <a:off x="822960" y="2057400"/>
+            <a:ext cx="3566160" cy="594360"/>
+          </a:xfrm>
+          <a:prstGeom prst="rect">
+            <a:avLst/>
+          </a:prstGeom>
+          <a:noFill/>
+          <a:ln/>
+        </p:spPr>
+        <p:txBody>
+          <a:bodyPr wrap="square" lIns="0" tIns="0" rIns="0" bIns="0" rtlCol="0" anchor="t"/>
+          <a:lstStyle/>
+          <a:p>
+            <a:pPr indent="0" marL="0">
+              <a:lnSpc>
+                <a:spcPct val="125000"/>
+              </a:lnSpc>
+              <a:buNone/>
+            </a:pPr>
+            <a:r>
+              <a:rPr lang="en-US" sz="1000" dirty="0">
+                <a:solidFill>
+                  <a:srgbClr val="5F5F7A"/>
+                </a:solidFill>
+                <a:latin typeface="Arial" pitchFamily="34" charset="0"/>
+                <a:ea typeface="Arial" pitchFamily="34" charset="-122"/>
+                <a:cs typeface="Arial" pitchFamily="34" charset="-120"/>
+              </a:rPr>
+              <a:t>Create / Plan / Execute / Report is live now. Keep, or revert to Ideation / Goals / Execution / Presentation?</a:t>
+            </a:r>
+            <a:endParaRPr lang="en-US" sz="1000" dirty="0"/>
+          </a:p>
+        </p:txBody>
+      </p:sp>
+      <p:sp>
+        <p:nvSpPr>
+          <p:cNvPr id="8" name="Text 6"/>
+          <p:cNvSpPr txBox="1"/>
+          <p:nvPr/>
+        </p:nvSpPr>
+        <p:spPr>
+          <a:xfrm>
+            <a:off x="457200" y="2697480"/>
+            <a:ext cx="320040" cy="274320"/>
+          </a:xfrm>
+          <a:prstGeom prst="rect">
+            <a:avLst/>
+          </a:prstGeom>
+          <a:noFill/>
+          <a:ln/>
+        </p:spPr>
+        <p:txBody>
+          <a:bodyPr wrap="square" lIns="0" tIns="0" rIns="0" bIns="0" rtlCol="0" anchor="ctr"/>
+          <a:lstStyle/>
+          <a:p>
+            <a:pPr indent="0" marL="0">
+              <a:buNone/>
+            </a:pPr>
+            <a:r>
+              <a:rPr lang="en-US" sz="1600" b="1" dirty="0">
+                <a:solidFill>
+                  <a:srgbClr val="CD9C00"/>
+                </a:solidFill>
+                <a:latin typeface="Arial" pitchFamily="34" charset="0"/>
+                <a:ea typeface="Arial" pitchFamily="34" charset="-122"/>
+                <a:cs typeface="Arial" pitchFamily="34" charset="-120"/>
+              </a:rPr>
+              <a:t>2</a:t>
+            </a:r>
+            <a:endParaRPr lang="en-US" sz="1600" dirty="0"/>
+          </a:p>
+        </p:txBody>
+      </p:sp>
+      <p:sp>
+        <p:nvSpPr>
+          <p:cNvPr id="9" name="Text 7"/>
+          <p:cNvSpPr txBox="1"/>
+          <p:nvPr/>
+        </p:nvSpPr>
+        <p:spPr>
+          <a:xfrm>
+            <a:off x="822960" y="2679192"/>
+            <a:ext cx="3566160" cy="274320"/>
+          </a:xfrm>
+          <a:prstGeom prst="rect">
+            <a:avLst/>
+          </a:prstGeom>
+          <a:noFill/>
+          <a:ln/>
+        </p:spPr>
+        <p:txBody>
+          <a:bodyPr wrap="square" lIns="0" tIns="0" rIns="0" bIns="0" rtlCol="0" anchor="ctr"/>
+          <a:lstStyle/>
+          <a:p>
+            <a:pPr indent="0" marL="0">
+              <a:buNone/>
+            </a:pPr>
+            <a:r>
+              <a:rPr lang="en-US" sz="1250" b="1" dirty="0">
+                <a:solidFill>
+                  <a:srgbClr val="14142B"/>
+                </a:solidFill>
+                <a:latin typeface="Arial" pitchFamily="34" charset="0"/>
+                <a:ea typeface="Arial" pitchFamily="34" charset="-122"/>
+                <a:cs typeface="Arial" pitchFamily="34" charset="-120"/>
+              </a:rPr>
+              <a:t>Cycle length</a:t>
+            </a:r>
+            <a:endParaRPr lang="en-US" sz="1250" dirty="0"/>
+          </a:p>
+        </p:txBody>
+      </p:sp>
+      <p:sp>
+        <p:nvSpPr>
+          <p:cNvPr id="10" name="Text 8"/>
+          <p:cNvSpPr txBox="1"/>
+          <p:nvPr/>
+        </p:nvSpPr>
+        <p:spPr>
+          <a:xfrm>
+            <a:off x="822960" y="2971800"/>
+            <a:ext cx="3566160" cy="594360"/>
+          </a:xfrm>
+          <a:prstGeom prst="rect">
+            <a:avLst/>
+          </a:prstGeom>
+          <a:noFill/>
+          <a:ln/>
+        </p:spPr>
+        <p:txBody>
+          <a:bodyPr wrap="square" lIns="0" tIns="0" rIns="0" bIns="0" rtlCol="0" anchor="t"/>
+          <a:lstStyle/>
+          <a:p>
+            <a:pPr indent="0" marL="0">
+              <a:lnSpc>
+                <a:spcPct val="125000"/>
+              </a:lnSpc>
+              <a:buNone/>
+            </a:pPr>
+            <a:r>
+              <a:rPr lang="en-US" sz="1000" dirty="0">
+                <a:solidFill>
+                  <a:srgbClr val="5F5F7A"/>
+                </a:solidFill>
+                <a:latin typeface="Arial" pitchFamily="34" charset="0"/>
+                <a:ea typeface="Arial" pitchFamily="34" charset="-122"/>
+                <a:cs typeface="Arial" pitchFamily="34" charset="-120"/>
+              </a:rPr>
+              <a:t>Six-week cycles, or projects running over several months as the handbook says?</a:t>
+            </a:r>
+            <a:endParaRPr lang="en-US" sz="1000" dirty="0"/>
+          </a:p>
+        </p:txBody>
+      </p:sp>
+      <p:sp>
+        <p:nvSpPr>
+          <p:cNvPr id="11" name="Text 9"/>
+          <p:cNvSpPr txBox="1"/>
+          <p:nvPr/>
+        </p:nvSpPr>
+        <p:spPr>
+          <a:xfrm>
+            <a:off x="457200" y="3611880"/>
+            <a:ext cx="320040" cy="274320"/>
+          </a:xfrm>
+          <a:prstGeom prst="rect">
+            <a:avLst/>
+          </a:prstGeom>
+          <a:noFill/>
+          <a:ln/>
+        </p:spPr>
+        <p:txBody>
+          <a:bodyPr wrap="square" lIns="0" tIns="0" rIns="0" bIns="0" rtlCol="0" anchor="ctr"/>
+          <a:lstStyle/>
+          <a:p>
+            <a:pPr indent="0" marL="0">
+              <a:buNone/>
+            </a:pPr>
+            <a:r>
+              <a:rPr lang="en-US" sz="1600" b="1" dirty="0">
+                <a:solidFill>
+                  <a:srgbClr val="CD9C00"/>
+                </a:solidFill>
+                <a:latin typeface="Arial" pitchFamily="34" charset="0"/>
+                <a:ea typeface="Arial" pitchFamily="34" charset="-122"/>
+                <a:cs typeface="Arial" pitchFamily="34" charset="-120"/>
+              </a:rPr>
+              <a:t>3</a:t>
+            </a:r>
+            <a:endParaRPr lang="en-US" sz="1600" dirty="0"/>
+          </a:p>
+        </p:txBody>
+      </p:sp>
+      <p:sp>
+        <p:nvSpPr>
+          <p:cNvPr id="12" name="Text 10"/>
+          <p:cNvSpPr txBox="1"/>
+          <p:nvPr/>
+        </p:nvSpPr>
+        <p:spPr>
+          <a:xfrm>
+            <a:off x="822960" y="3593592"/>
+            <a:ext cx="3566160" cy="274320"/>
+          </a:xfrm>
+          <a:prstGeom prst="rect">
+            <a:avLst/>
+          </a:prstGeom>
+          <a:noFill/>
+          <a:ln/>
+        </p:spPr>
+        <p:txBody>
+          <a:bodyPr wrap="square" lIns="0" tIns="0" rIns="0" bIns="0" rtlCol="0" anchor="ctr"/>
+          <a:lstStyle/>
+          <a:p>
+            <a:pPr indent="0" marL="0">
+              <a:buNone/>
+            </a:pPr>
+            <a:r>
+              <a:rPr lang="en-US" sz="1250" b="1" dirty="0">
+                <a:solidFill>
+                  <a:srgbClr val="14142B"/>
+                </a:solidFill>
+                <a:latin typeface="Arial" pitchFamily="34" charset="0"/>
+                <a:ea typeface="Arial" pitchFamily="34" charset="-122"/>
+                <a:cs typeface="Arial" pitchFamily="34" charset="-120"/>
+              </a:rPr>
+              <a:t>Who validates a level</a:t>
+            </a:r>
+            <a:endParaRPr lang="en-US" sz="1250" dirty="0"/>
+          </a:p>
+        </p:txBody>
+      </p:sp>
+      <p:sp>
+        <p:nvSpPr>
+          <p:cNvPr id="13" name="Text 11"/>
+          <p:cNvSpPr txBox="1"/>
+          <p:nvPr/>
+        </p:nvSpPr>
+        <p:spPr>
+          <a:xfrm>
+            <a:off x="822960" y="3886200"/>
+            <a:ext cx="3566160" cy="594360"/>
+          </a:xfrm>
+          <a:prstGeom prst="rect">
+            <a:avLst/>
+          </a:prstGeom>
+          <a:noFill/>
+          <a:ln/>
+        </p:spPr>
+        <p:txBody>
+          <a:bodyPr wrap="square" lIns="0" tIns="0" rIns="0" bIns="0" rtlCol="0" anchor="t"/>
+          <a:lstStyle/>
+          <a:p>
+            <a:pPr indent="0" marL="0">
+              <a:lnSpc>
+                <a:spcPct val="125000"/>
+              </a:lnSpc>
+              <a:buNone/>
+            </a:pPr>
+            <a:r>
+              <a:rPr lang="en-US" sz="1000" dirty="0">
+                <a:solidFill>
+                  <a:srgbClr val="5F5F7A"/>
+                </a:solidFill>
+                <a:latin typeface="Arial" pitchFamily="34" charset="0"/>
+                <a:ea typeface="Arial" pitchFamily="34" charset="-122"/>
+                <a:cs typeface="Arial" pitchFamily="34" charset="-120"/>
+              </a:rPr>
+              <a:t>The lead coach alone, or a panel at the final showcase?</a:t>
+            </a:r>
+            <a:endParaRPr lang="en-US" sz="1000" dirty="0"/>
+          </a:p>
+        </p:txBody>
+      </p:sp>
+      <p:sp>
+        <p:nvSpPr>
+          <p:cNvPr id="14" name="Text 12"/>
+          <p:cNvSpPr txBox="1"/>
+          <p:nvPr/>
+        </p:nvSpPr>
+        <p:spPr>
+          <a:xfrm>
+            <a:off x="4663440" y="1783080"/>
+            <a:ext cx="320040" cy="274320"/>
+          </a:xfrm>
+          <a:prstGeom prst="rect">
+            <a:avLst/>
+          </a:prstGeom>
+          <a:noFill/>
+          <a:ln/>
+        </p:spPr>
+        <p:txBody>
+          <a:bodyPr wrap="square" lIns="0" tIns="0" rIns="0" bIns="0" rtlCol="0" anchor="ctr"/>
+          <a:lstStyle/>
+          <a:p>
+            <a:pPr indent="0" marL="0">
+              <a:buNone/>
+            </a:pPr>
+            <a:r>
+              <a:rPr lang="en-US" sz="1600" b="1" dirty="0">
+                <a:solidFill>
+                  <a:srgbClr val="CD9C00"/>
+                </a:solidFill>
+                <a:latin typeface="Arial" pitchFamily="34" charset="0"/>
+                <a:ea typeface="Arial" pitchFamily="34" charset="-122"/>
+                <a:cs typeface="Arial" pitchFamily="34" charset="-120"/>
+              </a:rPr>
+              <a:t>4</a:t>
+            </a:r>
+            <a:endParaRPr lang="en-US" sz="1600" dirty="0"/>
+          </a:p>
+        </p:txBody>
+      </p:sp>
+      <p:sp>
+        <p:nvSpPr>
+          <p:cNvPr id="15" name="Text 13"/>
+          <p:cNvSpPr txBox="1"/>
+          <p:nvPr/>
+        </p:nvSpPr>
+        <p:spPr>
+          <a:xfrm>
+            <a:off x="5029200" y="1764792"/>
+            <a:ext cx="3566160" cy="274320"/>
+          </a:xfrm>
+          <a:prstGeom prst="rect">
+            <a:avLst/>
+          </a:prstGeom>
+          <a:noFill/>
+          <a:ln/>
+        </p:spPr>
+        <p:txBody>
+          <a:bodyPr wrap="square" lIns="0" tIns="0" rIns="0" bIns="0" rtlCol="0" anchor="ctr"/>
+          <a:lstStyle/>
+          <a:p>
+            <a:pPr indent="0" marL="0">
+              <a:buNone/>
+            </a:pPr>
+            <a:r>
+              <a:rPr lang="en-US" sz="1250" b="1" dirty="0">
+                <a:solidFill>
+                  <a:srgbClr val="14142B"/>
+                </a:solidFill>
+                <a:latin typeface="Arial" pitchFamily="34" charset="0"/>
+                <a:ea typeface="Arial" pitchFamily="34" charset="-122"/>
+                <a:cs typeface="Arial" pitchFamily="34" charset="-120"/>
+              </a:rPr>
+              <a:t>Which AI tool</a:t>
+            </a:r>
+            <a:endParaRPr lang="en-US" sz="1250" dirty="0"/>
+          </a:p>
+        </p:txBody>
+      </p:sp>
+      <p:sp>
+        <p:nvSpPr>
+          <p:cNvPr id="16" name="Text 14"/>
+          <p:cNvSpPr txBox="1"/>
+          <p:nvPr/>
+        </p:nvSpPr>
+        <p:spPr>
+          <a:xfrm>
+            <a:off x="5029200" y="2057400"/>
+            <a:ext cx="3566160" cy="594360"/>
+          </a:xfrm>
+          <a:prstGeom prst="rect">
+            <a:avLst/>
+          </a:prstGeom>
+          <a:noFill/>
+          <a:ln/>
+        </p:spPr>
+        <p:txBody>
+          <a:bodyPr wrap="square" lIns="0" tIns="0" rIns="0" bIns="0" rtlCol="0" anchor="t"/>
+          <a:lstStyle/>
+          <a:p>
+            <a:pPr indent="0" marL="0">
+              <a:lnSpc>
+                <a:spcPct val="125000"/>
+              </a:lnSpc>
+              <a:buNone/>
+            </a:pPr>
+            <a:r>
+              <a:rPr lang="en-US" sz="1000" dirty="0">
+                <a:solidFill>
+                  <a:srgbClr val="5F5F7A"/>
+                </a:solidFill>
+                <a:latin typeface="Arial" pitchFamily="34" charset="0"/>
+                <a:ea typeface="Arial" pitchFamily="34" charset="-122"/>
+                <a:cs typeface="Arial" pitchFamily="34" charset="-120"/>
+              </a:rPr>
+              <a:t>One approved tool, checked for 13–18 age terms. Blocks the AI kits in Release 2.</a:t>
+            </a:r>
+            <a:endParaRPr lang="en-US" sz="1000" dirty="0"/>
+          </a:p>
+        </p:txBody>
+      </p:sp>
+      <p:sp>
+        <p:nvSpPr>
+          <p:cNvPr id="17" name="Text 15"/>
+          <p:cNvSpPr txBox="1"/>
+          <p:nvPr/>
+        </p:nvSpPr>
+        <p:spPr>
+          <a:xfrm>
+            <a:off x="4663440" y="2697480"/>
+            <a:ext cx="320040" cy="274320"/>
+          </a:xfrm>
+          <a:prstGeom prst="rect">
+            <a:avLst/>
+          </a:prstGeom>
+          <a:noFill/>
+          <a:ln/>
+        </p:spPr>
+        <p:txBody>
+          <a:bodyPr wrap="square" lIns="0" tIns="0" rIns="0" bIns="0" rtlCol="0" anchor="ctr"/>
+          <a:lstStyle/>
+          <a:p>
+            <a:pPr indent="0" marL="0">
+              <a:buNone/>
+            </a:pPr>
+            <a:r>
+              <a:rPr lang="en-US" sz="1600" b="1" dirty="0">
+                <a:solidFill>
+                  <a:srgbClr val="CD9C00"/>
+                </a:solidFill>
+                <a:latin typeface="Arial" pitchFamily="34" charset="0"/>
+                <a:ea typeface="Arial" pitchFamily="34" charset="-122"/>
+                <a:cs typeface="Arial" pitchFamily="34" charset="-120"/>
+              </a:rPr>
+              <a:t>5</a:t>
+            </a:r>
+            <a:endParaRPr lang="en-US" sz="1600" dirty="0"/>
+          </a:p>
+        </p:txBody>
+      </p:sp>
+      <p:sp>
+        <p:nvSpPr>
+          <p:cNvPr id="18" name="Text 16"/>
+          <p:cNvSpPr txBox="1"/>
+          <p:nvPr/>
+        </p:nvSpPr>
+        <p:spPr>
+          <a:xfrm>
+            <a:off x="5029200" y="2679192"/>
+            <a:ext cx="3566160" cy="274320"/>
+          </a:xfrm>
+          <a:prstGeom prst="rect">
+            <a:avLst/>
+          </a:prstGeom>
+          <a:noFill/>
+          <a:ln/>
+        </p:spPr>
+        <p:txBody>
+          <a:bodyPr wrap="square" lIns="0" tIns="0" rIns="0" bIns="0" rtlCol="0" anchor="ctr"/>
+          <a:lstStyle/>
+          <a:p>
+            <a:pPr indent="0" marL="0">
+              <a:buNone/>
+            </a:pPr>
+            <a:r>
+              <a:rPr lang="en-US" sz="1250" b="1" dirty="0">
+                <a:solidFill>
+                  <a:srgbClr val="14142B"/>
+                </a:solidFill>
+                <a:latin typeface="Arial" pitchFamily="34" charset="0"/>
+                <a:ea typeface="Arial" pitchFamily="34" charset="-122"/>
+                <a:cs typeface="Arial" pitchFamily="34" charset="-120"/>
+              </a:rPr>
+              <a:t>Who writes the content</a:t>
+            </a:r>
+            <a:endParaRPr lang="en-US" sz="1250" dirty="0"/>
+          </a:p>
+        </p:txBody>
+      </p:sp>
+      <p:sp>
+        <p:nvSpPr>
+          <p:cNvPr id="19" name="Text 17"/>
+          <p:cNvSpPr txBox="1"/>
+          <p:nvPr/>
+        </p:nvSpPr>
+        <p:spPr>
+          <a:xfrm>
+            <a:off x="5029200" y="2971800"/>
+            <a:ext cx="3566160" cy="594360"/>
+          </a:xfrm>
+          <a:prstGeom prst="rect">
+            <a:avLst/>
+          </a:prstGeom>
+          <a:noFill/>
+          <a:ln/>
+        </p:spPr>
+        <p:txBody>
+          <a:bodyPr wrap="square" lIns="0" tIns="0" rIns="0" bIns="0" rtlCol="0" anchor="t"/>
+          <a:lstStyle/>
+          <a:p>
+            <a:pPr indent="0" marL="0">
+              <a:lnSpc>
+                <a:spcPct val="125000"/>
+              </a:lnSpc>
+              <a:buNone/>
+            </a:pPr>
+            <a:r>
+              <a:rPr lang="en-US" sz="1000" dirty="0">
+                <a:solidFill>
+                  <a:srgbClr val="5F5F7A"/>
+                </a:solidFill>
+                <a:latin typeface="Arial" pitchFamily="34" charset="0"/>
+                <a:ea typeface="Arial" pitchFamily="34" charset="-122"/>
+                <a:cs typeface="Arial" pitchFamily="34" charset="-120"/>
+              </a:rPr>
+              <a:t>54 practice pages and 92 catalogue briefs. Blocks Release 3.</a:t>
+            </a:r>
+            <a:endParaRPr lang="en-US" sz="1000" dirty="0"/>
+          </a:p>
+        </p:txBody>
+      </p:sp>
+      <p:sp>
+        <p:nvSpPr>
+          <p:cNvPr id="20" name="Text 18"/>
+          <p:cNvSpPr txBox="1"/>
+          <p:nvPr/>
+        </p:nvSpPr>
+        <p:spPr>
+          <a:xfrm>
+            <a:off x="4663440" y="3611880"/>
+            <a:ext cx="320040" cy="274320"/>
+          </a:xfrm>
+          <a:prstGeom prst="rect">
+            <a:avLst/>
+          </a:prstGeom>
+          <a:noFill/>
+          <a:ln/>
+        </p:spPr>
+        <p:txBody>
+          <a:bodyPr wrap="square" lIns="0" tIns="0" rIns="0" bIns="0" rtlCol="0" anchor="ctr"/>
+          <a:lstStyle/>
+          <a:p>
+            <a:pPr indent="0" marL="0">
+              <a:buNone/>
+            </a:pPr>
+            <a:r>
+              <a:rPr lang="en-US" sz="1600" b="1" dirty="0">
+                <a:solidFill>
+                  <a:srgbClr val="CD9C00"/>
+                </a:solidFill>
+                <a:latin typeface="Arial" pitchFamily="34" charset="0"/>
+                <a:ea typeface="Arial" pitchFamily="34" charset="-122"/>
+                <a:cs typeface="Arial" pitchFamily="34" charset="-120"/>
+              </a:rPr>
+              <a:t>6</a:t>
+            </a:r>
+            <a:endParaRPr lang="en-US" sz="1600" dirty="0"/>
+          </a:p>
+        </p:txBody>
+      </p:sp>
+      <p:sp>
+        <p:nvSpPr>
+          <p:cNvPr id="21" name="Text 19"/>
+          <p:cNvSpPr txBox="1"/>
+          <p:nvPr/>
+        </p:nvSpPr>
+        <p:spPr>
+          <a:xfrm>
+            <a:off x="5029200" y="3593592"/>
+            <a:ext cx="3566160" cy="274320"/>
+          </a:xfrm>
+          <a:prstGeom prst="rect">
+            <a:avLst/>
+          </a:prstGeom>
+          <a:noFill/>
+          <a:ln/>
+        </p:spPr>
+        <p:txBody>
+          <a:bodyPr wrap="square" lIns="0" tIns="0" rIns="0" bIns="0" rtlCol="0" anchor="ctr"/>
+          <a:lstStyle/>
+          <a:p>
+            <a:pPr indent="0" marL="0">
+              <a:buNone/>
+            </a:pPr>
+            <a:r>
+              <a:rPr lang="en-US" sz="1250" b="1" dirty="0">
+                <a:solidFill>
+                  <a:srgbClr val="14142B"/>
+                </a:solidFill>
+                <a:latin typeface="Arial" pitchFamily="34" charset="0"/>
+                <a:ea typeface="Arial" pitchFamily="34" charset="-122"/>
+                <a:cs typeface="Arial" pitchFamily="34" charset="-120"/>
+              </a:rPr>
+              <a:t>Hosting</a:t>
+            </a:r>
+            <a:endParaRPr lang="en-US" sz="1250" dirty="0"/>
+          </a:p>
+        </p:txBody>
+      </p:sp>
+      <p:sp>
+        <p:nvSpPr>
+          <p:cNvPr id="22" name="Text 20"/>
+          <p:cNvSpPr txBox="1"/>
+          <p:nvPr/>
+        </p:nvSpPr>
+        <p:spPr>
+          <a:xfrm>
+            <a:off x="5029200" y="3886200"/>
+            <a:ext cx="3566160" cy="594360"/>
+          </a:xfrm>
+          <a:prstGeom prst="rect">
+            <a:avLst/>
+          </a:prstGeom>
+          <a:noFill/>
+          <a:ln/>
+        </p:spPr>
+        <p:txBody>
+          <a:bodyPr wrap="square" lIns="0" tIns="0" rIns="0" bIns="0" rtlCol="0" anchor="t"/>
+          <a:lstStyle/>
+          <a:p>
+            <a:pPr indent="0" marL="0">
+              <a:lnSpc>
+                <a:spcPct val="125000"/>
+              </a:lnSpc>
+              <a:buNone/>
+            </a:pPr>
+            <a:r>
+              <a:rPr lang="en-US" sz="1000" dirty="0">
+                <a:solidFill>
+                  <a:srgbClr val="5F5F7A"/>
+                </a:solidFill>
+                <a:latin typeface="Arial" pitchFamily="34" charset="0"/>
+                <a:ea typeface="Arial" pitchFamily="34" charset="-122"/>
+                <a:cs typeface="Arial" pitchFamily="34" charset="-120"/>
+              </a:rPr>
+              <a:t>Vercel, or Eastwood infrastructure — to settle with Leo before real student data goes in.</a:t>
+            </a:r>
+            <a:endParaRPr lang="en-US" sz="1000" dirty="0"/>
+          </a:p>
+        </p:txBody>
+      </p:sp>
+      <p:sp>
+        <p:nvSpPr>
+          <p:cNvPr id="23" name="Text 21"/>
+          <p:cNvSpPr txBox="1"/>
+          <p:nvPr/>
+        </p:nvSpPr>
+        <p:spPr>
+          <a:xfrm>
+            <a:off x="457200" y="4773168"/>
+            <a:ext cx="5486400" cy="228600"/>
+          </a:xfrm>
+          <a:prstGeom prst="rect">
+            <a:avLst/>
+          </a:prstGeom>
+          <a:noFill/>
+          <a:ln/>
+        </p:spPr>
+        <p:txBody>
+          <a:bodyPr wrap="square" lIns="0" tIns="0" rIns="0" bIns="0" rtlCol="0" anchor="ctr"/>
+          <a:lstStyle/>
+          <a:p>
+            <a:pPr indent="0" marL="0">
+              <a:buNone/>
+            </a:pPr>
+            <a:r>
+              <a:rPr lang="en-US" sz="850" dirty="0">
+                <a:solidFill>
+                  <a:srgbClr val="5F5F7A"/>
+                </a:solidFill>
+                <a:latin typeface="Arial" pitchFamily="34" charset="0"/>
+                <a:ea typeface="Arial" pitchFamily="34" charset="-122"/>
+                <a:cs typeface="Arial" pitchFamily="34" charset="-120"/>
+              </a:rPr>
+              <a:t>IMPACT · Release 1 · October 2026</a:t>
+            </a:r>
+            <a:endParaRPr lang="en-US" sz="850" dirty="0"/>
+          </a:p>
+        </p:txBody>
+      </p:sp>
+      <p:sp>
+        <p:nvSpPr>
+          <p:cNvPr id="24" name="Text 22"/>
+          <p:cNvSpPr txBox="1"/>
+          <p:nvPr/>
+        </p:nvSpPr>
+        <p:spPr>
+          <a:xfrm>
+            <a:off x="8138160" y="4773168"/>
+            <a:ext cx="548640" cy="228600"/>
+          </a:xfrm>
+          <a:prstGeom prst="rect">
+            <a:avLst/>
+          </a:prstGeom>
+          <a:noFill/>
+          <a:ln/>
+        </p:spPr>
+        <p:txBody>
+          <a:bodyPr wrap="square" lIns="0" tIns="0" rIns="0" bIns="0" rtlCol="0" anchor="ctr"/>
+          <a:lstStyle/>
+          <a:p>
+            <a:pPr algn="r" indent="0" marL="0">
+              <a:buNone/>
+            </a:pPr>
+            <a:r>
+              <a:rPr lang="en-US" sz="850" dirty="0">
+                <a:solidFill>
+                  <a:srgbClr val="5F5F7A"/>
+                </a:solidFill>
+                <a:latin typeface="Arial" pitchFamily="34" charset="0"/>
+                <a:ea typeface="Arial" pitchFamily="34" charset="-122"/>
+                <a:cs typeface="Arial" pitchFamily="34" charset="-120"/>
+              </a:rPr>
+              <a:t>13</a:t>
+            </a:r>
+            <a:endParaRPr lang="en-US" sz="850" dirty="0"/>
+          </a:p>
+        </p:txBody>
+      </p:sp>
+    </p:spTree>
+  </p:cSld>
+  <p:clrMapOvr>
+    <a:masterClrMapping/>
+  </p:clrMapOvr>
+</p:sld>
+</file>
+
+<file path=ppt/slides/slide14.xml><?xml version="1.0" encoding="utf-8"?>
+<p:sld xmlns:a="http://schemas.openxmlformats.org/drawingml/2006/main" xmlns:r="http://schemas.openxmlformats.org/officeDocument/2006/relationships" xmlns:p="http://schemas.openxmlformats.org/presentationml/2006/main">
+  <p:cSld name="Slide 14">
     <p:bg>
       <p:bgPr>
         <a:solidFill>
@@ -5016,7 +5724,7 @@
                 <a:ea typeface="Arial" pitchFamily="34" charset="-122"/>
                 <a:cs typeface="Arial" pitchFamily="34" charset="-120"/>
               </a:rPr>
-              <a:t>13</a:t>
+              <a:t>14</a:t>
             </a:r>
             <a:endParaRPr lang="en-US" sz="850" dirty="0"/>
           </a:p>
@@ -6104,7 +6812,49 @@
         </p:nvSpPr>
         <p:spPr>
           <a:xfrm>
-            <a:off x="731520" y="3520440"/>
+            <a:off x="731520" y="3493008"/>
+            <a:ext cx="7680960" cy="365760"/>
+          </a:xfrm>
+          <a:prstGeom prst="rect">
+            <a:avLst/>
+          </a:prstGeom>
+          <a:noFill/>
+          <a:ln/>
+        </p:spPr>
+        <p:txBody>
+          <a:bodyPr wrap="square" lIns="0" tIns="0" rIns="0" bIns="0" rtlCol="0" anchor="ctr"/>
+          <a:lstStyle/>
+          <a:p>
+            <a:pPr indent="0" marL="0">
+              <a:lnSpc>
+                <a:spcPct val="115000"/>
+              </a:lnSpc>
+              <a:buNone/>
+            </a:pPr>
+            <a:r>
+              <a:rPr lang="en-US" sz="1200" i="1" dirty="0">
+                <a:solidFill>
+                  <a:srgbClr val="14142B"/>
+                </a:solidFill>
+                <a:latin typeface="Arial" pitchFamily="34" charset="0"/>
+                <a:ea typeface="Arial" pitchFamily="34" charset="-122"/>
+                <a:cs typeface="Arial" pitchFamily="34" charset="-120"/>
+              </a:rPr>
+              <a:t>“The programme is designed in a 99-page handbook and run on a spreadsheet. The record of a project is lost at the end of the year.”</a:t>
+            </a:r>
+            <a:endParaRPr lang="en-US" sz="1200" dirty="0"/>
+          </a:p>
+        </p:txBody>
+      </p:sp>
+      <p:sp>
+        <p:nvSpPr>
+          <p:cNvPr id="16" name="Text 14"/>
+          <p:cNvSpPr txBox="1"/>
+          <p:nvPr/>
+        </p:nvSpPr>
+        <p:spPr>
+          <a:xfrm>
+            <a:off x="731520" y="3950208"/>
             <a:ext cx="7680960" cy="274320"/>
           </a:xfrm>
           <a:prstGeom prst="rect">
@@ -6121,46 +6871,7 @@
               <a:buNone/>
             </a:pPr>
             <a:r>
-              <a:rPr lang="en-US" sz="1300" i="1" dirty="0">
-                <a:solidFill>
-                  <a:srgbClr val="14142B"/>
-                </a:solidFill>
-                <a:latin typeface="Arial" pitchFamily="34" charset="0"/>
-                <a:ea typeface="Arial" pitchFamily="34" charset="-122"/>
-                <a:cs typeface="Arial" pitchFamily="34" charset="-120"/>
-              </a:rPr>
-              <a:t>“Students here think changemaking is something adults do somewhere else.”</a:t>
-            </a:r>
-            <a:endParaRPr lang="en-US" sz="1300" dirty="0"/>
-          </a:p>
-        </p:txBody>
-      </p:sp>
-      <p:sp>
-        <p:nvSpPr>
-          <p:cNvPr id="16" name="Text 14"/>
-          <p:cNvSpPr txBox="1"/>
-          <p:nvPr/>
-        </p:nvSpPr>
-        <p:spPr>
-          <a:xfrm>
-            <a:off x="731520" y="3886200"/>
-            <a:ext cx="7680960" cy="274320"/>
-          </a:xfrm>
-          <a:prstGeom prst="rect">
-            <a:avLst/>
-          </a:prstGeom>
-          <a:noFill/>
-          <a:ln/>
-        </p:spPr>
-        <p:txBody>
-          <a:bodyPr wrap="square" lIns="0" tIns="0" rIns="0" bIns="0" rtlCol="0" anchor="ctr"/>
-          <a:lstStyle/>
-          <a:p>
-            <a:pPr indent="0" marL="0">
-              <a:buNone/>
-            </a:pPr>
-            <a:r>
-              <a:rPr lang="en-US" sz="1200" b="1" dirty="0">
+              <a:rPr lang="en-US" sz="1150" b="1" dirty="0">
                 <a:solidFill>
                   <a:srgbClr val="006242"/>
                 </a:solidFill>
@@ -6168,9 +6879,9 @@
                 <a:ea typeface="Arial" pitchFamily="34" charset="-122"/>
                 <a:cs typeface="Arial" pitchFamily="34" charset="-120"/>
               </a:rPr>
-              <a:t>Indicator: students who can name 3 young changemakers  ·  11 of 180  →  target 90  →  now 74</a:t>
-            </a:r>
-            <a:endParaRPr lang="en-US" sz="1200" dirty="0"/>
+              <a:t>Indicator: projects tracked end to end  ·  0 of 92  →  5 today  →  target 25 by the end of the pilot term</a:t>
+            </a:r>
+            <a:endParaRPr lang="en-US" sz="1150" dirty="0"/>
           </a:p>
         </p:txBody>
       </p:sp>
@@ -9003,7 +9714,7 @@
         </p:nvSpPr>
         <p:spPr>
           <a:xfrm>
-            <a:off x="457200" y="1463040"/>
+            <a:off x="457200" y="1371600"/>
             <a:ext cx="320040" cy="274320"/>
           </a:xfrm>
           <a:prstGeom prst="rect">
@@ -9042,24 +9753,24 @@
         </p:nvSpPr>
         <p:spPr>
           <a:xfrm>
-            <a:off x="841248" y="1453896"/>
-            <a:ext cx="2651760" cy="274320"/>
-          </a:xfrm>
-          <a:prstGeom prst="rect">
-            <a:avLst/>
-          </a:prstGeom>
-          <a:noFill/>
-          <a:ln/>
-        </p:spPr>
-        <p:txBody>
-          <a:bodyPr wrap="square" lIns="0" tIns="0" rIns="0" bIns="0" rtlCol="0" anchor="ctr"/>
-          <a:lstStyle/>
-          <a:p>
-            <a:pPr indent="0" marL="0">
-              <a:buNone/>
-            </a:pPr>
-            <a:r>
-              <a:rPr lang="en-US" sz="1300" b="1" dirty="0">
+            <a:off x="841248" y="1362456"/>
+            <a:ext cx="3017520" cy="274320"/>
+          </a:xfrm>
+          <a:prstGeom prst="rect">
+            <a:avLst/>
+          </a:prstGeom>
+          <a:noFill/>
+          <a:ln/>
+        </p:spPr>
+        <p:txBody>
+          <a:bodyPr wrap="square" lIns="0" tIns="0" rIns="0" bIns="0" rtlCol="0" anchor="ctr"/>
+          <a:lstStyle/>
+          <a:p>
+            <a:pPr indent="0" marL="0">
+              <a:buNone/>
+            </a:pPr>
+            <a:r>
+              <a:rPr lang="en-US" sz="1250" b="1" dirty="0">
                 <a:solidFill>
                   <a:srgbClr val="14142B"/>
                 </a:solidFill>
@@ -9067,9 +9778,9 @@
                 <a:ea typeface="Arial" pitchFamily="34" charset="-122"/>
                 <a:cs typeface="Arial" pitchFamily="34" charset="-120"/>
               </a:rPr>
-              <a:t>Sign in as Sofia</a:t>
-            </a:r>
-            <a:endParaRPr lang="en-US" sz="1300" dirty="0"/>
+              <a:t>Sign in as Alexander</a:t>
+            </a:r>
+            <a:endParaRPr lang="en-US" sz="1250" dirty="0"/>
           </a:p>
         </p:txBody>
       </p:sp>
@@ -9081,8 +9792,8 @@
         </p:nvSpPr>
         <p:spPr>
           <a:xfrm>
-            <a:off x="3611880" y="1472184"/>
-            <a:ext cx="5029200" cy="502920"/>
+            <a:off x="3977640" y="1389888"/>
+            <a:ext cx="4663440" cy="457200"/>
           </a:xfrm>
           <a:prstGeom prst="rect">
             <a:avLst/>
@@ -9101,7 +9812,7 @@
               <a:buNone/>
             </a:pPr>
             <a:r>
-              <a:rPr lang="en-US" sz="1100" dirty="0">
+              <a:rPr lang="en-US" sz="1050" dirty="0">
                 <a:solidFill>
                   <a:srgbClr val="5F5F7A"/>
                 </a:solidFill>
@@ -9109,9 +9820,9 @@
                 <a:ea typeface="Arial" pitchFamily="34" charset="-122"/>
                 <a:cs typeface="Arial" pitchFamily="34" charset="-120"/>
               </a:rPr>
-              <a:t>The dashboard says one thing: what to do today.</a:t>
-            </a:r>
-            <a:endParaRPr lang="en-US" sz="1100" dirty="0"/>
+              <a:t>Student. The dashboard says one thing: what to do today.</a:t>
+            </a:r>
+            <a:endParaRPr lang="en-US" sz="1050" dirty="0"/>
           </a:p>
         </p:txBody>
       </p:sp>
@@ -9123,7 +9834,7 @@
         </p:nvSpPr>
         <p:spPr>
           <a:xfrm>
-            <a:off x="457200" y="2066544"/>
+            <a:off x="457200" y="1883664"/>
             <a:ext cx="320040" cy="274320"/>
           </a:xfrm>
           <a:prstGeom prst="rect">
@@ -9162,24 +9873,24 @@
         </p:nvSpPr>
         <p:spPr>
           <a:xfrm>
-            <a:off x="841248" y="2057400"/>
-            <a:ext cx="2651760" cy="274320"/>
-          </a:xfrm>
-          <a:prstGeom prst="rect">
-            <a:avLst/>
-          </a:prstGeom>
-          <a:noFill/>
-          <a:ln/>
-        </p:spPr>
-        <p:txBody>
-          <a:bodyPr wrap="square" lIns="0" tIns="0" rIns="0" bIns="0" rtlCol="0" anchor="ctr"/>
-          <a:lstStyle/>
-          <a:p>
-            <a:pPr indent="0" marL="0">
-              <a:buNone/>
-            </a:pPr>
-            <a:r>
-              <a:rPr lang="en-US" sz="1300" b="1" dirty="0">
+            <a:off x="841248" y="1874520"/>
+            <a:ext cx="3017520" cy="274320"/>
+          </a:xfrm>
+          <a:prstGeom prst="rect">
+            <a:avLst/>
+          </a:prstGeom>
+          <a:noFill/>
+          <a:ln/>
+        </p:spPr>
+        <p:txBody>
+          <a:bodyPr wrap="square" lIns="0" tIns="0" rIns="0" bIns="0" rtlCol="0" anchor="ctr"/>
+          <a:lstStyle/>
+          <a:p>
+            <a:pPr indent="0" marL="0">
+              <a:buNone/>
+            </a:pPr>
+            <a:r>
+              <a:rPr lang="en-US" sz="1250" b="1" dirty="0">
                 <a:solidFill>
                   <a:srgbClr val="14142B"/>
                 </a:solidFill>
@@ -9187,9 +9898,9 @@
                 <a:ea typeface="Arial" pitchFamily="34" charset="-122"/>
                 <a:cs typeface="Arial" pitchFamily="34" charset="-120"/>
               </a:rPr>
-              <a:t>Open her project</a:t>
-            </a:r>
-            <a:endParaRPr lang="en-US" sz="1300" dirty="0"/>
+              <a:t>Open “The IMPACT LMS”</a:t>
+            </a:r>
+            <a:endParaRPr lang="en-US" sz="1250" dirty="0"/>
           </a:p>
         </p:txBody>
       </p:sp>
@@ -9201,8 +9912,8 @@
         </p:nvSpPr>
         <p:spPr>
           <a:xfrm>
-            <a:off x="3611880" y="2075688"/>
-            <a:ext cx="5029200" cy="502920"/>
+            <a:off x="3977640" y="1901952"/>
+            <a:ext cx="4663440" cy="457200"/>
           </a:xfrm>
           <a:prstGeom prst="rect">
             <a:avLst/>
@@ -9221,7 +9932,7 @@
               <a:buNone/>
             </a:pPr>
             <a:r>
-              <a:rPr lang="en-US" sz="1100" dirty="0">
+              <a:rPr lang="en-US" sz="1050" dirty="0">
                 <a:solidFill>
                   <a:srgbClr val="5F5F7A"/>
                 </a:solidFill>
@@ -9229,9 +9940,9 @@
                 <a:ea typeface="Arial" pitchFamily="34" charset="-122"/>
                 <a:cs typeface="Arial" pitchFamily="34" charset="-120"/>
               </a:rPr>
-              <a:t>Phase bar, then tabs. Level 6 of 7, five validated.</a:t>
-            </a:r>
-            <a:endParaRPr lang="en-US" sz="1100" dirty="0"/>
+              <a:t>Phase bar, then tabs. Execute, level 6 of 7, five validated.</a:t>
+            </a:r>
+            <a:endParaRPr lang="en-US" sz="1050" dirty="0"/>
           </a:p>
         </p:txBody>
       </p:sp>
@@ -9243,7 +9954,7 @@
         </p:nvSpPr>
         <p:spPr>
           <a:xfrm>
-            <a:off x="457200" y="2670048"/>
+            <a:off x="457200" y="2395728"/>
             <a:ext cx="320040" cy="274320"/>
           </a:xfrm>
           <a:prstGeom prst="rect">
@@ -9282,24 +9993,24 @@
         </p:nvSpPr>
         <p:spPr>
           <a:xfrm>
-            <a:off x="841248" y="2660904"/>
-            <a:ext cx="2651760" cy="274320"/>
-          </a:xfrm>
-          <a:prstGeom prst="rect">
-            <a:avLst/>
-          </a:prstGeom>
-          <a:noFill/>
-          <a:ln/>
-        </p:spPr>
-        <p:txBody>
-          <a:bodyPr wrap="square" lIns="0" tIns="0" rIns="0" bIns="0" rtlCol="0" anchor="ctr"/>
-          <a:lstStyle/>
-          <a:p>
-            <a:pPr indent="0" marL="0">
-              <a:buNone/>
-            </a:pPr>
-            <a:r>
-              <a:rPr lang="en-US" sz="1300" b="1" dirty="0">
+            <a:off x="841248" y="2386584"/>
+            <a:ext cx="3017520" cy="274320"/>
+          </a:xfrm>
+          <a:prstGeom prst="rect">
+            <a:avLst/>
+          </a:prstGeom>
+          <a:noFill/>
+          <a:ln/>
+        </p:spPr>
+        <p:txBody>
+          <a:bodyPr wrap="square" lIns="0" tIns="0" rIns="0" bIns="0" rtlCol="0" anchor="ctr"/>
+          <a:lstStyle/>
+          <a:p>
+            <a:pPr indent="0" marL="0">
+              <a:buNone/>
+            </a:pPr>
+            <a:r>
+              <a:rPr lang="en-US" sz="1250" b="1" dirty="0">
                 <a:solidFill>
                   <a:srgbClr val="14142B"/>
                 </a:solidFill>
@@ -9309,7 +10020,7 @@
               </a:rPr>
               <a:t>Read the proposal</a:t>
             </a:r>
-            <a:endParaRPr lang="en-US" sz="1300" dirty="0"/>
+            <a:endParaRPr lang="en-US" sz="1250" dirty="0"/>
           </a:p>
         </p:txBody>
       </p:sp>
@@ -9321,8 +10032,8 @@
         </p:nvSpPr>
         <p:spPr>
           <a:xfrm>
-            <a:off x="3611880" y="2679192"/>
-            <a:ext cx="5029200" cy="502920"/>
+            <a:off x="3977640" y="2414016"/>
+            <a:ext cx="4663440" cy="457200"/>
           </a:xfrm>
           <a:prstGeom prst="rect">
             <a:avLst/>
@@ -9341,7 +10052,7 @@
               <a:buNone/>
             </a:pPr>
             <a:r>
-              <a:rPr lang="en-US" sz="1100" dirty="0">
+              <a:rPr lang="en-US" sz="1050" dirty="0">
                 <a:solidFill>
                   <a:srgbClr val="5F5F7A"/>
                 </a:solidFill>
@@ -9349,9 +10060,9 @@
                 <a:ea typeface="Arial" pitchFamily="34" charset="-122"/>
                 <a:cs typeface="Arial" pitchFamily="34" charset="-120"/>
               </a:rPr>
-              <a:t>Who it is for, what changes, and the number moving 11 → 74 → 90.</a:t>
-            </a:r>
-            <a:endParaRPr lang="en-US" sz="1100" dirty="0"/>
+              <a:t>180 students and 11 coaches. Indicator 0 → 5 → 25.</a:t>
+            </a:r>
+            <a:endParaRPr lang="en-US" sz="1050" dirty="0"/>
           </a:p>
         </p:txBody>
       </p:sp>
@@ -9363,7 +10074,7 @@
         </p:nvSpPr>
         <p:spPr>
           <a:xfrm>
-            <a:off x="457200" y="3273552"/>
+            <a:off x="457200" y="2907792"/>
             <a:ext cx="320040" cy="274320"/>
           </a:xfrm>
           <a:prstGeom prst="rect">
@@ -9402,24 +10113,24 @@
         </p:nvSpPr>
         <p:spPr>
           <a:xfrm>
-            <a:off x="841248" y="3264408"/>
-            <a:ext cx="2651760" cy="274320"/>
-          </a:xfrm>
-          <a:prstGeom prst="rect">
-            <a:avLst/>
-          </a:prstGeom>
-          <a:noFill/>
-          <a:ln/>
-        </p:spPr>
-        <p:txBody>
-          <a:bodyPr wrap="square" lIns="0" tIns="0" rIns="0" bIns="0" rtlCol="0" anchor="ctr"/>
-          <a:lstStyle/>
-          <a:p>
-            <a:pPr indent="0" marL="0">
-              <a:buNone/>
-            </a:pPr>
-            <a:r>
-              <a:rPr lang="en-US" sz="1300" b="1" dirty="0">
+            <a:off x="841248" y="2898648"/>
+            <a:ext cx="3017520" cy="274320"/>
+          </a:xfrm>
+          <a:prstGeom prst="rect">
+            <a:avLst/>
+          </a:prstGeom>
+          <a:noFill/>
+          <a:ln/>
+        </p:spPr>
+        <p:txBody>
+          <a:bodyPr wrap="square" lIns="0" tIns="0" rIns="0" bIns="0" rtlCol="0" anchor="ctr"/>
+          <a:lstStyle/>
+          <a:p>
+            <a:pPr indent="0" marL="0">
+              <a:buNone/>
+            </a:pPr>
+            <a:r>
+              <a:rPr lang="en-US" sz="1250" b="1" dirty="0">
                 <a:solidFill>
                   <a:srgbClr val="14142B"/>
                 </a:solidFill>
@@ -9427,9 +10138,9 @@
                 <a:ea typeface="Arial" pitchFamily="34" charset="-122"/>
                 <a:cs typeface="Arial" pitchFamily="34" charset="-120"/>
               </a:rPr>
-              <a:t>Switch to Rémy (coach)</a:t>
-            </a:r>
-            <a:endParaRPr lang="en-US" sz="1300" dirty="0"/>
+              <a:t>Add the deadlines to a calendar</a:t>
+            </a:r>
+            <a:endParaRPr lang="en-US" sz="1250" dirty="0"/>
           </a:p>
         </p:txBody>
       </p:sp>
@@ -9441,8 +10152,8 @@
         </p:nvSpPr>
         <p:spPr>
           <a:xfrm>
-            <a:off x="3611880" y="3282696"/>
-            <a:ext cx="5029200" cy="502920"/>
+            <a:off x="3977640" y="2926080"/>
+            <a:ext cx="4663440" cy="457200"/>
           </a:xfrm>
           <a:prstGeom prst="rect">
             <a:avLst/>
@@ -9461,7 +10172,7 @@
               <a:buNone/>
             </a:pPr>
             <a:r>
-              <a:rPr lang="en-US" sz="1100" dirty="0">
+              <a:rPr lang="en-US" sz="1050" dirty="0">
                 <a:solidFill>
                   <a:srgbClr val="5F5F7A"/>
                 </a:solidFill>
@@ -9469,9 +10180,9 @@
                 <a:ea typeface="Arial" pitchFamily="34" charset="-122"/>
                 <a:cs typeface="Arial" pitchFamily="34" charset="-120"/>
               </a:rPr>
-              <a:t>“5 things waiting on you” — oldest first.</a:t>
-            </a:r>
-            <a:endParaRPr lang="en-US" sz="1100" dirty="0"/>
+              <a:t>Subscribe once. Move a date here, it moves in Google.</a:t>
+            </a:r>
+            <a:endParaRPr lang="en-US" sz="1050" dirty="0"/>
           </a:p>
         </p:txBody>
       </p:sp>
@@ -9483,7 +10194,7 @@
         </p:nvSpPr>
         <p:spPr>
           <a:xfrm>
-            <a:off x="457200" y="3877056"/>
+            <a:off x="457200" y="3419856"/>
             <a:ext cx="320040" cy="274320"/>
           </a:xfrm>
           <a:prstGeom prst="rect">
@@ -9522,24 +10233,24 @@
         </p:nvSpPr>
         <p:spPr>
           <a:xfrm>
-            <a:off x="841248" y="3867912"/>
-            <a:ext cx="2651760" cy="274320"/>
-          </a:xfrm>
-          <a:prstGeom prst="rect">
-            <a:avLst/>
-          </a:prstGeom>
-          <a:noFill/>
-          <a:ln/>
-        </p:spPr>
-        <p:txBody>
-          <a:bodyPr wrap="square" lIns="0" tIns="0" rIns="0" bIns="0" rtlCol="0" anchor="ctr"/>
-          <a:lstStyle/>
-          <a:p>
-            <a:pPr indent="0" marL="0">
-              <a:buNone/>
-            </a:pPr>
-            <a:r>
-              <a:rPr lang="en-US" sz="1300" b="1" dirty="0">
+            <a:off x="841248" y="3410712"/>
+            <a:ext cx="3017520" cy="274320"/>
+          </a:xfrm>
+          <a:prstGeom prst="rect">
+            <a:avLst/>
+          </a:prstGeom>
+          <a:noFill/>
+          <a:ln/>
+        </p:spPr>
+        <p:txBody>
+          <a:bodyPr wrap="square" lIns="0" tIns="0" rIns="0" bIns="0" rtlCol="0" anchor="ctr"/>
+          <a:lstStyle/>
+          <a:p>
+            <a:pPr indent="0" marL="0">
+              <a:buNone/>
+            </a:pPr>
+            <a:r>
+              <a:rPr lang="en-US" sz="1250" b="1" dirty="0">
                 <a:solidFill>
                   <a:srgbClr val="14142B"/>
                 </a:solidFill>
@@ -9547,9 +10258,9 @@
                 <a:ea typeface="Arial" pitchFamily="34" charset="-122"/>
                 <a:cs typeface="Arial" pitchFamily="34" charset="-120"/>
               </a:rPr>
-              <a:t>Validate her evidence</a:t>
-            </a:r>
-            <a:endParaRPr lang="en-US" sz="1300" dirty="0"/>
+              <a:t>Switch to Matthias</a:t>
+            </a:r>
+            <a:endParaRPr lang="en-US" sz="1250" dirty="0"/>
           </a:p>
         </p:txBody>
       </p:sp>
@@ -9561,8 +10272,8 @@
         </p:nvSpPr>
         <p:spPr>
           <a:xfrm>
-            <a:off x="3611880" y="3886200"/>
-            <a:ext cx="5029200" cy="502920"/>
+            <a:off x="3977640" y="3438144"/>
+            <a:ext cx="4663440" cy="457200"/>
           </a:xfrm>
           <a:prstGeom prst="rect">
             <a:avLst/>
@@ -9581,7 +10292,7 @@
               <a:buNone/>
             </a:pPr>
             <a:r>
-              <a:rPr lang="en-US" sz="1100" dirty="0">
+              <a:rPr lang="en-US" sz="1050" dirty="0">
                 <a:solidFill>
                   <a:srgbClr val="5F5F7A"/>
                 </a:solidFill>
@@ -9589,22 +10300,142 @@
                 <a:ea typeface="Arial" pitchFamily="34" charset="-122"/>
                 <a:cs typeface="Arial" pitchFamily="34" charset="-120"/>
               </a:rPr>
+              <a:t>Coach. “2 things waiting on you” — oldest first.</a:t>
+            </a:r>
+            <a:endParaRPr lang="en-US" sz="1050" dirty="0"/>
+          </a:p>
+        </p:txBody>
+      </p:sp>
+      <p:sp>
+        <p:nvSpPr>
+          <p:cNvPr id="19" name="Text 17"/>
+          <p:cNvSpPr txBox="1"/>
+          <p:nvPr/>
+        </p:nvSpPr>
+        <p:spPr>
+          <a:xfrm>
+            <a:off x="457200" y="3931920"/>
+            <a:ext cx="320040" cy="274320"/>
+          </a:xfrm>
+          <a:prstGeom prst="rect">
+            <a:avLst/>
+          </a:prstGeom>
+          <a:noFill/>
+          <a:ln/>
+        </p:spPr>
+        <p:txBody>
+          <a:bodyPr wrap="square" lIns="0" tIns="0" rIns="0" bIns="0" rtlCol="0" anchor="ctr"/>
+          <a:lstStyle/>
+          <a:p>
+            <a:pPr indent="0" marL="0">
+              <a:buNone/>
+            </a:pPr>
+            <a:r>
+              <a:rPr lang="en-US" sz="1700" b="1" dirty="0">
+                <a:solidFill>
+                  <a:srgbClr val="500591"/>
+                </a:solidFill>
+                <a:latin typeface="Arial" pitchFamily="34" charset="0"/>
+                <a:ea typeface="Arial" pitchFamily="34" charset="-122"/>
+                <a:cs typeface="Arial" pitchFamily="34" charset="-120"/>
+              </a:rPr>
+              <a:t>6</a:t>
+            </a:r>
+            <a:endParaRPr lang="en-US" sz="1700" dirty="0"/>
+          </a:p>
+        </p:txBody>
+      </p:sp>
+      <p:sp>
+        <p:nvSpPr>
+          <p:cNvPr id="20" name="Text 18"/>
+          <p:cNvSpPr txBox="1"/>
+          <p:nvPr/>
+        </p:nvSpPr>
+        <p:spPr>
+          <a:xfrm>
+            <a:off x="841248" y="3922776"/>
+            <a:ext cx="3017520" cy="274320"/>
+          </a:xfrm>
+          <a:prstGeom prst="rect">
+            <a:avLst/>
+          </a:prstGeom>
+          <a:noFill/>
+          <a:ln/>
+        </p:spPr>
+        <p:txBody>
+          <a:bodyPr wrap="square" lIns="0" tIns="0" rIns="0" bIns="0" rtlCol="0" anchor="ctr"/>
+          <a:lstStyle/>
+          <a:p>
+            <a:pPr indent="0" marL="0">
+              <a:buNone/>
+            </a:pPr>
+            <a:r>
+              <a:rPr lang="en-US" sz="1250" b="1" dirty="0">
+                <a:solidFill>
+                  <a:srgbClr val="14142B"/>
+                </a:solidFill>
+                <a:latin typeface="Arial" pitchFamily="34" charset="0"/>
+                <a:ea typeface="Arial" pitchFamily="34" charset="-122"/>
+                <a:cs typeface="Arial" pitchFamily="34" charset="-120"/>
+              </a:rPr>
+              <a:t>Validate the level 6 evidence</a:t>
+            </a:r>
+            <a:endParaRPr lang="en-US" sz="1250" dirty="0"/>
+          </a:p>
+        </p:txBody>
+      </p:sp>
+      <p:sp>
+        <p:nvSpPr>
+          <p:cNvPr id="21" name="Text 19"/>
+          <p:cNvSpPr txBox="1"/>
+          <p:nvPr/>
+        </p:nvSpPr>
+        <p:spPr>
+          <a:xfrm>
+            <a:off x="3977640" y="3950208"/>
+            <a:ext cx="4663440" cy="457200"/>
+          </a:xfrm>
+          <a:prstGeom prst="rect">
+            <a:avLst/>
+          </a:prstGeom>
+          <a:noFill/>
+          <a:ln/>
+        </p:spPr>
+        <p:txBody>
+          <a:bodyPr wrap="square" lIns="0" tIns="0" rIns="0" bIns="0" rtlCol="0" anchor="t"/>
+          <a:lstStyle/>
+          <a:p>
+            <a:pPr indent="0" marL="0">
+              <a:lnSpc>
+                <a:spcPct val="125000"/>
+              </a:lnSpc>
+              <a:buNone/>
+            </a:pPr>
+            <a:r>
+              <a:rPr lang="en-US" sz="1050" dirty="0">
+                <a:solidFill>
+                  <a:srgbClr val="5F5F7A"/>
+                </a:solidFill>
+                <a:latin typeface="Arial" pitchFamily="34" charset="0"/>
+                <a:ea typeface="Arial" pitchFamily="34" charset="-122"/>
+                <a:cs typeface="Arial" pitchFamily="34" charset="-120"/>
+              </a:rPr>
               <a:t>Watch level 7 unlock in front of the room.</a:t>
             </a:r>
-            <a:endParaRPr lang="en-US" sz="1100" dirty="0"/>
-          </a:p>
-        </p:txBody>
-      </p:sp>
-      <p:sp>
-        <p:nvSpPr>
-          <p:cNvPr id="19" name="Shape 17"/>
+            <a:endParaRPr lang="en-US" sz="1050" dirty="0"/>
+          </a:p>
+        </p:txBody>
+      </p:sp>
+      <p:sp>
+        <p:nvSpPr>
+          <p:cNvPr id="22" name="Shape 20"/>
           <p:cNvSpPr/>
           <p:nvPr/>
         </p:nvSpPr>
         <p:spPr>
           <a:xfrm>
-            <a:off x="457200" y="4498848"/>
-            <a:ext cx="8229600" cy="384048"/>
+            <a:off x="457200" y="4315968"/>
+            <a:ext cx="8229600" cy="365760"/>
           </a:xfrm>
           <a:prstGeom prst="rect">
             <a:avLst/>
@@ -9622,13 +10453,13 @@
       </p:sp>
       <p:sp>
         <p:nvSpPr>
-          <p:cNvPr id="20" name="Text 18"/>
-          <p:cNvSpPr txBox="1"/>
-          <p:nvPr/>
-        </p:nvSpPr>
-        <p:spPr>
-          <a:xfrm>
-            <a:off x="640080" y="4535424"/>
+          <p:cNvPr id="23" name="Text 21"/>
+          <p:cNvSpPr txBox="1"/>
+          <p:nvPr/>
+        </p:nvSpPr>
+        <p:spPr>
+          <a:xfrm>
+            <a:off x="640080" y="4343400"/>
             <a:ext cx="7863840" cy="310896"/>
           </a:xfrm>
           <a:prstGeom prst="rect">
@@ -9653,7 +10484,7 @@
                 <a:ea typeface="Arial" pitchFamily="34" charset="-122"/>
                 <a:cs typeface="Arial" pitchFamily="34" charset="-120"/>
               </a:rPr>
-              <a:t>s.ferrand@demo.eastwoodmontreux.ch   ·   r.chevalley@demo.eastwoodmontreux.ch   ·   password: impact-demo-2026</a:t>
+              <a:t>alexander.malinsky@eastwood.global   ·   matthias@eastwood.global   ·   password: impact-demo-2026</a:t>
             </a:r>
             <a:endParaRPr lang="en-US" sz="1000" dirty="0"/>
           </a:p>
@@ -9661,7 +10492,7 @@
       </p:sp>
       <p:sp>
         <p:nvSpPr>
-          <p:cNvPr id="21" name="Text 19"/>
+          <p:cNvPr id="24" name="Text 22"/>
           <p:cNvSpPr txBox="1"/>
           <p:nvPr/>
         </p:nvSpPr>
@@ -9700,7 +10531,7 @@
       </p:sp>
       <p:sp>
         <p:nvSpPr>
-          <p:cNvPr id="22" name="Text 20"/>
+          <p:cNvPr id="25" name="Text 23"/>
           <p:cNvSpPr txBox="1"/>
           <p:nvPr/>
         </p:nvSpPr>
@@ -10425,7 +11256,7 @@
                 <a:ea typeface="Arial" pitchFamily="34" charset="-122"/>
                 <a:cs typeface="Arial" pitchFamily="34" charset="-120"/>
               </a:rPr>
-              <a:t>SECTION 8 OF THE BRIEF</a:t>
+              <a:t>ALSO IN RELEASE 1</a:t>
             </a:r>
             <a:endParaRPr lang="en-US" sz="950" dirty="0"/>
           </a:p>
@@ -10467,7 +11298,7 @@
                 <a:ea typeface="Arial" pitchFamily="34" charset="-122"/>
                 <a:cs typeface="Arial" pitchFamily="34" charset="-120"/>
               </a:rPr>
-              <a:t>Every issue found in the beta, closed.</a:t>
+              <a:t>Three things the brief did not ask for.</a:t>
             </a:r>
             <a:endParaRPr lang="en-US" sz="2700" dirty="0"/>
           </a:p>
@@ -10475,55 +11306,121 @@
       </p:sp>
       <p:sp>
         <p:nvSpPr>
-          <p:cNvPr id="4" name="Shape 2"/>
+          <p:cNvPr id="4" name="Text 2"/>
+          <p:cNvSpPr txBox="1"/>
+          <p:nvPr/>
+        </p:nvSpPr>
+        <p:spPr>
+          <a:xfrm>
+            <a:off x="457200" y="1298448"/>
+            <a:ext cx="7863840" cy="274320"/>
+          </a:xfrm>
+          <a:prstGeom prst="rect">
+            <a:avLst/>
+          </a:prstGeom>
+          <a:noFill/>
+          <a:ln/>
+        </p:spPr>
+        <p:txBody>
+          <a:bodyPr wrap="square" lIns="0" tIns="0" rIns="0" bIns="0" rtlCol="0" anchor="t"/>
+          <a:lstStyle/>
+          <a:p>
+            <a:pPr indent="0" marL="0">
+              <a:lnSpc>
+                <a:spcPct val="125000"/>
+              </a:lnSpc>
+              <a:buNone/>
+            </a:pPr>
+            <a:r>
+              <a:rPr lang="en-US" sz="1200" dirty="0">
+                <a:solidFill>
+                  <a:srgbClr val="5F5F7A"/>
+                </a:solidFill>
+                <a:latin typeface="Arial" pitchFamily="34" charset="0"/>
+                <a:ea typeface="Arial" pitchFamily="34" charset="-122"/>
+                <a:cs typeface="Arial" pitchFamily="34" charset="-120"/>
+              </a:rPr>
+              <a:t>Each one came out of using the thing. They are live now, not planned.</a:t>
+            </a:r>
+            <a:endParaRPr lang="en-US" sz="1200" dirty="0"/>
+          </a:p>
+        </p:txBody>
+      </p:sp>
+      <p:sp>
+        <p:nvSpPr>
+          <p:cNvPr id="5" name="Shape 3"/>
           <p:cNvSpPr/>
           <p:nvPr/>
         </p:nvSpPr>
         <p:spPr>
           <a:xfrm>
-            <a:off x="457200" y="1472184"/>
-            <a:ext cx="146304" cy="146304"/>
+            <a:off x="457200" y="1828800"/>
+            <a:ext cx="457200" cy="457200"/>
           </a:xfrm>
           <a:prstGeom prst="ellipse">
             <a:avLst/>
           </a:prstGeom>
           <a:solidFill>
-            <a:srgbClr val="006242"/>
+            <a:srgbClr val="500591"/>
           </a:solidFill>
           <a:ln w="12700">
             <a:solidFill>
-              <a:srgbClr val="006242"/>
+              <a:srgbClr val="500591"/>
             </a:solidFill>
             <a:prstDash val="solid"/>
           </a:ln>
         </p:spPr>
       </p:sp>
-      <p:sp>
-        <p:nvSpPr>
-          <p:cNvPr id="5" name="Text 3"/>
-          <p:cNvSpPr txBox="1"/>
-          <p:nvPr/>
-        </p:nvSpPr>
-        <p:spPr>
-          <a:xfrm>
-            <a:off x="731520" y="1399032"/>
-            <a:ext cx="3749040" cy="256032"/>
-          </a:xfrm>
-          <a:prstGeom prst="rect">
-            <a:avLst/>
-          </a:prstGeom>
-          <a:noFill/>
-          <a:ln/>
-        </p:spPr>
-        <p:txBody>
-          <a:bodyPr wrap="square" lIns="0" tIns="0" rIns="0" bIns="0" rtlCol="0" anchor="ctr"/>
-          <a:lstStyle/>
-          <a:p>
-            <a:pPr indent="0" marL="0">
-              <a:buNone/>
-            </a:pPr>
-            <a:r>
-              <a:rPr lang="en-US" sz="1100" b="1" dirty="0">
+      <p:pic>
+        <p:nvPicPr>
+          <p:cNvPr id="6" name="Image 0" descr="/Users/alexandermalinsky/Projects/impact-lms-pitch/assets/calendar-white.png">    </p:cNvPr>
+          <p:cNvPicPr>
+            <a:picLocks noChangeAspect="1"/>
+          </p:cNvPicPr>
+          <p:nvPr/>
+        </p:nvPicPr>
+        <p:blipFill>
+          <a:blip r:embed="rId1"/>
+          <a:stretch>
+            <a:fillRect/>
+          </a:stretch>
+        </p:blipFill>
+        <p:spPr>
+          <a:xfrm>
+            <a:off x="576072" y="1947672"/>
+            <a:ext cx="219456" cy="219456"/>
+          </a:xfrm>
+          <a:prstGeom prst="rect">
+            <a:avLst/>
+          </a:prstGeom>
+        </p:spPr>
+      </p:pic>
+      <p:sp>
+        <p:nvSpPr>
+          <p:cNvPr id="7" name="Text 4"/>
+          <p:cNvSpPr txBox="1"/>
+          <p:nvPr/>
+        </p:nvSpPr>
+        <p:spPr>
+          <a:xfrm>
+            <a:off x="1097280" y="1847088"/>
+            <a:ext cx="2560320" cy="274320"/>
+          </a:xfrm>
+          <a:prstGeom prst="rect">
+            <a:avLst/>
+          </a:prstGeom>
+          <a:noFill/>
+          <a:ln/>
+        </p:spPr>
+        <p:txBody>
+          <a:bodyPr wrap="square" lIns="0" tIns="0" rIns="0" bIns="0" rtlCol="0" anchor="ctr"/>
+          <a:lstStyle/>
+          <a:p>
+            <a:pPr indent="0" marL="0">
+              <a:buNone/>
+            </a:pPr>
+            <a:r>
+              <a:rPr lang="en-US" sz="1300" b="1" dirty="0">
                 <a:solidFill>
                   <a:srgbClr val="14142B"/>
                 </a:solidFill>
@@ -10531,22 +11428,22 @@
                 <a:ea typeface="Arial" pitchFamily="34" charset="-122"/>
                 <a:cs typeface="Arial" pitchFamily="34" charset="-120"/>
               </a:rPr>
-              <a:t>Any phase could be selected</a:t>
-            </a:r>
-            <a:endParaRPr lang="en-US" sz="1100" dirty="0"/>
-          </a:p>
-        </p:txBody>
-      </p:sp>
-      <p:sp>
-        <p:nvSpPr>
-          <p:cNvPr id="6" name="Text 4"/>
-          <p:cNvSpPr txBox="1"/>
-          <p:nvPr/>
-        </p:nvSpPr>
-        <p:spPr>
-          <a:xfrm>
-            <a:off x="731520" y="1655064"/>
-            <a:ext cx="3749040" cy="384048"/>
+              <a:t>Deadlines leave the platform</a:t>
+            </a:r>
+            <a:endParaRPr lang="en-US" sz="1300" dirty="0"/>
+          </a:p>
+        </p:txBody>
+      </p:sp>
+      <p:sp>
+        <p:nvSpPr>
+          <p:cNvPr id="8" name="Text 5"/>
+          <p:cNvSpPr txBox="1"/>
+          <p:nvPr/>
+        </p:nvSpPr>
+        <p:spPr>
+          <a:xfrm>
+            <a:off x="3657600" y="1810512"/>
+            <a:ext cx="4937760" cy="868680"/>
           </a:xfrm>
           <a:prstGeom prst="rect">
             <a:avLst/>
@@ -10565,7 +11462,7 @@
               <a:buNone/>
             </a:pPr>
             <a:r>
-              <a:rPr lang="en-US" sz="950" dirty="0">
+              <a:rPr lang="en-US" sz="1000" dirty="0">
                 <a:solidFill>
                   <a:srgbClr val="5F5F7A"/>
                 </a:solidFill>
@@ -10573,63 +11470,87 @@
                 <a:ea typeface="Arial" pitchFamily="34" charset="-122"/>
                 <a:cs typeface="Arial" pitchFamily="34" charset="-120"/>
               </a:rPr>
-              <a:t>A gate now needs the previous phase's deliverable and a coach</a:t>
-            </a:r>
-            <a:endParaRPr lang="en-US" sz="950" dirty="0"/>
-          </a:p>
-        </p:txBody>
-      </p:sp>
-      <p:sp>
-        <p:nvSpPr>
-          <p:cNvPr id="7" name="Shape 5"/>
+              <a:t>Every milestone, subscribed once to Google, Apple or Outlook. Move a date in IMPACT and it moves in the student's own calendar — they are subscribing to the feed, not downloading a copy.</a:t>
+            </a:r>
+            <a:endParaRPr lang="en-US" sz="1000" dirty="0"/>
+          </a:p>
+        </p:txBody>
+      </p:sp>
+      <p:sp>
+        <p:nvSpPr>
+          <p:cNvPr id="9" name="Shape 6"/>
           <p:cNvSpPr/>
           <p:nvPr/>
         </p:nvSpPr>
         <p:spPr>
           <a:xfrm>
-            <a:off x="4663440" y="1472184"/>
-            <a:ext cx="146304" cy="146304"/>
+            <a:off x="457200" y="2770632"/>
+            <a:ext cx="457200" cy="457200"/>
           </a:xfrm>
           <a:prstGeom prst="ellipse">
             <a:avLst/>
           </a:prstGeom>
           <a:solidFill>
-            <a:srgbClr val="006242"/>
+            <a:srgbClr val="500591"/>
           </a:solidFill>
           <a:ln w="12700">
             <a:solidFill>
-              <a:srgbClr val="006242"/>
+              <a:srgbClr val="500591"/>
             </a:solidFill>
             <a:prstDash val="solid"/>
           </a:ln>
         </p:spPr>
       </p:sp>
-      <p:sp>
-        <p:nvSpPr>
-          <p:cNvPr id="8" name="Text 6"/>
-          <p:cNvSpPr txBox="1"/>
-          <p:nvPr/>
-        </p:nvSpPr>
-        <p:spPr>
-          <a:xfrm>
-            <a:off x="4937760" y="1399032"/>
-            <a:ext cx="3749040" cy="256032"/>
-          </a:xfrm>
-          <a:prstGeom prst="rect">
-            <a:avLst/>
-          </a:prstGeom>
-          <a:noFill/>
-          <a:ln/>
-        </p:spPr>
-        <p:txBody>
-          <a:bodyPr wrap="square" lIns="0" tIns="0" rIns="0" bIns="0" rtlCol="0" anchor="ctr"/>
-          <a:lstStyle/>
-          <a:p>
-            <a:pPr indent="0" marL="0">
-              <a:buNone/>
-            </a:pPr>
-            <a:r>
-              <a:rPr lang="en-US" sz="1100" b="1" dirty="0">
+      <p:pic>
+        <p:nvPicPr>
+          <p:cNvPr id="10" name="Image 1" descr="/Users/alexandermalinsky/Projects/impact-lms-pitch/assets/kanban-white.png">    </p:cNvPr>
+          <p:cNvPicPr>
+            <a:picLocks noChangeAspect="1"/>
+          </p:cNvPicPr>
+          <p:nvPr/>
+        </p:nvPicPr>
+        <p:blipFill>
+          <a:blip r:embed="rId2"/>
+          <a:stretch>
+            <a:fillRect/>
+          </a:stretch>
+        </p:blipFill>
+        <p:spPr>
+          <a:xfrm>
+            <a:off x="576072" y="2889504"/>
+            <a:ext cx="219456" cy="219456"/>
+          </a:xfrm>
+          <a:prstGeom prst="rect">
+            <a:avLst/>
+          </a:prstGeom>
+        </p:spPr>
+      </p:pic>
+      <p:sp>
+        <p:nvSpPr>
+          <p:cNvPr id="11" name="Text 7"/>
+          <p:cNvSpPr txBox="1"/>
+          <p:nvPr/>
+        </p:nvSpPr>
+        <p:spPr>
+          <a:xfrm>
+            <a:off x="1097280" y="2788920"/>
+            <a:ext cx="2560320" cy="274320"/>
+          </a:xfrm>
+          <a:prstGeom prst="rect">
+            <a:avLst/>
+          </a:prstGeom>
+          <a:noFill/>
+          <a:ln/>
+        </p:spPr>
+        <p:txBody>
+          <a:bodyPr wrap="square" lIns="0" tIns="0" rIns="0" bIns="0" rtlCol="0" anchor="ctr"/>
+          <a:lstStyle/>
+          <a:p>
+            <a:pPr indent="0" marL="0">
+              <a:buNone/>
+            </a:pPr>
+            <a:r>
+              <a:rPr lang="en-US" sz="1300" b="1" dirty="0">
                 <a:solidFill>
                   <a:srgbClr val="14142B"/>
                 </a:solidFill>
@@ -10637,22 +11558,22 @@
                 <a:ea typeface="Arial" pitchFamily="34" charset="-122"/>
                 <a:cs typeface="Arial" pitchFamily="34" charset="-120"/>
               </a:rPr>
-              <a:t>“Mark complete” with nothing achieved</a:t>
-            </a:r>
-            <a:endParaRPr lang="en-US" sz="1100" dirty="0"/>
-          </a:p>
-        </p:txBody>
-      </p:sp>
-      <p:sp>
-        <p:nvSpPr>
-          <p:cNvPr id="9" name="Text 7"/>
-          <p:cNvSpPr txBox="1"/>
-          <p:nvPr/>
-        </p:nvSpPr>
-        <p:spPr>
-          <a:xfrm>
-            <a:off x="4937760" y="1655064"/>
-            <a:ext cx="3749040" cy="384048"/>
+              <a:t>A board you can move</a:t>
+            </a:r>
+            <a:endParaRPr lang="en-US" sz="1300" dirty="0"/>
+          </a:p>
+        </p:txBody>
+      </p:sp>
+      <p:sp>
+        <p:nvSpPr>
+          <p:cNvPr id="12" name="Text 8"/>
+          <p:cNvSpPr txBox="1"/>
+          <p:nvPr/>
+        </p:nvSpPr>
+        <p:spPr>
+          <a:xfrm>
+            <a:off x="3657600" y="2752344"/>
+            <a:ext cx="4937760" cy="868680"/>
           </a:xfrm>
           <a:prstGeom prst="rect">
             <a:avLst/>
@@ -10671,7 +11592,7 @@
               <a:buNone/>
             </a:pPr>
             <a:r>
-              <a:rPr lang="en-US" sz="950" dirty="0">
+              <a:rPr lang="en-US" sz="1000" dirty="0">
                 <a:solidFill>
                   <a:srgbClr val="5F5F7A"/>
                 </a:solidFill>
@@ -10679,63 +11600,87 @@
                 <a:ea typeface="Arial" pitchFamily="34" charset="-122"/>
                 <a:cs typeface="Arial" pitchFamily="34" charset="-120"/>
               </a:rPr>
-              <a:t>Only from Report, after the final level is validated</a:t>
-            </a:r>
-            <a:endParaRPr lang="en-US" sz="950" dirty="0"/>
-          </a:p>
-        </p:txBody>
-      </p:sp>
-      <p:sp>
-        <p:nvSpPr>
-          <p:cNvPr id="10" name="Shape 8"/>
+              <a:t>Drag a card between To do, Doing and Done, by mouse, touch or keyboard. The order is saved. Before this, changing a card's state meant a menu.</a:t>
+            </a:r>
+            <a:endParaRPr lang="en-US" sz="1000" dirty="0"/>
+          </a:p>
+        </p:txBody>
+      </p:sp>
+      <p:sp>
+        <p:nvSpPr>
+          <p:cNvPr id="13" name="Shape 9"/>
           <p:cNvSpPr/>
           <p:nvPr/>
         </p:nvSpPr>
         <p:spPr>
           <a:xfrm>
-            <a:off x="457200" y="2130552"/>
-            <a:ext cx="146304" cy="146304"/>
+            <a:off x="457200" y="3712464"/>
+            <a:ext cx="457200" cy="457200"/>
           </a:xfrm>
           <a:prstGeom prst="ellipse">
             <a:avLst/>
           </a:prstGeom>
           <a:solidFill>
-            <a:srgbClr val="006242"/>
+            <a:srgbClr val="500591"/>
           </a:solidFill>
           <a:ln w="12700">
             <a:solidFill>
-              <a:srgbClr val="006242"/>
+              <a:srgbClr val="500591"/>
             </a:solidFill>
             <a:prstDash val="solid"/>
           </a:ln>
         </p:spPr>
       </p:sp>
-      <p:sp>
-        <p:nvSpPr>
-          <p:cNvPr id="11" name="Text 9"/>
-          <p:cNvSpPr txBox="1"/>
-          <p:nvPr/>
-        </p:nvSpPr>
-        <p:spPr>
-          <a:xfrm>
-            <a:off x="731520" y="2057400"/>
-            <a:ext cx="3749040" cy="256032"/>
-          </a:xfrm>
-          <a:prstGeom prst="rect">
-            <a:avLst/>
-          </a:prstGeom>
-          <a:noFill/>
-          <a:ln/>
-        </p:spPr>
-        <p:txBody>
-          <a:bodyPr wrap="square" lIns="0" tIns="0" rIns="0" bIns="0" rtlCol="0" anchor="ctr"/>
-          <a:lstStyle/>
-          <a:p>
-            <a:pPr indent="0" marL="0">
-              <a:buNone/>
-            </a:pPr>
-            <a:r>
-              <a:rPr lang="en-US" sz="1100" b="1" dirty="0">
+      <p:pic>
+        <p:nvPicPr>
+          <p:cNvPr id="14" name="Image 2" descr="/Users/alexandermalinsky/Projects/impact-lms-pitch/assets/lock-white.png">    </p:cNvPr>
+          <p:cNvPicPr>
+            <a:picLocks noChangeAspect="1"/>
+          </p:cNvPicPr>
+          <p:nvPr/>
+        </p:nvPicPr>
+        <p:blipFill>
+          <a:blip r:embed="rId3"/>
+          <a:stretch>
+            <a:fillRect/>
+          </a:stretch>
+        </p:blipFill>
+        <p:spPr>
+          <a:xfrm>
+            <a:off x="576072" y="3831336"/>
+            <a:ext cx="219456" cy="219456"/>
+          </a:xfrm>
+          <a:prstGeom prst="rect">
+            <a:avLst/>
+          </a:prstGeom>
+        </p:spPr>
+      </p:pic>
+      <p:sp>
+        <p:nvSpPr>
+          <p:cNvPr id="15" name="Text 10"/>
+          <p:cNvSpPr txBox="1"/>
+          <p:nvPr/>
+        </p:nvSpPr>
+        <p:spPr>
+          <a:xfrm>
+            <a:off x="1097280" y="3730752"/>
+            <a:ext cx="2560320" cy="274320"/>
+          </a:xfrm>
+          <a:prstGeom prst="rect">
+            <a:avLst/>
+          </a:prstGeom>
+          <a:noFill/>
+          <a:ln/>
+        </p:spPr>
+        <p:txBody>
+          <a:bodyPr wrap="square" lIns="0" tIns="0" rIns="0" bIns="0" rtlCol="0" anchor="ctr"/>
+          <a:lstStyle/>
+          <a:p>
+            <a:pPr indent="0" marL="0">
+              <a:buNone/>
+            </a:pPr>
+            <a:r>
+              <a:rPr lang="en-US" sz="1300" b="1" dirty="0">
                 <a:solidFill>
                   <a:srgbClr val="14142B"/>
                 </a:solidFill>
@@ -10743,22 +11688,22 @@
                 <a:ea typeface="Arial" pitchFamily="34" charset="-122"/>
                 <a:cs typeface="Arial" pitchFamily="34" charset="-120"/>
               </a:rPr>
-              <a:t>Approval showed a date, no name</a:t>
-            </a:r>
-            <a:endParaRPr lang="en-US" sz="1100" dirty="0"/>
-          </a:p>
-        </p:txBody>
-      </p:sp>
-      <p:sp>
-        <p:nvSpPr>
-          <p:cNvPr id="12" name="Text 10"/>
-          <p:cNvSpPr txBox="1"/>
-          <p:nvPr/>
-        </p:nvSpPr>
-        <p:spPr>
-          <a:xfrm>
-            <a:off x="731520" y="2313432"/>
-            <a:ext cx="3749040" cy="384048"/>
+              <a:t>Leaving keeps the record</a:t>
+            </a:r>
+            <a:endParaRPr lang="en-US" sz="1300" dirty="0"/>
+          </a:p>
+        </p:txBody>
+      </p:sp>
+      <p:sp>
+        <p:nvSpPr>
+          <p:cNvPr id="16" name="Text 11"/>
+          <p:cNvSpPr txBox="1"/>
+          <p:nvPr/>
+        </p:nvSpPr>
+        <p:spPr>
+          <a:xfrm>
+            <a:off x="3657600" y="3694176"/>
+            <a:ext cx="4937760" cy="868680"/>
           </a:xfrm>
           <a:prstGeom prst="rect">
             <a:avLst/>
@@ -10777,7 +11722,7 @@
               <a:buNone/>
             </a:pPr>
             <a:r>
-              <a:rPr lang="en-US" sz="950" dirty="0">
+              <a:rPr lang="en-US" sz="1000" dirty="0">
                 <a:solidFill>
                   <a:srgbClr val="5F5F7A"/>
                 </a:solidFill>
@@ -10785,651 +11730,15 @@
                 <a:ea typeface="Arial" pitchFamily="34" charset="-122"/>
                 <a:cs typeface="Arial" pitchFamily="34" charset="-120"/>
               </a:rPr>
-              <a:t>Who approved, and who signed, both recorded</a:t>
-            </a:r>
-            <a:endParaRPr lang="en-US" sz="950" dirty="0"/>
-          </a:p>
-        </p:txBody>
-      </p:sp>
-      <p:sp>
-        <p:nvSpPr>
-          <p:cNvPr id="13" name="Shape 11"/>
-          <p:cNvSpPr/>
-          <p:nvPr/>
-        </p:nvSpPr>
-        <p:spPr>
-          <a:xfrm>
-            <a:off x="4663440" y="2130552"/>
-            <a:ext cx="146304" cy="146304"/>
-          </a:xfrm>
-          <a:prstGeom prst="ellipse">
-            <a:avLst/>
-          </a:prstGeom>
-          <a:solidFill>
-            <a:srgbClr val="006242"/>
-          </a:solidFill>
-          <a:ln w="12700">
-            <a:solidFill>
-              <a:srgbClr val="006242"/>
-            </a:solidFill>
-            <a:prstDash val="solid"/>
-          </a:ln>
-        </p:spPr>
-      </p:sp>
-      <p:sp>
-        <p:nvSpPr>
-          <p:cNvPr id="14" name="Text 12"/>
-          <p:cNvSpPr txBox="1"/>
-          <p:nvPr/>
-        </p:nvSpPr>
-        <p:spPr>
-          <a:xfrm>
-            <a:off x="4937760" y="2057400"/>
-            <a:ext cx="3749040" cy="256032"/>
-          </a:xfrm>
-          <a:prstGeom prst="rect">
-            <a:avLst/>
-          </a:prstGeom>
-          <a:noFill/>
-          <a:ln/>
-        </p:spPr>
-        <p:txBody>
-          <a:bodyPr wrap="square" lIns="0" tIns="0" rIns="0" bIns="0" rtlCol="0" anchor="ctr"/>
-          <a:lstStyle/>
-          <a:p>
-            <a:pPr indent="0" marL="0">
-              <a:buNone/>
-            </a:pPr>
-            <a:r>
-              <a:rPr lang="en-US" sz="1100" b="1" dirty="0">
-                <a:solidFill>
-                  <a:srgbClr val="14142B"/>
-                </a:solidFill>
-                <a:latin typeface="Arial" pitchFamily="34" charset="0"/>
-                <a:ea typeface="Arial" pitchFamily="34" charset="-122"/>
-                <a:cs typeface="Arial" pitchFamily="34" charset="-120"/>
-              </a:rPr>
-              <a:t>Five overlapping tracking tools</a:t>
-            </a:r>
-            <a:endParaRPr lang="en-US" sz="1100" dirty="0"/>
-          </a:p>
-        </p:txBody>
-      </p:sp>
-      <p:sp>
-        <p:nvSpPr>
-          <p:cNvPr id="15" name="Text 13"/>
-          <p:cNvSpPr txBox="1"/>
-          <p:nvPr/>
-        </p:nvSpPr>
-        <p:spPr>
-          <a:xfrm>
-            <a:off x="4937760" y="2313432"/>
-            <a:ext cx="3749040" cy="384048"/>
-          </a:xfrm>
-          <a:prstGeom prst="rect">
-            <a:avLst/>
-          </a:prstGeom>
-          <a:noFill/>
-          <a:ln/>
-        </p:spPr>
-        <p:txBody>
-          <a:bodyPr wrap="square" lIns="0" tIns="0" rIns="0" bIns="0" rtlCol="0" anchor="t"/>
-          <a:lstStyle/>
-          <a:p>
-            <a:pPr indent="0" marL="0">
-              <a:lnSpc>
-                <a:spcPct val="125000"/>
-              </a:lnSpc>
-              <a:buNone/>
-            </a:pPr>
-            <a:r>
-              <a:rPr lang="en-US" sz="950" dirty="0">
-                <a:solidFill>
-                  <a:srgbClr val="5F5F7A"/>
-                </a:solidFill>
-                <a:latin typeface="Arial" pitchFamily="34" charset="0"/>
-                <a:ea typeface="Arial" pitchFamily="34" charset="-122"/>
-                <a:cs typeface="Arial" pitchFamily="34" charset="-120"/>
-              </a:rPr>
-              <a:t>Merged into one path</a:t>
-            </a:r>
-            <a:endParaRPr lang="en-US" sz="950" dirty="0"/>
-          </a:p>
-        </p:txBody>
-      </p:sp>
-      <p:sp>
-        <p:nvSpPr>
-          <p:cNvPr id="16" name="Shape 14"/>
-          <p:cNvSpPr/>
-          <p:nvPr/>
-        </p:nvSpPr>
-        <p:spPr>
-          <a:xfrm>
-            <a:off x="457200" y="2788920"/>
-            <a:ext cx="146304" cy="146304"/>
-          </a:xfrm>
-          <a:prstGeom prst="ellipse">
-            <a:avLst/>
-          </a:prstGeom>
-          <a:solidFill>
-            <a:srgbClr val="006242"/>
-          </a:solidFill>
-          <a:ln w="12700">
-            <a:solidFill>
-              <a:srgbClr val="006242"/>
-            </a:solidFill>
-            <a:prstDash val="solid"/>
-          </a:ln>
-        </p:spPr>
-      </p:sp>
-      <p:sp>
-        <p:nvSpPr>
-          <p:cNvPr id="17" name="Text 15"/>
-          <p:cNvSpPr txBox="1"/>
-          <p:nvPr/>
-        </p:nvSpPr>
-        <p:spPr>
-          <a:xfrm>
-            <a:off x="731520" y="2715768"/>
-            <a:ext cx="3749040" cy="256032"/>
-          </a:xfrm>
-          <a:prstGeom prst="rect">
-            <a:avLst/>
-          </a:prstGeom>
-          <a:noFill/>
-          <a:ln/>
-        </p:spPr>
-        <p:txBody>
-          <a:bodyPr wrap="square" lIns="0" tIns="0" rIns="0" bIns="0" rtlCol="0" anchor="ctr"/>
-          <a:lstStyle/>
-          <a:p>
-            <a:pPr indent="0" marL="0">
-              <a:buNone/>
-            </a:pPr>
-            <a:r>
-              <a:rPr lang="en-US" sz="1100" b="1" dirty="0">
-                <a:solidFill>
-                  <a:srgbClr val="14142B"/>
-                </a:solidFill>
-                <a:latin typeface="Arial" pitchFamily="34" charset="0"/>
-                <a:ea typeface="Arial" pitchFamily="34" charset="-122"/>
-                <a:cs typeface="Arial" pitchFamily="34" charset="-120"/>
-              </a:rPr>
-              <a:t>Progress shown four ways</a:t>
-            </a:r>
-            <a:endParaRPr lang="en-US" sz="1100" dirty="0"/>
-          </a:p>
-        </p:txBody>
-      </p:sp>
-      <p:sp>
-        <p:nvSpPr>
-          <p:cNvPr id="18" name="Text 16"/>
-          <p:cNvSpPr txBox="1"/>
-          <p:nvPr/>
-        </p:nvSpPr>
-        <p:spPr>
-          <a:xfrm>
-            <a:off x="731520" y="2971800"/>
-            <a:ext cx="3749040" cy="384048"/>
-          </a:xfrm>
-          <a:prstGeom prst="rect">
-            <a:avLst/>
-          </a:prstGeom>
-          <a:noFill/>
-          <a:ln/>
-        </p:spPr>
-        <p:txBody>
-          <a:bodyPr wrap="square" lIns="0" tIns="0" rIns="0" bIns="0" rtlCol="0" anchor="t"/>
-          <a:lstStyle/>
-          <a:p>
-            <a:pPr indent="0" marL="0">
-              <a:lnSpc>
-                <a:spcPct val="125000"/>
-              </a:lnSpc>
-              <a:buNone/>
-            </a:pPr>
-            <a:r>
-              <a:rPr lang="en-US" sz="950" dirty="0">
-                <a:solidFill>
-                  <a:srgbClr val="5F5F7A"/>
-                </a:solidFill>
-                <a:latin typeface="Arial" pitchFamily="34" charset="0"/>
-                <a:ea typeface="Arial" pitchFamily="34" charset="-122"/>
-                <a:cs typeface="Arial" pitchFamily="34" charset="-120"/>
-              </a:rPr>
-              <a:t>One measure: milestones done, plus the indicator</a:t>
-            </a:r>
-            <a:endParaRPr lang="en-US" sz="950" dirty="0"/>
-          </a:p>
-        </p:txBody>
-      </p:sp>
-      <p:sp>
-        <p:nvSpPr>
-          <p:cNvPr id="19" name="Shape 17"/>
-          <p:cNvSpPr/>
-          <p:nvPr/>
-        </p:nvSpPr>
-        <p:spPr>
-          <a:xfrm>
-            <a:off x="4663440" y="2788920"/>
-            <a:ext cx="146304" cy="146304"/>
-          </a:xfrm>
-          <a:prstGeom prst="ellipse">
-            <a:avLst/>
-          </a:prstGeom>
-          <a:solidFill>
-            <a:srgbClr val="006242"/>
-          </a:solidFill>
-          <a:ln w="12700">
-            <a:solidFill>
-              <a:srgbClr val="006242"/>
-            </a:solidFill>
-            <a:prstDash val="solid"/>
-          </a:ln>
-        </p:spPr>
-      </p:sp>
-      <p:sp>
-        <p:nvSpPr>
-          <p:cNvPr id="20" name="Text 18"/>
-          <p:cNvSpPr txBox="1"/>
-          <p:nvPr/>
-        </p:nvSpPr>
-        <p:spPr>
-          <a:xfrm>
-            <a:off x="4937760" y="2715768"/>
-            <a:ext cx="3749040" cy="256032"/>
-          </a:xfrm>
-          <a:prstGeom prst="rect">
-            <a:avLst/>
-          </a:prstGeom>
-          <a:noFill/>
-          <a:ln/>
-        </p:spPr>
-        <p:txBody>
-          <a:bodyPr wrap="square" lIns="0" tIns="0" rIns="0" bIns="0" rtlCol="0" anchor="ctr"/>
-          <a:lstStyle/>
-          <a:p>
-            <a:pPr indent="0" marL="0">
-              <a:buNone/>
-            </a:pPr>
-            <a:r>
-              <a:rPr lang="en-US" sz="1100" b="1" dirty="0">
-                <a:solidFill>
-                  <a:srgbClr val="14142B"/>
-                </a:solidFill>
-                <a:latin typeface="Arial" pitchFamily="34" charset="0"/>
-                <a:ea typeface="Arial" pitchFamily="34" charset="-122"/>
-                <a:cs typeface="Arial" pitchFamily="34" charset="-120"/>
-              </a:rPr>
-              <a:t>Placeholder text in the demo</a:t>
-            </a:r>
-            <a:endParaRPr lang="en-US" sz="1100" dirty="0"/>
-          </a:p>
-        </p:txBody>
-      </p:sp>
-      <p:sp>
-        <p:nvSpPr>
-          <p:cNvPr id="21" name="Text 19"/>
-          <p:cNvSpPr txBox="1"/>
-          <p:nvPr/>
-        </p:nvSpPr>
-        <p:spPr>
-          <a:xfrm>
-            <a:off x="4937760" y="2971800"/>
-            <a:ext cx="3749040" cy="384048"/>
-          </a:xfrm>
-          <a:prstGeom prst="rect">
-            <a:avLst/>
-          </a:prstGeom>
-          <a:noFill/>
-          <a:ln/>
-        </p:spPr>
-        <p:txBody>
-          <a:bodyPr wrap="square" lIns="0" tIns="0" rIns="0" bIns="0" rtlCol="0" anchor="t"/>
-          <a:lstStyle/>
-          <a:p>
-            <a:pPr indent="0" marL="0">
-              <a:lnSpc>
-                <a:spcPct val="125000"/>
-              </a:lnSpc>
-              <a:buNone/>
-            </a:pPr>
-            <a:r>
-              <a:rPr lang="en-US" sz="950" dirty="0">
-                <a:solidFill>
-                  <a:srgbClr val="5F5F7A"/>
-                </a:solidFill>
-                <a:latin typeface="Arial" pitchFamily="34" charset="0"/>
-                <a:ea typeface="Arial" pitchFamily="34" charset="-122"/>
-                <a:cs typeface="Arial" pitchFamily="34" charset="-120"/>
-              </a:rPr>
-              <a:t>One realistic project, written end to end</a:t>
-            </a:r>
-            <a:endParaRPr lang="en-US" sz="950" dirty="0"/>
-          </a:p>
-        </p:txBody>
-      </p:sp>
-      <p:sp>
-        <p:nvSpPr>
-          <p:cNvPr id="22" name="Shape 20"/>
-          <p:cNvSpPr/>
-          <p:nvPr/>
-        </p:nvSpPr>
-        <p:spPr>
-          <a:xfrm>
-            <a:off x="457200" y="3447288"/>
-            <a:ext cx="146304" cy="146304"/>
-          </a:xfrm>
-          <a:prstGeom prst="ellipse">
-            <a:avLst/>
-          </a:prstGeom>
-          <a:solidFill>
-            <a:srgbClr val="006242"/>
-          </a:solidFill>
-          <a:ln w="12700">
-            <a:solidFill>
-              <a:srgbClr val="006242"/>
-            </a:solidFill>
-            <a:prstDash val="solid"/>
-          </a:ln>
-        </p:spPr>
-      </p:sp>
-      <p:sp>
-        <p:nvSpPr>
-          <p:cNvPr id="23" name="Text 21"/>
-          <p:cNvSpPr txBox="1"/>
-          <p:nvPr/>
-        </p:nvSpPr>
-        <p:spPr>
-          <a:xfrm>
-            <a:off x="731520" y="3374136"/>
-            <a:ext cx="3749040" cy="256032"/>
-          </a:xfrm>
-          <a:prstGeom prst="rect">
-            <a:avLst/>
-          </a:prstGeom>
-          <a:noFill/>
-          <a:ln/>
-        </p:spPr>
-        <p:txBody>
-          <a:bodyPr wrap="square" lIns="0" tIns="0" rIns="0" bIns="0" rtlCol="0" anchor="ctr"/>
-          <a:lstStyle/>
-          <a:p>
-            <a:pPr indent="0" marL="0">
-              <a:buNone/>
-            </a:pPr>
-            <a:r>
-              <a:rPr lang="en-US" sz="1100" b="1" dirty="0">
-                <a:solidFill>
-                  <a:srgbClr val="14142B"/>
-                </a:solidFill>
-                <a:latin typeface="Arial" pitchFamily="34" charset="0"/>
-                <a:ea typeface="Arial" pitchFamily="34" charset="-122"/>
-                <a:cs typeface="Arial" pitchFamily="34" charset="-120"/>
-              </a:rPr>
-              <a:t>Working titles, empty pages</a:t>
-            </a:r>
-            <a:endParaRPr lang="en-US" sz="1100" dirty="0"/>
-          </a:p>
-        </p:txBody>
-      </p:sp>
-      <p:sp>
-        <p:nvSpPr>
-          <p:cNvPr id="24" name="Text 22"/>
-          <p:cNvSpPr txBox="1"/>
-          <p:nvPr/>
-        </p:nvSpPr>
-        <p:spPr>
-          <a:xfrm>
-            <a:off x="731520" y="3630168"/>
-            <a:ext cx="3749040" cy="384048"/>
-          </a:xfrm>
-          <a:prstGeom prst="rect">
-            <a:avLst/>
-          </a:prstGeom>
-          <a:noFill/>
-          <a:ln/>
-        </p:spPr>
-        <p:txBody>
-          <a:bodyPr wrap="square" lIns="0" tIns="0" rIns="0" bIns="0" rtlCol="0" anchor="t"/>
-          <a:lstStyle/>
-          <a:p>
-            <a:pPr indent="0" marL="0">
-              <a:lnSpc>
-                <a:spcPct val="125000"/>
-              </a:lnSpc>
-              <a:buNone/>
-            </a:pPr>
-            <a:r>
-              <a:rPr lang="en-US" sz="950" dirty="0">
-                <a:solidFill>
-                  <a:srgbClr val="5F5F7A"/>
-                </a:solidFill>
-                <a:latin typeface="Arial" pitchFamily="34" charset="0"/>
-                <a:ea typeface="Arial" pitchFamily="34" charset="-122"/>
-                <a:cs typeface="Arial" pitchFamily="34" charset="-120"/>
-              </a:rPr>
-              <a:t>Renamed or hidden until written</a:t>
-            </a:r>
-            <a:endParaRPr lang="en-US" sz="950" dirty="0"/>
-          </a:p>
-        </p:txBody>
-      </p:sp>
-      <p:sp>
-        <p:nvSpPr>
-          <p:cNvPr id="25" name="Shape 23"/>
-          <p:cNvSpPr/>
-          <p:nvPr/>
-        </p:nvSpPr>
-        <p:spPr>
-          <a:xfrm>
-            <a:off x="4663440" y="3447288"/>
-            <a:ext cx="146304" cy="146304"/>
-          </a:xfrm>
-          <a:prstGeom prst="ellipse">
-            <a:avLst/>
-          </a:prstGeom>
-          <a:solidFill>
-            <a:srgbClr val="006242"/>
-          </a:solidFill>
-          <a:ln w="12700">
-            <a:solidFill>
-              <a:srgbClr val="006242"/>
-            </a:solidFill>
-            <a:prstDash val="solid"/>
-          </a:ln>
-        </p:spPr>
-      </p:sp>
-      <p:sp>
-        <p:nvSpPr>
-          <p:cNvPr id="26" name="Text 24"/>
-          <p:cNvSpPr txBox="1"/>
-          <p:nvPr/>
-        </p:nvSpPr>
-        <p:spPr>
-          <a:xfrm>
-            <a:off x="4937760" y="3374136"/>
-            <a:ext cx="3749040" cy="256032"/>
-          </a:xfrm>
-          <a:prstGeom prst="rect">
-            <a:avLst/>
-          </a:prstGeom>
-          <a:noFill/>
-          <a:ln/>
-        </p:spPr>
-        <p:txBody>
-          <a:bodyPr wrap="square" lIns="0" tIns="0" rIns="0" bIns="0" rtlCol="0" anchor="ctr"/>
-          <a:lstStyle/>
-          <a:p>
-            <a:pPr indent="0" marL="0">
-              <a:buNone/>
-            </a:pPr>
-            <a:r>
-              <a:rPr lang="en-US" sz="1100" b="1" dirty="0">
-                <a:solidFill>
-                  <a:srgbClr val="14142B"/>
-                </a:solidFill>
-                <a:latin typeface="Arial" pitchFamily="34" charset="0"/>
-                <a:ea typeface="Arial" pitchFamily="34" charset="-122"/>
-                <a:cs typeface="Arial" pitchFamily="34" charset="-120"/>
-              </a:rPr>
-              <a:t>Developer instruction on screen</a:t>
-            </a:r>
-            <a:endParaRPr lang="en-US" sz="1100" dirty="0"/>
-          </a:p>
-        </p:txBody>
-      </p:sp>
-      <p:sp>
-        <p:nvSpPr>
-          <p:cNvPr id="27" name="Text 25"/>
-          <p:cNvSpPr txBox="1"/>
-          <p:nvPr/>
-        </p:nvSpPr>
-        <p:spPr>
-          <a:xfrm>
-            <a:off x="4937760" y="3630168"/>
-            <a:ext cx="3749040" cy="384048"/>
-          </a:xfrm>
-          <a:prstGeom prst="rect">
-            <a:avLst/>
-          </a:prstGeom>
-          <a:noFill/>
-          <a:ln/>
-        </p:spPr>
-        <p:txBody>
-          <a:bodyPr wrap="square" lIns="0" tIns="0" rIns="0" bIns="0" rtlCol="0" anchor="t"/>
-          <a:lstStyle/>
-          <a:p>
-            <a:pPr indent="0" marL="0">
-              <a:lnSpc>
-                <a:spcPct val="125000"/>
-              </a:lnSpc>
-              <a:buNone/>
-            </a:pPr>
-            <a:r>
-              <a:rPr lang="en-US" sz="950" dirty="0">
-                <a:solidFill>
-                  <a:srgbClr val="5F5F7A"/>
-                </a:solidFill>
-                <a:latin typeface="Arial" pitchFamily="34" charset="0"/>
-                <a:ea typeface="Arial" pitchFamily="34" charset="-122"/>
-                <a:cs typeface="Arial" pitchFamily="34" charset="-120"/>
-              </a:rPr>
-              <a:t>Removed</a:t>
-            </a:r>
-            <a:endParaRPr lang="en-US" sz="950" dirty="0"/>
-          </a:p>
-        </p:txBody>
-      </p:sp>
-      <p:sp>
-        <p:nvSpPr>
-          <p:cNvPr id="28" name="Shape 26"/>
-          <p:cNvSpPr/>
-          <p:nvPr/>
-        </p:nvSpPr>
-        <p:spPr>
-          <a:xfrm>
-            <a:off x="457200" y="4105656"/>
-            <a:ext cx="146304" cy="146304"/>
-          </a:xfrm>
-          <a:prstGeom prst="ellipse">
-            <a:avLst/>
-          </a:prstGeom>
-          <a:solidFill>
-            <a:srgbClr val="006242"/>
-          </a:solidFill>
-          <a:ln w="12700">
-            <a:solidFill>
-              <a:srgbClr val="006242"/>
-            </a:solidFill>
-            <a:prstDash val="solid"/>
-          </a:ln>
-        </p:spPr>
-      </p:sp>
-      <p:sp>
-        <p:nvSpPr>
-          <p:cNvPr id="29" name="Text 27"/>
-          <p:cNvSpPr txBox="1"/>
-          <p:nvPr/>
-        </p:nvSpPr>
-        <p:spPr>
-          <a:xfrm>
-            <a:off x="731520" y="4032504"/>
-            <a:ext cx="3749040" cy="256032"/>
-          </a:xfrm>
-          <a:prstGeom prst="rect">
-            <a:avLst/>
-          </a:prstGeom>
-          <a:noFill/>
-          <a:ln/>
-        </p:spPr>
-        <p:txBody>
-          <a:bodyPr wrap="square" lIns="0" tIns="0" rIns="0" bIns="0" rtlCol="0" anchor="ctr"/>
-          <a:lstStyle/>
-          <a:p>
-            <a:pPr indent="0" marL="0">
-              <a:buNone/>
-            </a:pPr>
-            <a:r>
-              <a:rPr lang="en-US" sz="1100" b="1" dirty="0">
-                <a:solidFill>
-                  <a:srgbClr val="14142B"/>
-                </a:solidFill>
-                <a:latin typeface="Arial" pitchFamily="34" charset="0"/>
-                <a:ea typeface="Arial" pitchFamily="34" charset="-122"/>
-                <a:cs typeface="Arial" pitchFamily="34" charset="-120"/>
-              </a:rPr>
-              <a:t>Demo account was admin only</a:t>
-            </a:r>
-            <a:endParaRPr lang="en-US" sz="1100" dirty="0"/>
-          </a:p>
-        </p:txBody>
-      </p:sp>
-      <p:sp>
-        <p:nvSpPr>
-          <p:cNvPr id="30" name="Text 28"/>
-          <p:cNvSpPr txBox="1"/>
-          <p:nvPr/>
-        </p:nvSpPr>
-        <p:spPr>
-          <a:xfrm>
-            <a:off x="731520" y="4288536"/>
-            <a:ext cx="3749040" cy="384048"/>
-          </a:xfrm>
-          <a:prstGeom prst="rect">
-            <a:avLst/>
-          </a:prstGeom>
-          <a:noFill/>
-          <a:ln/>
-        </p:spPr>
-        <p:txBody>
-          <a:bodyPr wrap="square" lIns="0" tIns="0" rIns="0" bIns="0" rtlCol="0" anchor="t"/>
-          <a:lstStyle/>
-          <a:p>
-            <a:pPr indent="0" marL="0">
-              <a:lnSpc>
-                <a:spcPct val="125000"/>
-              </a:lnSpc>
-              <a:buNone/>
-            </a:pPr>
-            <a:r>
-              <a:rPr lang="en-US" sz="950" dirty="0">
-                <a:solidFill>
-                  <a:srgbClr val="5F5F7A"/>
-                </a:solidFill>
-                <a:latin typeface="Arial" pitchFamily="34" charset="0"/>
-                <a:ea typeface="Arial" pitchFamily="34" charset="-122"/>
-                <a:cs typeface="Arial" pitchFamily="34" charset="-120"/>
-              </a:rPr>
-              <a:t>Separate student, coach and admin accounts</a:t>
-            </a:r>
-            <a:endParaRPr lang="en-US" sz="950" dirty="0"/>
-          </a:p>
-        </p:txBody>
-      </p:sp>
-      <p:sp>
-        <p:nvSpPr>
-          <p:cNvPr id="31" name="Text 29"/>
+              <a:t>Before the charter is signed a project is a draft and removing it removes it. After it is signed, leaving is a withdrawal with a written reason: it drops off the dashboard, the work stays on the Passport, and the coach is told why.</a:t>
+            </a:r>
+            <a:endParaRPr lang="en-US" sz="1000" dirty="0"/>
+          </a:p>
+        </p:txBody>
+      </p:sp>
+      <p:sp>
+        <p:nvSpPr>
+          <p:cNvPr id="17" name="Text 12"/>
           <p:cNvSpPr txBox="1"/>
           <p:nvPr/>
         </p:nvSpPr>
@@ -11468,7 +11777,7 @@
       </p:sp>
       <p:sp>
         <p:nvSpPr>
-          <p:cNvPr id="32" name="Text 30"/>
+          <p:cNvPr id="18" name="Text 13"/>
           <p:cNvSpPr txBox="1"/>
           <p:nvPr/>
         </p:nvSpPr>
@@ -11519,7 +11828,7 @@
     <p:bg>
       <p:bgPr>
         <a:solidFill>
-          <a:srgbClr val="000077"/>
+          <a:srgbClr val="F6F5FA"/>
         </a:solidFill>
       </p:bgPr>
     </p:bg>
@@ -11537,35 +11846,9 @@
           <a:chExt cx="0" cy="0"/>
         </a:xfrm>
       </p:grpSpPr>
-      <p:pic>
-        <p:nvPicPr>
-          <p:cNvPr id="2" name="Image 0" descr="/Users/alexandermalinsky/Projects/impact-lms-pitch/assets/mark-lightpurple.png">    </p:cNvPr>
-          <p:cNvPicPr>
-            <a:picLocks noChangeAspect="1"/>
-          </p:cNvPicPr>
-          <p:nvPr/>
-        </p:nvPicPr>
-        <p:blipFill>
-          <a:blip r:embed="rId1">
-            <a:alphaModFix amt="12000"/>
-          </a:blip>
-          <a:stretch>
-            <a:fillRect/>
-          </a:stretch>
-        </p:blipFill>
-        <p:spPr>
-          <a:xfrm>
-            <a:off x="6583680" y="-548640"/>
-            <a:ext cx="3291840" cy="3566160"/>
-          </a:xfrm>
-          <a:prstGeom prst="rect">
-            <a:avLst/>
-          </a:prstGeom>
-        </p:spPr>
-      </p:pic>
-      <p:sp>
-        <p:nvSpPr>
-          <p:cNvPr id="3" name="Text 0"/>
+      <p:sp>
+        <p:nvSpPr>
+          <p:cNvPr id="2" name="Text 0"/>
           <p:cNvSpPr txBox="1"/>
           <p:nvPr/>
         </p:nvSpPr>
@@ -11590,13 +11873,13 @@
             <a:r>
               <a:rPr lang="en-US" sz="950" b="1" spc="300" kern="0" dirty="0">
                 <a:solidFill>
-                  <a:srgbClr val="B494CB"/>
-                </a:solidFill>
-                <a:latin typeface="Arial" pitchFamily="34" charset="0"/>
-                <a:ea typeface="Arial" pitchFamily="34" charset="-122"/>
-                <a:cs typeface="Arial" pitchFamily="34" charset="-120"/>
-              </a:rPr>
-              <a:t>AND THEN MADE SIMPLER</a:t>
+                  <a:srgbClr val="500591"/>
+                </a:solidFill>
+                <a:latin typeface="Arial" pitchFamily="34" charset="0"/>
+                <a:ea typeface="Arial" pitchFamily="34" charset="-122"/>
+                <a:cs typeface="Arial" pitchFamily="34" charset="-120"/>
+              </a:rPr>
+              <a:t>SECTION 8 OF THE BRIEF</a:t>
             </a:r>
             <a:endParaRPr lang="en-US" sz="950" dirty="0"/>
           </a:p>
@@ -11604,14 +11887,14 @@
       </p:sp>
       <p:sp>
         <p:nvSpPr>
-          <p:cNvPr id="4" name="Text 1"/>
+          <p:cNvPr id="3" name="Text 1"/>
           <p:cNvSpPr txBox="1"/>
           <p:nvPr/>
         </p:nvSpPr>
         <p:spPr>
           <a:xfrm>
             <a:off x="457200" y="731520"/>
-            <a:ext cx="7315200" cy="502920"/>
+            <a:ext cx="8229600" cy="548640"/>
           </a:xfrm>
           <a:prstGeom prst="rect">
             <a:avLst/>
@@ -11632,13 +11915,13 @@
             <a:r>
               <a:rPr lang="en-US" sz="2700" b="1" dirty="0">
                 <a:solidFill>
-                  <a:srgbClr val="FFFFFF"/>
-                </a:solidFill>
-                <a:latin typeface="Arial" pitchFamily="34" charset="0"/>
-                <a:ea typeface="Arial" pitchFamily="34" charset="-122"/>
-                <a:cs typeface="Arial" pitchFamily="34" charset="-120"/>
-              </a:rPr>
-              <a:t>Mostly deletion.</a:t>
+                  <a:srgbClr val="14142B"/>
+                </a:solidFill>
+                <a:latin typeface="Arial" pitchFamily="34" charset="0"/>
+                <a:ea typeface="Arial" pitchFamily="34" charset="-122"/>
+                <a:cs typeface="Arial" pitchFamily="34" charset="-120"/>
+              </a:rPr>
+              <a:t>Every issue found in the beta, closed.</a:t>
             </a:r>
             <a:endParaRPr lang="en-US" sz="2700" dirty="0"/>
           </a:p>
@@ -11646,14 +11929,78 @@
       </p:sp>
       <p:sp>
         <p:nvSpPr>
-          <p:cNvPr id="5" name="Text 2"/>
-          <p:cNvSpPr txBox="1"/>
-          <p:nvPr/>
-        </p:nvSpPr>
-        <p:spPr>
-          <a:xfrm>
-            <a:off x="457200" y="1280160"/>
-            <a:ext cx="7315200" cy="274320"/>
+          <p:cNvPr id="4" name="Shape 2"/>
+          <p:cNvSpPr/>
+          <p:nvPr/>
+        </p:nvSpPr>
+        <p:spPr>
+          <a:xfrm>
+            <a:off x="457200" y="1472184"/>
+            <a:ext cx="146304" cy="146304"/>
+          </a:xfrm>
+          <a:prstGeom prst="ellipse">
+            <a:avLst/>
+          </a:prstGeom>
+          <a:solidFill>
+            <a:srgbClr val="006242"/>
+          </a:solidFill>
+          <a:ln w="12700">
+            <a:solidFill>
+              <a:srgbClr val="006242"/>
+            </a:solidFill>
+            <a:prstDash val="solid"/>
+          </a:ln>
+        </p:spPr>
+      </p:sp>
+      <p:sp>
+        <p:nvSpPr>
+          <p:cNvPr id="5" name="Text 3"/>
+          <p:cNvSpPr txBox="1"/>
+          <p:nvPr/>
+        </p:nvSpPr>
+        <p:spPr>
+          <a:xfrm>
+            <a:off x="731520" y="1399032"/>
+            <a:ext cx="3749040" cy="256032"/>
+          </a:xfrm>
+          <a:prstGeom prst="rect">
+            <a:avLst/>
+          </a:prstGeom>
+          <a:noFill/>
+          <a:ln/>
+        </p:spPr>
+        <p:txBody>
+          <a:bodyPr wrap="square" lIns="0" tIns="0" rIns="0" bIns="0" rtlCol="0" anchor="ctr"/>
+          <a:lstStyle/>
+          <a:p>
+            <a:pPr indent="0" marL="0">
+              <a:buNone/>
+            </a:pPr>
+            <a:r>
+              <a:rPr lang="en-US" sz="1100" b="1" dirty="0">
+                <a:solidFill>
+                  <a:srgbClr val="14142B"/>
+                </a:solidFill>
+                <a:latin typeface="Arial" pitchFamily="34" charset="0"/>
+                <a:ea typeface="Arial" pitchFamily="34" charset="-122"/>
+                <a:cs typeface="Arial" pitchFamily="34" charset="-120"/>
+              </a:rPr>
+              <a:t>Any phase could be selected</a:t>
+            </a:r>
+            <a:endParaRPr lang="en-US" sz="1100" dirty="0"/>
+          </a:p>
+        </p:txBody>
+      </p:sp>
+      <p:sp>
+        <p:nvSpPr>
+          <p:cNvPr id="6" name="Text 4"/>
+          <p:cNvSpPr txBox="1"/>
+          <p:nvPr/>
+        </p:nvSpPr>
+        <p:spPr>
+          <a:xfrm>
+            <a:off x="731520" y="1655064"/>
+            <a:ext cx="3749040" cy="384048"/>
           </a:xfrm>
           <a:prstGeom prst="rect">
             <a:avLst/>
@@ -11672,108 +12019,94 @@
               <a:buNone/>
             </a:pPr>
             <a:r>
-              <a:rPr lang="en-US" sz="1200" dirty="0">
-                <a:solidFill>
-                  <a:srgbClr val="B494CB"/>
-                </a:solidFill>
-                <a:latin typeface="Arial" pitchFamily="34" charset="0"/>
-                <a:ea typeface="Arial" pitchFamily="34" charset="-122"/>
-                <a:cs typeface="Arial" pitchFamily="34" charset="-120"/>
-              </a:rPr>
-              <a:t>The structure was right. It was buried under leftovers from three earlier versions of the idea.</a:t>
-            </a:r>
-            <a:endParaRPr lang="en-US" sz="1200" dirty="0"/>
-          </a:p>
-        </p:txBody>
-      </p:sp>
-      <p:sp>
-        <p:nvSpPr>
-          <p:cNvPr id="6" name="Text 3"/>
-          <p:cNvSpPr txBox="1"/>
-          <p:nvPr/>
-        </p:nvSpPr>
-        <p:spPr>
-          <a:xfrm>
-            <a:off x="457200" y="1828800"/>
-            <a:ext cx="1554480" cy="411480"/>
-          </a:xfrm>
-          <a:prstGeom prst="rect">
-            <a:avLst/>
-          </a:prstGeom>
-          <a:noFill/>
-          <a:ln/>
-        </p:spPr>
-        <p:txBody>
-          <a:bodyPr wrap="square" lIns="0" tIns="0" rIns="0" bIns="0" rtlCol="0" anchor="ctr"/>
-          <a:lstStyle/>
-          <a:p>
-            <a:pPr indent="0" marL="0">
-              <a:buNone/>
-            </a:pPr>
-            <a:r>
-              <a:rPr lang="en-US" sz="2400" b="1" dirty="0">
-                <a:solidFill>
-                  <a:srgbClr val="FFFFFF"/>
-                </a:solidFill>
-                <a:latin typeface="Arial" pitchFamily="34" charset="0"/>
-                <a:ea typeface="Arial" pitchFamily="34" charset="-122"/>
-                <a:cs typeface="Arial" pitchFamily="34" charset="-120"/>
-              </a:rPr>
-              <a:t>70 → 16</a:t>
-            </a:r>
-            <a:endParaRPr lang="en-US" sz="2400" dirty="0"/>
-          </a:p>
-        </p:txBody>
-      </p:sp>
-      <p:sp>
-        <p:nvSpPr>
-          <p:cNvPr id="7" name="Text 4"/>
-          <p:cNvSpPr txBox="1"/>
-          <p:nvPr/>
-        </p:nvSpPr>
-        <p:spPr>
-          <a:xfrm>
-            <a:off x="457200" y="2240280"/>
-            <a:ext cx="1737360" cy="274320"/>
-          </a:xfrm>
-          <a:prstGeom prst="rect">
-            <a:avLst/>
-          </a:prstGeom>
-          <a:noFill/>
-          <a:ln/>
-        </p:spPr>
-        <p:txBody>
-          <a:bodyPr wrap="square" lIns="0" tIns="0" rIns="0" bIns="0" rtlCol="0" anchor="ctr"/>
-          <a:lstStyle/>
-          <a:p>
-            <a:pPr indent="0" marL="0">
-              <a:buNone/>
-            </a:pPr>
-            <a:r>
-              <a:rPr lang="en-US" sz="1000" dirty="0">
-                <a:solidFill>
-                  <a:srgbClr val="B494CB"/>
-                </a:solidFill>
-                <a:latin typeface="Arial" pitchFamily="34" charset="0"/>
-                <a:ea typeface="Arial" pitchFamily="34" charset="-122"/>
-                <a:cs typeface="Arial" pitchFamily="34" charset="-120"/>
-              </a:rPr>
-              <a:t>practices shown</a:t>
-            </a:r>
-            <a:endParaRPr lang="en-US" sz="1000" dirty="0"/>
-          </a:p>
-        </p:txBody>
-      </p:sp>
-      <p:sp>
-        <p:nvSpPr>
-          <p:cNvPr id="8" name="Text 5"/>
-          <p:cNvSpPr txBox="1"/>
-          <p:nvPr/>
-        </p:nvSpPr>
-        <p:spPr>
-          <a:xfrm>
-            <a:off x="2377440" y="1874520"/>
-            <a:ext cx="6217920" cy="731520"/>
+              <a:rPr lang="en-US" sz="950" dirty="0">
+                <a:solidFill>
+                  <a:srgbClr val="5F5F7A"/>
+                </a:solidFill>
+                <a:latin typeface="Arial" pitchFamily="34" charset="0"/>
+                <a:ea typeface="Arial" pitchFamily="34" charset="-122"/>
+                <a:cs typeface="Arial" pitchFamily="34" charset="-120"/>
+              </a:rPr>
+              <a:t>A gate now needs the previous phase's deliverable and a coach</a:t>
+            </a:r>
+            <a:endParaRPr lang="en-US" sz="950" dirty="0"/>
+          </a:p>
+        </p:txBody>
+      </p:sp>
+      <p:sp>
+        <p:nvSpPr>
+          <p:cNvPr id="7" name="Shape 5"/>
+          <p:cNvSpPr/>
+          <p:nvPr/>
+        </p:nvSpPr>
+        <p:spPr>
+          <a:xfrm>
+            <a:off x="4663440" y="1472184"/>
+            <a:ext cx="146304" cy="146304"/>
+          </a:xfrm>
+          <a:prstGeom prst="ellipse">
+            <a:avLst/>
+          </a:prstGeom>
+          <a:solidFill>
+            <a:srgbClr val="006242"/>
+          </a:solidFill>
+          <a:ln w="12700">
+            <a:solidFill>
+              <a:srgbClr val="006242"/>
+            </a:solidFill>
+            <a:prstDash val="solid"/>
+          </a:ln>
+        </p:spPr>
+      </p:sp>
+      <p:sp>
+        <p:nvSpPr>
+          <p:cNvPr id="8" name="Text 6"/>
+          <p:cNvSpPr txBox="1"/>
+          <p:nvPr/>
+        </p:nvSpPr>
+        <p:spPr>
+          <a:xfrm>
+            <a:off x="4937760" y="1399032"/>
+            <a:ext cx="3749040" cy="256032"/>
+          </a:xfrm>
+          <a:prstGeom prst="rect">
+            <a:avLst/>
+          </a:prstGeom>
+          <a:noFill/>
+          <a:ln/>
+        </p:spPr>
+        <p:txBody>
+          <a:bodyPr wrap="square" lIns="0" tIns="0" rIns="0" bIns="0" rtlCol="0" anchor="ctr"/>
+          <a:lstStyle/>
+          <a:p>
+            <a:pPr indent="0" marL="0">
+              <a:buNone/>
+            </a:pPr>
+            <a:r>
+              <a:rPr lang="en-US" sz="1100" b="1" dirty="0">
+                <a:solidFill>
+                  <a:srgbClr val="14142B"/>
+                </a:solidFill>
+                <a:latin typeface="Arial" pitchFamily="34" charset="0"/>
+                <a:ea typeface="Arial" pitchFamily="34" charset="-122"/>
+                <a:cs typeface="Arial" pitchFamily="34" charset="-120"/>
+              </a:rPr>
+              <a:t>“Mark complete” with nothing achieved</a:t>
+            </a:r>
+            <a:endParaRPr lang="en-US" sz="1100" dirty="0"/>
+          </a:p>
+        </p:txBody>
+      </p:sp>
+      <p:sp>
+        <p:nvSpPr>
+          <p:cNvPr id="9" name="Text 7"/>
+          <p:cNvSpPr txBox="1"/>
+          <p:nvPr/>
+        </p:nvSpPr>
+        <p:spPr>
+          <a:xfrm>
+            <a:off x="4937760" y="1655064"/>
+            <a:ext cx="3749040" cy="384048"/>
           </a:xfrm>
           <a:prstGeom prst="rect">
             <a:avLst/>
@@ -11792,108 +12125,94 @@
               <a:buNone/>
             </a:pPr>
             <a:r>
-              <a:rPr lang="en-US" sz="1150" dirty="0">
-                <a:solidFill>
-                  <a:srgbClr val="B494CB"/>
-                </a:solidFill>
-                <a:latin typeface="Arial" pitchFamily="34" charset="0"/>
-                <a:ea typeface="Arial" pitchFamily="34" charset="-122"/>
-                <a:cs typeface="Arial" pitchFamily="34" charset="-120"/>
-              </a:rPr>
-              <a:t>54 were blank pages. Now hidden from students, surfaced to coaches who can write them.</a:t>
-            </a:r>
-            <a:endParaRPr lang="en-US" sz="1150" dirty="0"/>
-          </a:p>
-        </p:txBody>
-      </p:sp>
-      <p:sp>
-        <p:nvSpPr>
-          <p:cNvPr id="9" name="Text 6"/>
-          <p:cNvSpPr txBox="1"/>
-          <p:nvPr/>
-        </p:nvSpPr>
-        <p:spPr>
-          <a:xfrm>
-            <a:off x="457200" y="2743200"/>
-            <a:ext cx="1554480" cy="411480"/>
-          </a:xfrm>
-          <a:prstGeom prst="rect">
-            <a:avLst/>
-          </a:prstGeom>
-          <a:noFill/>
-          <a:ln/>
-        </p:spPr>
-        <p:txBody>
-          <a:bodyPr wrap="square" lIns="0" tIns="0" rIns="0" bIns="0" rtlCol="0" anchor="ctr"/>
-          <a:lstStyle/>
-          <a:p>
-            <a:pPr indent="0" marL="0">
-              <a:buNone/>
-            </a:pPr>
-            <a:r>
-              <a:rPr lang="en-US" sz="2400" b="1" dirty="0">
-                <a:solidFill>
-                  <a:srgbClr val="FFFFFF"/>
-                </a:solidFill>
-                <a:latin typeface="Arial" pitchFamily="34" charset="0"/>
-                <a:ea typeface="Arial" pitchFamily="34" charset="-122"/>
-                <a:cs typeface="Arial" pitchFamily="34" charset="-120"/>
-              </a:rPr>
-              <a:t>8 → 1</a:t>
-            </a:r>
-            <a:endParaRPr lang="en-US" sz="2400" dirty="0"/>
-          </a:p>
-        </p:txBody>
-      </p:sp>
-      <p:sp>
-        <p:nvSpPr>
-          <p:cNvPr id="10" name="Text 7"/>
-          <p:cNvSpPr txBox="1"/>
-          <p:nvPr/>
-        </p:nvSpPr>
-        <p:spPr>
-          <a:xfrm>
-            <a:off x="457200" y="3154680"/>
-            <a:ext cx="1737360" cy="274320"/>
-          </a:xfrm>
-          <a:prstGeom prst="rect">
-            <a:avLst/>
-          </a:prstGeom>
-          <a:noFill/>
-          <a:ln/>
-        </p:spPr>
-        <p:txBody>
-          <a:bodyPr wrap="square" lIns="0" tIns="0" rIns="0" bIns="0" rtlCol="0" anchor="ctr"/>
-          <a:lstStyle/>
-          <a:p>
-            <a:pPr indent="0" marL="0">
-              <a:buNone/>
-            </a:pPr>
-            <a:r>
-              <a:rPr lang="en-US" sz="1000" dirty="0">
-                <a:solidFill>
-                  <a:srgbClr val="B494CB"/>
-                </a:solidFill>
-                <a:latin typeface="Arial" pitchFamily="34" charset="0"/>
-                <a:ea typeface="Arial" pitchFamily="34" charset="-122"/>
-                <a:cs typeface="Arial" pitchFamily="34" charset="-120"/>
-              </a:rPr>
-              <a:t>pages of handbook</a:t>
-            </a:r>
-            <a:endParaRPr lang="en-US" sz="1000" dirty="0"/>
-          </a:p>
-        </p:txBody>
-      </p:sp>
-      <p:sp>
-        <p:nvSpPr>
-          <p:cNvPr id="11" name="Text 8"/>
-          <p:cNvSpPr txBox="1"/>
-          <p:nvPr/>
-        </p:nvSpPr>
-        <p:spPr>
-          <a:xfrm>
-            <a:off x="2377440" y="2788920"/>
-            <a:ext cx="6217920" cy="731520"/>
+              <a:rPr lang="en-US" sz="950" dirty="0">
+                <a:solidFill>
+                  <a:srgbClr val="5F5F7A"/>
+                </a:solidFill>
+                <a:latin typeface="Arial" pitchFamily="34" charset="0"/>
+                <a:ea typeface="Arial" pitchFamily="34" charset="-122"/>
+                <a:cs typeface="Arial" pitchFamily="34" charset="-120"/>
+              </a:rPr>
+              <a:t>Only from Report, after the final level is validated</a:t>
+            </a:r>
+            <a:endParaRPr lang="en-US" sz="950" dirty="0"/>
+          </a:p>
+        </p:txBody>
+      </p:sp>
+      <p:sp>
+        <p:nvSpPr>
+          <p:cNvPr id="10" name="Shape 8"/>
+          <p:cNvSpPr/>
+          <p:nvPr/>
+        </p:nvSpPr>
+        <p:spPr>
+          <a:xfrm>
+            <a:off x="457200" y="2130552"/>
+            <a:ext cx="146304" cy="146304"/>
+          </a:xfrm>
+          <a:prstGeom prst="ellipse">
+            <a:avLst/>
+          </a:prstGeom>
+          <a:solidFill>
+            <a:srgbClr val="006242"/>
+          </a:solidFill>
+          <a:ln w="12700">
+            <a:solidFill>
+              <a:srgbClr val="006242"/>
+            </a:solidFill>
+            <a:prstDash val="solid"/>
+          </a:ln>
+        </p:spPr>
+      </p:sp>
+      <p:sp>
+        <p:nvSpPr>
+          <p:cNvPr id="11" name="Text 9"/>
+          <p:cNvSpPr txBox="1"/>
+          <p:nvPr/>
+        </p:nvSpPr>
+        <p:spPr>
+          <a:xfrm>
+            <a:off x="731520" y="2057400"/>
+            <a:ext cx="3749040" cy="256032"/>
+          </a:xfrm>
+          <a:prstGeom prst="rect">
+            <a:avLst/>
+          </a:prstGeom>
+          <a:noFill/>
+          <a:ln/>
+        </p:spPr>
+        <p:txBody>
+          <a:bodyPr wrap="square" lIns="0" tIns="0" rIns="0" bIns="0" rtlCol="0" anchor="ctr"/>
+          <a:lstStyle/>
+          <a:p>
+            <a:pPr indent="0" marL="0">
+              <a:buNone/>
+            </a:pPr>
+            <a:r>
+              <a:rPr lang="en-US" sz="1100" b="1" dirty="0">
+                <a:solidFill>
+                  <a:srgbClr val="14142B"/>
+                </a:solidFill>
+                <a:latin typeface="Arial" pitchFamily="34" charset="0"/>
+                <a:ea typeface="Arial" pitchFamily="34" charset="-122"/>
+                <a:cs typeface="Arial" pitchFamily="34" charset="-120"/>
+              </a:rPr>
+              <a:t>Approval showed a date, no name</a:t>
+            </a:r>
+            <a:endParaRPr lang="en-US" sz="1100" dirty="0"/>
+          </a:p>
+        </p:txBody>
+      </p:sp>
+      <p:sp>
+        <p:nvSpPr>
+          <p:cNvPr id="12" name="Text 10"/>
+          <p:cNvSpPr txBox="1"/>
+          <p:nvPr/>
+        </p:nvSpPr>
+        <p:spPr>
+          <a:xfrm>
+            <a:off x="731520" y="2313432"/>
+            <a:ext cx="3749040" cy="384048"/>
           </a:xfrm>
           <a:prstGeom prst="rect">
             <a:avLst/>
@@ -11912,108 +12231,94 @@
               <a:buNone/>
             </a:pPr>
             <a:r>
-              <a:rPr lang="en-US" sz="1150" dirty="0">
-                <a:solidFill>
-                  <a:srgbClr val="B494CB"/>
-                </a:solidFill>
-                <a:latin typeface="Arial" pitchFamily="34" charset="0"/>
-                <a:ea typeface="Arial" pitchFamily="34" charset="-122"/>
-                <a:cs typeface="Arial" pitchFamily="34" charset="-120"/>
-              </a:rPr>
-              <a:t>“How IMPACT works”: three questions, four phases, seven words defined.</a:t>
-            </a:r>
-            <a:endParaRPr lang="en-US" sz="1150" dirty="0"/>
-          </a:p>
-        </p:txBody>
-      </p:sp>
-      <p:sp>
-        <p:nvSpPr>
-          <p:cNvPr id="12" name="Text 9"/>
-          <p:cNvSpPr txBox="1"/>
-          <p:nvPr/>
-        </p:nvSpPr>
-        <p:spPr>
-          <a:xfrm>
-            <a:off x="457200" y="3657600"/>
-            <a:ext cx="1554480" cy="411480"/>
-          </a:xfrm>
-          <a:prstGeom prst="rect">
-            <a:avLst/>
-          </a:prstGeom>
-          <a:noFill/>
-          <a:ln/>
-        </p:spPr>
-        <p:txBody>
-          <a:bodyPr wrap="square" lIns="0" tIns="0" rIns="0" bIns="0" rtlCol="0" anchor="ctr"/>
-          <a:lstStyle/>
-          <a:p>
-            <a:pPr indent="0" marL="0">
-              <a:buNone/>
-            </a:pPr>
-            <a:r>
-              <a:rPr lang="en-US" sz="2400" b="1" dirty="0">
-                <a:solidFill>
-                  <a:srgbClr val="FFFFFF"/>
-                </a:solidFill>
-                <a:latin typeface="Arial" pitchFamily="34" charset="0"/>
-                <a:ea typeface="Arial" pitchFamily="34" charset="-122"/>
-                <a:cs typeface="Arial" pitchFamily="34" charset="-120"/>
-              </a:rPr>
-              <a:t>2 → 1</a:t>
-            </a:r>
-            <a:endParaRPr lang="en-US" sz="2400" dirty="0"/>
-          </a:p>
-        </p:txBody>
-      </p:sp>
-      <p:sp>
-        <p:nvSpPr>
-          <p:cNvPr id="13" name="Text 10"/>
-          <p:cNvSpPr txBox="1"/>
-          <p:nvPr/>
-        </p:nvSpPr>
-        <p:spPr>
-          <a:xfrm>
-            <a:off x="457200" y="4069080"/>
-            <a:ext cx="1737360" cy="274320"/>
-          </a:xfrm>
-          <a:prstGeom prst="rect">
-            <a:avLst/>
-          </a:prstGeom>
-          <a:noFill/>
-          <a:ln/>
-        </p:spPr>
-        <p:txBody>
-          <a:bodyPr wrap="square" lIns="0" tIns="0" rIns="0" bIns="0" rtlCol="0" anchor="ctr"/>
-          <a:lstStyle/>
-          <a:p>
-            <a:pPr indent="0" marL="0">
-              <a:buNone/>
-            </a:pPr>
-            <a:r>
-              <a:rPr lang="en-US" sz="1000" dirty="0">
-                <a:solidFill>
-                  <a:srgbClr val="B494CB"/>
-                </a:solidFill>
-                <a:latin typeface="Arial" pitchFamily="34" charset="0"/>
-                <a:ea typeface="Arial" pitchFamily="34" charset="-122"/>
-                <a:cs typeface="Arial" pitchFamily="34" charset="-120"/>
-              </a:rPr>
-              <a:t>numbering systems</a:t>
-            </a:r>
-            <a:endParaRPr lang="en-US" sz="1000" dirty="0"/>
-          </a:p>
-        </p:txBody>
-      </p:sp>
-      <p:sp>
-        <p:nvSpPr>
-          <p:cNvPr id="14" name="Text 11"/>
-          <p:cNvSpPr txBox="1"/>
-          <p:nvPr/>
-        </p:nvSpPr>
-        <p:spPr>
-          <a:xfrm>
-            <a:off x="2377440" y="3703320"/>
-            <a:ext cx="6217920" cy="731520"/>
+              <a:rPr lang="en-US" sz="950" dirty="0">
+                <a:solidFill>
+                  <a:srgbClr val="5F5F7A"/>
+                </a:solidFill>
+                <a:latin typeface="Arial" pitchFamily="34" charset="0"/>
+                <a:ea typeface="Arial" pitchFamily="34" charset="-122"/>
+                <a:cs typeface="Arial" pitchFamily="34" charset="-120"/>
+              </a:rPr>
+              <a:t>Who approved, and who signed, both recorded</a:t>
+            </a:r>
+            <a:endParaRPr lang="en-US" sz="950" dirty="0"/>
+          </a:p>
+        </p:txBody>
+      </p:sp>
+      <p:sp>
+        <p:nvSpPr>
+          <p:cNvPr id="13" name="Shape 11"/>
+          <p:cNvSpPr/>
+          <p:nvPr/>
+        </p:nvSpPr>
+        <p:spPr>
+          <a:xfrm>
+            <a:off x="4663440" y="2130552"/>
+            <a:ext cx="146304" cy="146304"/>
+          </a:xfrm>
+          <a:prstGeom prst="ellipse">
+            <a:avLst/>
+          </a:prstGeom>
+          <a:solidFill>
+            <a:srgbClr val="006242"/>
+          </a:solidFill>
+          <a:ln w="12700">
+            <a:solidFill>
+              <a:srgbClr val="006242"/>
+            </a:solidFill>
+            <a:prstDash val="solid"/>
+          </a:ln>
+        </p:spPr>
+      </p:sp>
+      <p:sp>
+        <p:nvSpPr>
+          <p:cNvPr id="14" name="Text 12"/>
+          <p:cNvSpPr txBox="1"/>
+          <p:nvPr/>
+        </p:nvSpPr>
+        <p:spPr>
+          <a:xfrm>
+            <a:off x="4937760" y="2057400"/>
+            <a:ext cx="3749040" cy="256032"/>
+          </a:xfrm>
+          <a:prstGeom prst="rect">
+            <a:avLst/>
+          </a:prstGeom>
+          <a:noFill/>
+          <a:ln/>
+        </p:spPr>
+        <p:txBody>
+          <a:bodyPr wrap="square" lIns="0" tIns="0" rIns="0" bIns="0" rtlCol="0" anchor="ctr"/>
+          <a:lstStyle/>
+          <a:p>
+            <a:pPr indent="0" marL="0">
+              <a:buNone/>
+            </a:pPr>
+            <a:r>
+              <a:rPr lang="en-US" sz="1100" b="1" dirty="0">
+                <a:solidFill>
+                  <a:srgbClr val="14142B"/>
+                </a:solidFill>
+                <a:latin typeface="Arial" pitchFamily="34" charset="0"/>
+                <a:ea typeface="Arial" pitchFamily="34" charset="-122"/>
+                <a:cs typeface="Arial" pitchFamily="34" charset="-120"/>
+              </a:rPr>
+              <a:t>Five overlapping tracking tools</a:t>
+            </a:r>
+            <a:endParaRPr lang="en-US" sz="1100" dirty="0"/>
+          </a:p>
+        </p:txBody>
+      </p:sp>
+      <p:sp>
+        <p:nvSpPr>
+          <p:cNvPr id="15" name="Text 13"/>
+          <p:cNvSpPr txBox="1"/>
+          <p:nvPr/>
+        </p:nvSpPr>
+        <p:spPr>
+          <a:xfrm>
+            <a:off x="4937760" y="2313432"/>
+            <a:ext cx="3749040" cy="384048"/>
           </a:xfrm>
           <a:prstGeom prst="rect">
             <a:avLst/>
@@ -12032,23 +12337,553 @@
               <a:buNone/>
             </a:pPr>
             <a:r>
-              <a:rPr lang="en-US" sz="1150" dirty="0">
-                <a:solidFill>
-                  <a:srgbClr val="B494CB"/>
-                </a:solidFill>
-                <a:latin typeface="Arial" pitchFamily="34" charset="0"/>
-                <a:ea typeface="Arial" pitchFamily="34" charset="-122"/>
-                <a:cs typeface="Arial" pitchFamily="34" charset="-120"/>
-              </a:rPr>
-              <a:t>Levels now sit inside their phase. One journey, not a phase count and a level count.</a:t>
-            </a:r>
-            <a:endParaRPr lang="en-US" sz="1150" dirty="0"/>
-          </a:p>
-        </p:txBody>
-      </p:sp>
-      <p:sp>
-        <p:nvSpPr>
-          <p:cNvPr id="15" name="Text 12"/>
+              <a:rPr lang="en-US" sz="950" dirty="0">
+                <a:solidFill>
+                  <a:srgbClr val="5F5F7A"/>
+                </a:solidFill>
+                <a:latin typeface="Arial" pitchFamily="34" charset="0"/>
+                <a:ea typeface="Arial" pitchFamily="34" charset="-122"/>
+                <a:cs typeface="Arial" pitchFamily="34" charset="-120"/>
+              </a:rPr>
+              <a:t>Merged into one path</a:t>
+            </a:r>
+            <a:endParaRPr lang="en-US" sz="950" dirty="0"/>
+          </a:p>
+        </p:txBody>
+      </p:sp>
+      <p:sp>
+        <p:nvSpPr>
+          <p:cNvPr id="16" name="Shape 14"/>
+          <p:cNvSpPr/>
+          <p:nvPr/>
+        </p:nvSpPr>
+        <p:spPr>
+          <a:xfrm>
+            <a:off x="457200" y="2788920"/>
+            <a:ext cx="146304" cy="146304"/>
+          </a:xfrm>
+          <a:prstGeom prst="ellipse">
+            <a:avLst/>
+          </a:prstGeom>
+          <a:solidFill>
+            <a:srgbClr val="006242"/>
+          </a:solidFill>
+          <a:ln w="12700">
+            <a:solidFill>
+              <a:srgbClr val="006242"/>
+            </a:solidFill>
+            <a:prstDash val="solid"/>
+          </a:ln>
+        </p:spPr>
+      </p:sp>
+      <p:sp>
+        <p:nvSpPr>
+          <p:cNvPr id="17" name="Text 15"/>
+          <p:cNvSpPr txBox="1"/>
+          <p:nvPr/>
+        </p:nvSpPr>
+        <p:spPr>
+          <a:xfrm>
+            <a:off x="731520" y="2715768"/>
+            <a:ext cx="3749040" cy="256032"/>
+          </a:xfrm>
+          <a:prstGeom prst="rect">
+            <a:avLst/>
+          </a:prstGeom>
+          <a:noFill/>
+          <a:ln/>
+        </p:spPr>
+        <p:txBody>
+          <a:bodyPr wrap="square" lIns="0" tIns="0" rIns="0" bIns="0" rtlCol="0" anchor="ctr"/>
+          <a:lstStyle/>
+          <a:p>
+            <a:pPr indent="0" marL="0">
+              <a:buNone/>
+            </a:pPr>
+            <a:r>
+              <a:rPr lang="en-US" sz="1100" b="1" dirty="0">
+                <a:solidFill>
+                  <a:srgbClr val="14142B"/>
+                </a:solidFill>
+                <a:latin typeface="Arial" pitchFamily="34" charset="0"/>
+                <a:ea typeface="Arial" pitchFamily="34" charset="-122"/>
+                <a:cs typeface="Arial" pitchFamily="34" charset="-120"/>
+              </a:rPr>
+              <a:t>Progress shown four ways</a:t>
+            </a:r>
+            <a:endParaRPr lang="en-US" sz="1100" dirty="0"/>
+          </a:p>
+        </p:txBody>
+      </p:sp>
+      <p:sp>
+        <p:nvSpPr>
+          <p:cNvPr id="18" name="Text 16"/>
+          <p:cNvSpPr txBox="1"/>
+          <p:nvPr/>
+        </p:nvSpPr>
+        <p:spPr>
+          <a:xfrm>
+            <a:off x="731520" y="2971800"/>
+            <a:ext cx="3749040" cy="384048"/>
+          </a:xfrm>
+          <a:prstGeom prst="rect">
+            <a:avLst/>
+          </a:prstGeom>
+          <a:noFill/>
+          <a:ln/>
+        </p:spPr>
+        <p:txBody>
+          <a:bodyPr wrap="square" lIns="0" tIns="0" rIns="0" bIns="0" rtlCol="0" anchor="t"/>
+          <a:lstStyle/>
+          <a:p>
+            <a:pPr indent="0" marL="0">
+              <a:lnSpc>
+                <a:spcPct val="125000"/>
+              </a:lnSpc>
+              <a:buNone/>
+            </a:pPr>
+            <a:r>
+              <a:rPr lang="en-US" sz="950" dirty="0">
+                <a:solidFill>
+                  <a:srgbClr val="5F5F7A"/>
+                </a:solidFill>
+                <a:latin typeface="Arial" pitchFamily="34" charset="0"/>
+                <a:ea typeface="Arial" pitchFamily="34" charset="-122"/>
+                <a:cs typeface="Arial" pitchFamily="34" charset="-120"/>
+              </a:rPr>
+              <a:t>One measure: milestones done, plus the indicator</a:t>
+            </a:r>
+            <a:endParaRPr lang="en-US" sz="950" dirty="0"/>
+          </a:p>
+        </p:txBody>
+      </p:sp>
+      <p:sp>
+        <p:nvSpPr>
+          <p:cNvPr id="19" name="Shape 17"/>
+          <p:cNvSpPr/>
+          <p:nvPr/>
+        </p:nvSpPr>
+        <p:spPr>
+          <a:xfrm>
+            <a:off x="4663440" y="2788920"/>
+            <a:ext cx="146304" cy="146304"/>
+          </a:xfrm>
+          <a:prstGeom prst="ellipse">
+            <a:avLst/>
+          </a:prstGeom>
+          <a:solidFill>
+            <a:srgbClr val="006242"/>
+          </a:solidFill>
+          <a:ln w="12700">
+            <a:solidFill>
+              <a:srgbClr val="006242"/>
+            </a:solidFill>
+            <a:prstDash val="solid"/>
+          </a:ln>
+        </p:spPr>
+      </p:sp>
+      <p:sp>
+        <p:nvSpPr>
+          <p:cNvPr id="20" name="Text 18"/>
+          <p:cNvSpPr txBox="1"/>
+          <p:nvPr/>
+        </p:nvSpPr>
+        <p:spPr>
+          <a:xfrm>
+            <a:off x="4937760" y="2715768"/>
+            <a:ext cx="3749040" cy="256032"/>
+          </a:xfrm>
+          <a:prstGeom prst="rect">
+            <a:avLst/>
+          </a:prstGeom>
+          <a:noFill/>
+          <a:ln/>
+        </p:spPr>
+        <p:txBody>
+          <a:bodyPr wrap="square" lIns="0" tIns="0" rIns="0" bIns="0" rtlCol="0" anchor="ctr"/>
+          <a:lstStyle/>
+          <a:p>
+            <a:pPr indent="0" marL="0">
+              <a:buNone/>
+            </a:pPr>
+            <a:r>
+              <a:rPr lang="en-US" sz="1100" b="1" dirty="0">
+                <a:solidFill>
+                  <a:srgbClr val="14142B"/>
+                </a:solidFill>
+                <a:latin typeface="Arial" pitchFamily="34" charset="0"/>
+                <a:ea typeface="Arial" pitchFamily="34" charset="-122"/>
+                <a:cs typeface="Arial" pitchFamily="34" charset="-120"/>
+              </a:rPr>
+              <a:t>Placeholder text in the demo</a:t>
+            </a:r>
+            <a:endParaRPr lang="en-US" sz="1100" dirty="0"/>
+          </a:p>
+        </p:txBody>
+      </p:sp>
+      <p:sp>
+        <p:nvSpPr>
+          <p:cNvPr id="21" name="Text 19"/>
+          <p:cNvSpPr txBox="1"/>
+          <p:nvPr/>
+        </p:nvSpPr>
+        <p:spPr>
+          <a:xfrm>
+            <a:off x="4937760" y="2971800"/>
+            <a:ext cx="3749040" cy="384048"/>
+          </a:xfrm>
+          <a:prstGeom prst="rect">
+            <a:avLst/>
+          </a:prstGeom>
+          <a:noFill/>
+          <a:ln/>
+        </p:spPr>
+        <p:txBody>
+          <a:bodyPr wrap="square" lIns="0" tIns="0" rIns="0" bIns="0" rtlCol="0" anchor="t"/>
+          <a:lstStyle/>
+          <a:p>
+            <a:pPr indent="0" marL="0">
+              <a:lnSpc>
+                <a:spcPct val="125000"/>
+              </a:lnSpc>
+              <a:buNone/>
+            </a:pPr>
+            <a:r>
+              <a:rPr lang="en-US" sz="950" dirty="0">
+                <a:solidFill>
+                  <a:srgbClr val="5F5F7A"/>
+                </a:solidFill>
+                <a:latin typeface="Arial" pitchFamily="34" charset="0"/>
+                <a:ea typeface="Arial" pitchFamily="34" charset="-122"/>
+                <a:cs typeface="Arial" pitchFamily="34" charset="-120"/>
+              </a:rPr>
+              <a:t>One realistic project, written end to end</a:t>
+            </a:r>
+            <a:endParaRPr lang="en-US" sz="950" dirty="0"/>
+          </a:p>
+        </p:txBody>
+      </p:sp>
+      <p:sp>
+        <p:nvSpPr>
+          <p:cNvPr id="22" name="Shape 20"/>
+          <p:cNvSpPr/>
+          <p:nvPr/>
+        </p:nvSpPr>
+        <p:spPr>
+          <a:xfrm>
+            <a:off x="457200" y="3447288"/>
+            <a:ext cx="146304" cy="146304"/>
+          </a:xfrm>
+          <a:prstGeom prst="ellipse">
+            <a:avLst/>
+          </a:prstGeom>
+          <a:solidFill>
+            <a:srgbClr val="006242"/>
+          </a:solidFill>
+          <a:ln w="12700">
+            <a:solidFill>
+              <a:srgbClr val="006242"/>
+            </a:solidFill>
+            <a:prstDash val="solid"/>
+          </a:ln>
+        </p:spPr>
+      </p:sp>
+      <p:sp>
+        <p:nvSpPr>
+          <p:cNvPr id="23" name="Text 21"/>
+          <p:cNvSpPr txBox="1"/>
+          <p:nvPr/>
+        </p:nvSpPr>
+        <p:spPr>
+          <a:xfrm>
+            <a:off x="731520" y="3374136"/>
+            <a:ext cx="3749040" cy="256032"/>
+          </a:xfrm>
+          <a:prstGeom prst="rect">
+            <a:avLst/>
+          </a:prstGeom>
+          <a:noFill/>
+          <a:ln/>
+        </p:spPr>
+        <p:txBody>
+          <a:bodyPr wrap="square" lIns="0" tIns="0" rIns="0" bIns="0" rtlCol="0" anchor="ctr"/>
+          <a:lstStyle/>
+          <a:p>
+            <a:pPr indent="0" marL="0">
+              <a:buNone/>
+            </a:pPr>
+            <a:r>
+              <a:rPr lang="en-US" sz="1100" b="1" dirty="0">
+                <a:solidFill>
+                  <a:srgbClr val="14142B"/>
+                </a:solidFill>
+                <a:latin typeface="Arial" pitchFamily="34" charset="0"/>
+                <a:ea typeface="Arial" pitchFamily="34" charset="-122"/>
+                <a:cs typeface="Arial" pitchFamily="34" charset="-120"/>
+              </a:rPr>
+              <a:t>Working titles, empty pages</a:t>
+            </a:r>
+            <a:endParaRPr lang="en-US" sz="1100" dirty="0"/>
+          </a:p>
+        </p:txBody>
+      </p:sp>
+      <p:sp>
+        <p:nvSpPr>
+          <p:cNvPr id="24" name="Text 22"/>
+          <p:cNvSpPr txBox="1"/>
+          <p:nvPr/>
+        </p:nvSpPr>
+        <p:spPr>
+          <a:xfrm>
+            <a:off x="731520" y="3630168"/>
+            <a:ext cx="3749040" cy="384048"/>
+          </a:xfrm>
+          <a:prstGeom prst="rect">
+            <a:avLst/>
+          </a:prstGeom>
+          <a:noFill/>
+          <a:ln/>
+        </p:spPr>
+        <p:txBody>
+          <a:bodyPr wrap="square" lIns="0" tIns="0" rIns="0" bIns="0" rtlCol="0" anchor="t"/>
+          <a:lstStyle/>
+          <a:p>
+            <a:pPr indent="0" marL="0">
+              <a:lnSpc>
+                <a:spcPct val="125000"/>
+              </a:lnSpc>
+              <a:buNone/>
+            </a:pPr>
+            <a:r>
+              <a:rPr lang="en-US" sz="950" dirty="0">
+                <a:solidFill>
+                  <a:srgbClr val="5F5F7A"/>
+                </a:solidFill>
+                <a:latin typeface="Arial" pitchFamily="34" charset="0"/>
+                <a:ea typeface="Arial" pitchFamily="34" charset="-122"/>
+                <a:cs typeface="Arial" pitchFamily="34" charset="-120"/>
+              </a:rPr>
+              <a:t>Renamed or hidden until written</a:t>
+            </a:r>
+            <a:endParaRPr lang="en-US" sz="950" dirty="0"/>
+          </a:p>
+        </p:txBody>
+      </p:sp>
+      <p:sp>
+        <p:nvSpPr>
+          <p:cNvPr id="25" name="Shape 23"/>
+          <p:cNvSpPr/>
+          <p:nvPr/>
+        </p:nvSpPr>
+        <p:spPr>
+          <a:xfrm>
+            <a:off x="4663440" y="3447288"/>
+            <a:ext cx="146304" cy="146304"/>
+          </a:xfrm>
+          <a:prstGeom prst="ellipse">
+            <a:avLst/>
+          </a:prstGeom>
+          <a:solidFill>
+            <a:srgbClr val="006242"/>
+          </a:solidFill>
+          <a:ln w="12700">
+            <a:solidFill>
+              <a:srgbClr val="006242"/>
+            </a:solidFill>
+            <a:prstDash val="solid"/>
+          </a:ln>
+        </p:spPr>
+      </p:sp>
+      <p:sp>
+        <p:nvSpPr>
+          <p:cNvPr id="26" name="Text 24"/>
+          <p:cNvSpPr txBox="1"/>
+          <p:nvPr/>
+        </p:nvSpPr>
+        <p:spPr>
+          <a:xfrm>
+            <a:off x="4937760" y="3374136"/>
+            <a:ext cx="3749040" cy="256032"/>
+          </a:xfrm>
+          <a:prstGeom prst="rect">
+            <a:avLst/>
+          </a:prstGeom>
+          <a:noFill/>
+          <a:ln/>
+        </p:spPr>
+        <p:txBody>
+          <a:bodyPr wrap="square" lIns="0" tIns="0" rIns="0" bIns="0" rtlCol="0" anchor="ctr"/>
+          <a:lstStyle/>
+          <a:p>
+            <a:pPr indent="0" marL="0">
+              <a:buNone/>
+            </a:pPr>
+            <a:r>
+              <a:rPr lang="en-US" sz="1100" b="1" dirty="0">
+                <a:solidFill>
+                  <a:srgbClr val="14142B"/>
+                </a:solidFill>
+                <a:latin typeface="Arial" pitchFamily="34" charset="0"/>
+                <a:ea typeface="Arial" pitchFamily="34" charset="-122"/>
+                <a:cs typeface="Arial" pitchFamily="34" charset="-120"/>
+              </a:rPr>
+              <a:t>Developer instruction on screen</a:t>
+            </a:r>
+            <a:endParaRPr lang="en-US" sz="1100" dirty="0"/>
+          </a:p>
+        </p:txBody>
+      </p:sp>
+      <p:sp>
+        <p:nvSpPr>
+          <p:cNvPr id="27" name="Text 25"/>
+          <p:cNvSpPr txBox="1"/>
+          <p:nvPr/>
+        </p:nvSpPr>
+        <p:spPr>
+          <a:xfrm>
+            <a:off x="4937760" y="3630168"/>
+            <a:ext cx="3749040" cy="384048"/>
+          </a:xfrm>
+          <a:prstGeom prst="rect">
+            <a:avLst/>
+          </a:prstGeom>
+          <a:noFill/>
+          <a:ln/>
+        </p:spPr>
+        <p:txBody>
+          <a:bodyPr wrap="square" lIns="0" tIns="0" rIns="0" bIns="0" rtlCol="0" anchor="t"/>
+          <a:lstStyle/>
+          <a:p>
+            <a:pPr indent="0" marL="0">
+              <a:lnSpc>
+                <a:spcPct val="125000"/>
+              </a:lnSpc>
+              <a:buNone/>
+            </a:pPr>
+            <a:r>
+              <a:rPr lang="en-US" sz="950" dirty="0">
+                <a:solidFill>
+                  <a:srgbClr val="5F5F7A"/>
+                </a:solidFill>
+                <a:latin typeface="Arial" pitchFamily="34" charset="0"/>
+                <a:ea typeface="Arial" pitchFamily="34" charset="-122"/>
+                <a:cs typeface="Arial" pitchFamily="34" charset="-120"/>
+              </a:rPr>
+              <a:t>Removed</a:t>
+            </a:r>
+            <a:endParaRPr lang="en-US" sz="950" dirty="0"/>
+          </a:p>
+        </p:txBody>
+      </p:sp>
+      <p:sp>
+        <p:nvSpPr>
+          <p:cNvPr id="28" name="Shape 26"/>
+          <p:cNvSpPr/>
+          <p:nvPr/>
+        </p:nvSpPr>
+        <p:spPr>
+          <a:xfrm>
+            <a:off x="457200" y="4105656"/>
+            <a:ext cx="146304" cy="146304"/>
+          </a:xfrm>
+          <a:prstGeom prst="ellipse">
+            <a:avLst/>
+          </a:prstGeom>
+          <a:solidFill>
+            <a:srgbClr val="006242"/>
+          </a:solidFill>
+          <a:ln w="12700">
+            <a:solidFill>
+              <a:srgbClr val="006242"/>
+            </a:solidFill>
+            <a:prstDash val="solid"/>
+          </a:ln>
+        </p:spPr>
+      </p:sp>
+      <p:sp>
+        <p:nvSpPr>
+          <p:cNvPr id="29" name="Text 27"/>
+          <p:cNvSpPr txBox="1"/>
+          <p:nvPr/>
+        </p:nvSpPr>
+        <p:spPr>
+          <a:xfrm>
+            <a:off x="731520" y="4032504"/>
+            <a:ext cx="3749040" cy="256032"/>
+          </a:xfrm>
+          <a:prstGeom prst="rect">
+            <a:avLst/>
+          </a:prstGeom>
+          <a:noFill/>
+          <a:ln/>
+        </p:spPr>
+        <p:txBody>
+          <a:bodyPr wrap="square" lIns="0" tIns="0" rIns="0" bIns="0" rtlCol="0" anchor="ctr"/>
+          <a:lstStyle/>
+          <a:p>
+            <a:pPr indent="0" marL="0">
+              <a:buNone/>
+            </a:pPr>
+            <a:r>
+              <a:rPr lang="en-US" sz="1100" b="1" dirty="0">
+                <a:solidFill>
+                  <a:srgbClr val="14142B"/>
+                </a:solidFill>
+                <a:latin typeface="Arial" pitchFamily="34" charset="0"/>
+                <a:ea typeface="Arial" pitchFamily="34" charset="-122"/>
+                <a:cs typeface="Arial" pitchFamily="34" charset="-120"/>
+              </a:rPr>
+              <a:t>Demo account was admin only</a:t>
+            </a:r>
+            <a:endParaRPr lang="en-US" sz="1100" dirty="0"/>
+          </a:p>
+        </p:txBody>
+      </p:sp>
+      <p:sp>
+        <p:nvSpPr>
+          <p:cNvPr id="30" name="Text 28"/>
+          <p:cNvSpPr txBox="1"/>
+          <p:nvPr/>
+        </p:nvSpPr>
+        <p:spPr>
+          <a:xfrm>
+            <a:off x="731520" y="4288536"/>
+            <a:ext cx="3749040" cy="384048"/>
+          </a:xfrm>
+          <a:prstGeom prst="rect">
+            <a:avLst/>
+          </a:prstGeom>
+          <a:noFill/>
+          <a:ln/>
+        </p:spPr>
+        <p:txBody>
+          <a:bodyPr wrap="square" lIns="0" tIns="0" rIns="0" bIns="0" rtlCol="0" anchor="t"/>
+          <a:lstStyle/>
+          <a:p>
+            <a:pPr indent="0" marL="0">
+              <a:lnSpc>
+                <a:spcPct val="125000"/>
+              </a:lnSpc>
+              <a:buNone/>
+            </a:pPr>
+            <a:r>
+              <a:rPr lang="en-US" sz="950" dirty="0">
+                <a:solidFill>
+                  <a:srgbClr val="5F5F7A"/>
+                </a:solidFill>
+                <a:latin typeface="Arial" pitchFamily="34" charset="0"/>
+                <a:ea typeface="Arial" pitchFamily="34" charset="-122"/>
+                <a:cs typeface="Arial" pitchFamily="34" charset="-120"/>
+              </a:rPr>
+              <a:t>Separate student, coach and admin accounts</a:t>
+            </a:r>
+            <a:endParaRPr lang="en-US" sz="950" dirty="0"/>
+          </a:p>
+        </p:txBody>
+      </p:sp>
+      <p:sp>
+        <p:nvSpPr>
+          <p:cNvPr id="31" name="Text 29"/>
           <p:cNvSpPr txBox="1"/>
           <p:nvPr/>
         </p:nvSpPr>
@@ -12073,7 +12908,7 @@
             <a:r>
               <a:rPr lang="en-US" sz="850" dirty="0">
                 <a:solidFill>
-                  <a:srgbClr val="B494CB"/>
+                  <a:srgbClr val="5F5F7A"/>
                 </a:solidFill>
                 <a:latin typeface="Arial" pitchFamily="34" charset="0"/>
                 <a:ea typeface="Arial" pitchFamily="34" charset="-122"/>
@@ -12087,7 +12922,7 @@
       </p:sp>
       <p:sp>
         <p:nvSpPr>
-          <p:cNvPr id="16" name="Text 13"/>
+          <p:cNvPr id="32" name="Text 30"/>
           <p:cNvSpPr txBox="1"/>
           <p:nvPr/>
         </p:nvSpPr>
@@ -12112,7 +12947,7 @@
             <a:r>
               <a:rPr lang="en-US" sz="850" dirty="0">
                 <a:solidFill>
-                  <a:srgbClr val="B494CB"/>
+                  <a:srgbClr val="5F5F7A"/>
                 </a:solidFill>
                 <a:latin typeface="Arial" pitchFamily="34" charset="0"/>
                 <a:ea typeface="Arial" pitchFamily="34" charset="-122"/>

--- a/docs/IMPACT-Release-1-Demo.pptx
+++ b/docs/IMPACT-Release-1-Demo.pptx
@@ -603,7 +603,7 @@
           <a:p>
             <a:r>
               <a:rPr lang="en-US" dirty="0"/>
-              <a:t>The 54 blank practice pages are now a visible number on the Staff page. That is content work for coaches, not code.</a:t>
+              <a:t>The 53 blank practice pages are now a visible number on the Programme page. That is content work for coaches, not code.</a:t>
             </a:r>
             <a:endParaRPr lang="en-US" dirty="0"/>
           </a:p>
@@ -2595,7 +2595,7 @@
                 <a:ea typeface="Arial" pitchFamily="34" charset="-122"/>
                 <a:cs typeface="Arial" pitchFamily="34" charset="-120"/>
               </a:rPr>
-              <a:t>70 → 16</a:t>
+              <a:t>69 → 16</a:t>
             </a:r>
             <a:endParaRPr lang="en-US" sz="2400" dirty="0"/>
           </a:p>
@@ -2676,7 +2676,7 @@
                 <a:ea typeface="Arial" pitchFamily="34" charset="-122"/>
                 <a:cs typeface="Arial" pitchFamily="34" charset="-120"/>
               </a:rPr>
-              <a:t>54 were blank pages. Now hidden from students, surfaced to coaches who can write them.</a:t>
+              <a:t>53 were blank pages. Now hidden from students, surfaced to coaches who can write them.</a:t>
             </a:r>
             <a:endParaRPr lang="en-US" sz="1150" dirty="0"/>
           </a:p>
@@ -4326,7 +4326,7 @@
                 <a:ea typeface="Arial" pitchFamily="34" charset="-122"/>
                 <a:cs typeface="Arial" pitchFamily="34" charset="-120"/>
               </a:rPr>
-              <a:t>The 54 blank practices, and a real brief on each catalogue entry. Content work with the coaches, not code.</a:t>
+              <a:t>The 53 blank practices, and a real brief on each catalogue entry. Content work with the coaches, not code.</a:t>
             </a:r>
             <a:endParaRPr lang="en-US" sz="1000" dirty="0"/>
           </a:p>
@@ -5159,7 +5159,7 @@
                 <a:ea typeface="Arial" pitchFamily="34" charset="-122"/>
                 <a:cs typeface="Arial" pitchFamily="34" charset="-120"/>
               </a:rPr>
-              <a:t>54 practice pages and 92 catalogue briefs. Blocks Release 3.</a:t>
+              <a:t>53 practice pages and 92 catalogue briefs. Blocks Release 3.</a:t>
             </a:r>
             <a:endParaRPr lang="en-US" sz="1000" dirty="0"/>
           </a:p>
